--- a/report/src/src.pptx
+++ b/report/src/src.pptx
@@ -8,8 +8,13 @@
     <p:sldId id="256" r:id="rId2"/>
     <p:sldId id="257" r:id="rId3"/>
     <p:sldId id="260" r:id="rId4"/>
-    <p:sldId id="258" r:id="rId5"/>
-    <p:sldId id="259" r:id="rId6"/>
+    <p:sldId id="264" r:id="rId5"/>
+    <p:sldId id="265" r:id="rId6"/>
+    <p:sldId id="258" r:id="rId7"/>
+    <p:sldId id="261" r:id="rId8"/>
+    <p:sldId id="262" r:id="rId9"/>
+    <p:sldId id="263" r:id="rId10"/>
+    <p:sldId id="259" r:id="rId11"/>
   </p:sldIdLst>
   <p:sldSz cx="9144000" cy="5143500" type="screen16x9"/>
   <p:notesSz cx="6858000" cy="9144000"/>
@@ -108,6 +113,11 @@
       </a:defRPr>
     </a:lvl9pPr>
   </p:defaultTextStyle>
+  <p:extLst>
+    <p:ext uri="{EFAFB233-063F-42B5-8137-9DF3F51BA10A}">
+      <p15:sldGuideLst xmlns:p15="http://schemas.microsoft.com/office/powerpoint/2012/main"/>
+    </p:ext>
+  </p:extLst>
 </p:presentation>
 </file>
 
@@ -3816,6 +3826,42 @@
 </p:sld>
 </file>
 
+<file path=ppt/slides/slide10.xml><?xml version="1.0" encoding="utf-8"?>
+<p:sld xmlns:a="http://schemas.openxmlformats.org/drawingml/2006/main" xmlns:r="http://schemas.openxmlformats.org/officeDocument/2006/relationships" xmlns:p="http://schemas.openxmlformats.org/presentationml/2006/main">
+  <p:cSld>
+    <p:spTree>
+      <p:nvGrpSpPr>
+        <p:cNvPr id="1" name="">
+          <a:extLst>
+            <a:ext uri="{FF2B5EF4-FFF2-40B4-BE49-F238E27FC236}">
+              <a16:creationId xmlns:a16="http://schemas.microsoft.com/office/drawing/2014/main" id="{43A60FA7-66B9-687B-16BE-83478BC4D874}"/>
+            </a:ext>
+          </a:extLst>
+        </p:cNvPr>
+        <p:cNvGrpSpPr/>
+        <p:nvPr/>
+      </p:nvGrpSpPr>
+      <p:grpSpPr>
+        <a:xfrm>
+          <a:off x="0" y="0"/>
+          <a:ext cx="0" cy="0"/>
+          <a:chOff x="0" y="0"/>
+          <a:chExt cx="0" cy="0"/>
+        </a:xfrm>
+      </p:grpSpPr>
+    </p:spTree>
+    <p:extLst>
+      <p:ext uri="{BB962C8B-B14F-4D97-AF65-F5344CB8AC3E}">
+        <p14:creationId xmlns:p14="http://schemas.microsoft.com/office/powerpoint/2010/main" val="3653332716"/>
+      </p:ext>
+    </p:extLst>
+  </p:cSld>
+  <p:clrMapOvr>
+    <a:masterClrMapping/>
+  </p:clrMapOvr>
+</p:sld>
+</file>
+
 <file path=ppt/slides/slide2.xml><?xml version="1.0" encoding="utf-8"?>
 <p:sld xmlns:a="http://schemas.openxmlformats.org/drawingml/2006/main" xmlns:r="http://schemas.openxmlformats.org/officeDocument/2006/relationships" xmlns:p="http://schemas.openxmlformats.org/presentationml/2006/main">
   <p:cSld>
@@ -6570,6 +6616,3461 @@
         <p:cNvPr id="1" name="">
           <a:extLst>
             <a:ext uri="{FF2B5EF4-FFF2-40B4-BE49-F238E27FC236}">
+              <a16:creationId xmlns:a16="http://schemas.microsoft.com/office/drawing/2014/main" id="{E77B8F88-7E9F-7AEC-4FDB-8AAC5AF222F4}"/>
+            </a:ext>
+          </a:extLst>
+        </p:cNvPr>
+        <p:cNvGrpSpPr/>
+        <p:nvPr/>
+      </p:nvGrpSpPr>
+      <p:grpSpPr>
+        <a:xfrm>
+          <a:off x="0" y="0"/>
+          <a:ext cx="0" cy="0"/>
+          <a:chOff x="0" y="0"/>
+          <a:chExt cx="0" cy="0"/>
+        </a:xfrm>
+      </p:grpSpPr>
+      <p:sp>
+        <p:nvSpPr>
+          <p:cNvPr id="4" name="流程图: 过程 3">
+            <a:extLst>
+              <a:ext uri="{FF2B5EF4-FFF2-40B4-BE49-F238E27FC236}">
+                <a16:creationId xmlns:a16="http://schemas.microsoft.com/office/drawing/2014/main" id="{2058943B-8232-E4A7-BB43-C025C4BFB99C}"/>
+              </a:ext>
+            </a:extLst>
+          </p:cNvPr>
+          <p:cNvSpPr/>
+          <p:nvPr/>
+        </p:nvSpPr>
+        <p:spPr>
+          <a:xfrm>
+            <a:off x="1602363" y="957719"/>
+            <a:ext cx="1120078" cy="248209"/>
+          </a:xfrm>
+          <a:prstGeom prst="flowChartProcess">
+            <a:avLst/>
+          </a:prstGeom>
+          <a:solidFill>
+            <a:schemeClr val="accent1">
+              <a:lumMod val="60000"/>
+              <a:lumOff val="40000"/>
+            </a:schemeClr>
+          </a:solidFill>
+        </p:spPr>
+        <p:style>
+          <a:lnRef idx="2">
+            <a:schemeClr val="accent1">
+              <a:shade val="15000"/>
+            </a:schemeClr>
+          </a:lnRef>
+          <a:fillRef idx="1">
+            <a:schemeClr val="accent1"/>
+          </a:fillRef>
+          <a:effectRef idx="0">
+            <a:schemeClr val="accent1"/>
+          </a:effectRef>
+          <a:fontRef idx="minor">
+            <a:schemeClr val="lt1"/>
+          </a:fontRef>
+        </p:style>
+        <p:txBody>
+          <a:bodyPr rtlCol="0" anchor="ctr"/>
+          <a:lstStyle/>
+          <a:p>
+            <a:pPr algn="ctr"/>
+            <a:r>
+              <a:rPr lang="en-US" altLang="zh-CN" sz="1013" b="1" dirty="0">
+                <a:solidFill>
+                  <a:schemeClr val="tx1"/>
+                </a:solidFill>
+              </a:rPr>
+              <a:t>ROS2</a:t>
+            </a:r>
+            <a:r>
+              <a:rPr lang="zh-CN" altLang="en-US" sz="1013" b="1" dirty="0">
+                <a:solidFill>
+                  <a:schemeClr val="tx1"/>
+                </a:solidFill>
+              </a:rPr>
+              <a:t>发现</a:t>
+            </a:r>
+            <a:r>
+              <a:rPr lang="en-US" altLang="zh-CN" sz="1013" b="1" dirty="0">
+                <a:solidFill>
+                  <a:schemeClr val="tx1"/>
+                </a:solidFill>
+              </a:rPr>
+              <a:t>/CLI</a:t>
+            </a:r>
+            <a:endParaRPr lang="zh-CN" altLang="en-US" sz="1013" b="1" dirty="0">
+              <a:solidFill>
+                <a:schemeClr val="tx1"/>
+              </a:solidFill>
+            </a:endParaRPr>
+          </a:p>
+        </p:txBody>
+      </p:sp>
+      <p:sp>
+        <p:nvSpPr>
+          <p:cNvPr id="5" name="流程图: 过程 4">
+            <a:extLst>
+              <a:ext uri="{FF2B5EF4-FFF2-40B4-BE49-F238E27FC236}">
+                <a16:creationId xmlns:a16="http://schemas.microsoft.com/office/drawing/2014/main" id="{F5E7F9AF-D918-D52E-8CA9-FA322412B369}"/>
+              </a:ext>
+            </a:extLst>
+          </p:cNvPr>
+          <p:cNvSpPr/>
+          <p:nvPr/>
+        </p:nvSpPr>
+        <p:spPr>
+          <a:xfrm>
+            <a:off x="3386388" y="946166"/>
+            <a:ext cx="1185612" cy="259761"/>
+          </a:xfrm>
+          <a:prstGeom prst="flowChartProcess">
+            <a:avLst/>
+          </a:prstGeom>
+          <a:solidFill>
+            <a:schemeClr val="accent2">
+              <a:lumMod val="40000"/>
+              <a:lumOff val="60000"/>
+            </a:schemeClr>
+          </a:solidFill>
+        </p:spPr>
+        <p:style>
+          <a:lnRef idx="2">
+            <a:schemeClr val="accent1">
+              <a:shade val="15000"/>
+            </a:schemeClr>
+          </a:lnRef>
+          <a:fillRef idx="1">
+            <a:schemeClr val="accent1"/>
+          </a:fillRef>
+          <a:effectRef idx="0">
+            <a:schemeClr val="accent1"/>
+          </a:effectRef>
+          <a:fontRef idx="minor">
+            <a:schemeClr val="lt1"/>
+          </a:fontRef>
+        </p:style>
+        <p:txBody>
+          <a:bodyPr rtlCol="0" anchor="ctr"/>
+          <a:lstStyle/>
+          <a:p>
+            <a:pPr algn="ctr"/>
+            <a:r>
+              <a:rPr lang="en-US" altLang="zh-CN" sz="1013" b="1" dirty="0">
+                <a:solidFill>
+                  <a:schemeClr val="tx1"/>
+                </a:solidFill>
+              </a:rPr>
+              <a:t>/</a:t>
+            </a:r>
+            <a:r>
+              <a:rPr lang="en-US" altLang="zh-CN" sz="1013" b="1" dirty="0" err="1">
+                <a:solidFill>
+                  <a:schemeClr val="tx1"/>
+                </a:solidFill>
+              </a:rPr>
+              <a:t>joint_states</a:t>
+            </a:r>
+            <a:endParaRPr lang="en-US" altLang="zh-CN" sz="1013" b="1" dirty="0">
+              <a:solidFill>
+                <a:schemeClr val="tx1"/>
+              </a:solidFill>
+            </a:endParaRPr>
+          </a:p>
+        </p:txBody>
+      </p:sp>
+      <p:sp>
+        <p:nvSpPr>
+          <p:cNvPr id="20" name="流程图: 过程 19">
+            <a:extLst>
+              <a:ext uri="{FF2B5EF4-FFF2-40B4-BE49-F238E27FC236}">
+                <a16:creationId xmlns:a16="http://schemas.microsoft.com/office/drawing/2014/main" id="{C7452DF6-34A0-7E87-4245-2F8BA59BC3D4}"/>
+              </a:ext>
+            </a:extLst>
+          </p:cNvPr>
+          <p:cNvSpPr/>
+          <p:nvPr/>
+        </p:nvSpPr>
+        <p:spPr>
+          <a:xfrm>
+            <a:off x="5054741" y="963497"/>
+            <a:ext cx="1926857" cy="248209"/>
+          </a:xfrm>
+          <a:prstGeom prst="flowChartProcess">
+            <a:avLst/>
+          </a:prstGeom>
+          <a:solidFill>
+            <a:schemeClr val="accent1">
+              <a:lumMod val="60000"/>
+              <a:lumOff val="40000"/>
+            </a:schemeClr>
+          </a:solidFill>
+        </p:spPr>
+        <p:style>
+          <a:lnRef idx="2">
+            <a:schemeClr val="accent1">
+              <a:shade val="15000"/>
+            </a:schemeClr>
+          </a:lnRef>
+          <a:fillRef idx="1">
+            <a:schemeClr val="accent1"/>
+          </a:fillRef>
+          <a:effectRef idx="0">
+            <a:schemeClr val="accent1"/>
+          </a:effectRef>
+          <a:fontRef idx="minor">
+            <a:schemeClr val="lt1"/>
+          </a:fontRef>
+        </p:style>
+        <p:txBody>
+          <a:bodyPr rtlCol="0" anchor="ctr"/>
+          <a:lstStyle/>
+          <a:p>
+            <a:pPr algn="ctr"/>
+            <a:r>
+              <a:rPr lang="en-US" altLang="zh-CN" sz="1013" b="1" dirty="0" err="1">
+                <a:solidFill>
+                  <a:schemeClr val="tx1"/>
+                </a:solidFill>
+              </a:rPr>
+              <a:t>robot_state_publisher</a:t>
+            </a:r>
+            <a:endParaRPr lang="zh-CN" altLang="en-US" sz="1013" b="1" dirty="0">
+              <a:solidFill>
+                <a:schemeClr val="tx1"/>
+              </a:solidFill>
+            </a:endParaRPr>
+          </a:p>
+        </p:txBody>
+      </p:sp>
+      <p:sp>
+        <p:nvSpPr>
+          <p:cNvPr id="21" name="流程图: 过程 20">
+            <a:extLst>
+              <a:ext uri="{FF2B5EF4-FFF2-40B4-BE49-F238E27FC236}">
+                <a16:creationId xmlns:a16="http://schemas.microsoft.com/office/drawing/2014/main" id="{B3D28377-D476-0534-12FA-09289282C1EE}"/>
+              </a:ext>
+            </a:extLst>
+          </p:cNvPr>
+          <p:cNvSpPr/>
+          <p:nvPr/>
+        </p:nvSpPr>
+        <p:spPr>
+          <a:xfrm>
+            <a:off x="413168" y="951942"/>
+            <a:ext cx="836152" cy="259761"/>
+          </a:xfrm>
+          <a:prstGeom prst="flowChartProcess">
+            <a:avLst/>
+          </a:prstGeom>
+          <a:solidFill>
+            <a:schemeClr val="accent3">
+              <a:lumMod val="40000"/>
+              <a:lumOff val="60000"/>
+            </a:schemeClr>
+          </a:solidFill>
+        </p:spPr>
+        <p:style>
+          <a:lnRef idx="2">
+            <a:schemeClr val="accent1">
+              <a:shade val="15000"/>
+            </a:schemeClr>
+          </a:lnRef>
+          <a:fillRef idx="1">
+            <a:schemeClr val="accent1"/>
+          </a:fillRef>
+          <a:effectRef idx="0">
+            <a:schemeClr val="accent1"/>
+          </a:effectRef>
+          <a:fontRef idx="minor">
+            <a:schemeClr val="lt1"/>
+          </a:fontRef>
+        </p:style>
+        <p:txBody>
+          <a:bodyPr rtlCol="0" anchor="ctr"/>
+          <a:lstStyle/>
+          <a:p>
+            <a:pPr algn="ctr"/>
+            <a:r>
+              <a:rPr lang="zh-CN" altLang="en-US" sz="1013" b="1" dirty="0">
+                <a:solidFill>
+                  <a:schemeClr val="tx1"/>
+                </a:solidFill>
+              </a:rPr>
+              <a:t>攻击者</a:t>
+            </a:r>
+            <a:endParaRPr lang="en-US" altLang="zh-CN" sz="1013" b="1" dirty="0">
+              <a:solidFill>
+                <a:schemeClr val="tx1"/>
+              </a:solidFill>
+            </a:endParaRPr>
+          </a:p>
+        </p:txBody>
+      </p:sp>
+      <p:sp>
+        <p:nvSpPr>
+          <p:cNvPr id="22" name="流程图: 过程 21">
+            <a:extLst>
+              <a:ext uri="{FF2B5EF4-FFF2-40B4-BE49-F238E27FC236}">
+                <a16:creationId xmlns:a16="http://schemas.microsoft.com/office/drawing/2014/main" id="{91EF29F2-A9E4-547B-8656-D2B3ED92C50F}"/>
+              </a:ext>
+            </a:extLst>
+          </p:cNvPr>
+          <p:cNvSpPr/>
+          <p:nvPr/>
+        </p:nvSpPr>
+        <p:spPr>
+          <a:xfrm>
+            <a:off x="7464339" y="963496"/>
+            <a:ext cx="1185611" cy="248209"/>
+          </a:xfrm>
+          <a:prstGeom prst="flowChartProcess">
+            <a:avLst/>
+          </a:prstGeom>
+          <a:solidFill>
+            <a:schemeClr val="accent1">
+              <a:lumMod val="60000"/>
+              <a:lumOff val="40000"/>
+            </a:schemeClr>
+          </a:solidFill>
+        </p:spPr>
+        <p:style>
+          <a:lnRef idx="2">
+            <a:schemeClr val="accent1">
+              <a:shade val="15000"/>
+            </a:schemeClr>
+          </a:lnRef>
+          <a:fillRef idx="1">
+            <a:schemeClr val="accent1"/>
+          </a:fillRef>
+          <a:effectRef idx="0">
+            <a:schemeClr val="accent1"/>
+          </a:effectRef>
+          <a:fontRef idx="minor">
+            <a:schemeClr val="lt1"/>
+          </a:fontRef>
+        </p:style>
+        <p:txBody>
+          <a:bodyPr rtlCol="0" anchor="ctr"/>
+          <a:lstStyle/>
+          <a:p>
+            <a:pPr algn="ctr"/>
+            <a:r>
+              <a:rPr lang="en-US" altLang="zh-CN" sz="1013" b="1" dirty="0">
+                <a:solidFill>
+                  <a:schemeClr val="tx1"/>
+                </a:solidFill>
+              </a:rPr>
+              <a:t>RViz</a:t>
+            </a:r>
+            <a:endParaRPr lang="zh-CN" altLang="en-US" sz="1013" b="1" dirty="0">
+              <a:solidFill>
+                <a:schemeClr val="tx1"/>
+              </a:solidFill>
+            </a:endParaRPr>
+          </a:p>
+        </p:txBody>
+      </p:sp>
+      <p:cxnSp>
+        <p:nvCxnSpPr>
+          <p:cNvPr id="10" name="直接连接符 9">
+            <a:extLst>
+              <a:ext uri="{FF2B5EF4-FFF2-40B4-BE49-F238E27FC236}">
+                <a16:creationId xmlns:a16="http://schemas.microsoft.com/office/drawing/2014/main" id="{F8BE2243-EF97-76C5-C2DF-23DE74711024}"/>
+              </a:ext>
+            </a:extLst>
+          </p:cNvPr>
+          <p:cNvCxnSpPr>
+            <a:stCxn id="21" idx="2"/>
+          </p:cNvCxnSpPr>
+          <p:nvPr/>
+        </p:nvCxnSpPr>
+        <p:spPr>
+          <a:xfrm>
+            <a:off x="831244" y="1211703"/>
+            <a:ext cx="0" cy="3546151"/>
+          </a:xfrm>
+          <a:prstGeom prst="line">
+            <a:avLst/>
+          </a:prstGeom>
+          <a:ln w="19050">
+            <a:solidFill>
+              <a:schemeClr val="bg2">
+                <a:lumMod val="50000"/>
+              </a:schemeClr>
+            </a:solidFill>
+            <a:prstDash val="sysDash"/>
+          </a:ln>
+        </p:spPr>
+        <p:style>
+          <a:lnRef idx="1">
+            <a:schemeClr val="accent1"/>
+          </a:lnRef>
+          <a:fillRef idx="0">
+            <a:schemeClr val="accent1"/>
+          </a:fillRef>
+          <a:effectRef idx="0">
+            <a:schemeClr val="accent1"/>
+          </a:effectRef>
+          <a:fontRef idx="minor">
+            <a:schemeClr val="tx1"/>
+          </a:fontRef>
+        </p:style>
+      </p:cxnSp>
+      <p:cxnSp>
+        <p:nvCxnSpPr>
+          <p:cNvPr id="11" name="直接连接符 10">
+            <a:extLst>
+              <a:ext uri="{FF2B5EF4-FFF2-40B4-BE49-F238E27FC236}">
+                <a16:creationId xmlns:a16="http://schemas.microsoft.com/office/drawing/2014/main" id="{8DDD8F87-D6F2-A52A-0AC5-D8D38E7E27DB}"/>
+              </a:ext>
+            </a:extLst>
+          </p:cNvPr>
+          <p:cNvCxnSpPr/>
+          <p:nvPr/>
+        </p:nvCxnSpPr>
+        <p:spPr>
+          <a:xfrm>
+            <a:off x="2162402" y="1205928"/>
+            <a:ext cx="0" cy="3546151"/>
+          </a:xfrm>
+          <a:prstGeom prst="line">
+            <a:avLst/>
+          </a:prstGeom>
+          <a:ln w="19050">
+            <a:solidFill>
+              <a:schemeClr val="bg2">
+                <a:lumMod val="50000"/>
+              </a:schemeClr>
+            </a:solidFill>
+            <a:prstDash val="sysDash"/>
+          </a:ln>
+        </p:spPr>
+        <p:style>
+          <a:lnRef idx="1">
+            <a:schemeClr val="accent1"/>
+          </a:lnRef>
+          <a:fillRef idx="0">
+            <a:schemeClr val="accent1"/>
+          </a:fillRef>
+          <a:effectRef idx="0">
+            <a:schemeClr val="accent1"/>
+          </a:effectRef>
+          <a:fontRef idx="minor">
+            <a:schemeClr val="tx1"/>
+          </a:fontRef>
+        </p:style>
+      </p:cxnSp>
+      <p:cxnSp>
+        <p:nvCxnSpPr>
+          <p:cNvPr id="12" name="直接连接符 11">
+            <a:extLst>
+              <a:ext uri="{FF2B5EF4-FFF2-40B4-BE49-F238E27FC236}">
+                <a16:creationId xmlns:a16="http://schemas.microsoft.com/office/drawing/2014/main" id="{17642527-74E3-5D73-7510-3028C3647BA9}"/>
+              </a:ext>
+            </a:extLst>
+          </p:cNvPr>
+          <p:cNvCxnSpPr/>
+          <p:nvPr/>
+        </p:nvCxnSpPr>
+        <p:spPr>
+          <a:xfrm>
+            <a:off x="3988965" y="1205927"/>
+            <a:ext cx="0" cy="3546151"/>
+          </a:xfrm>
+          <a:prstGeom prst="line">
+            <a:avLst/>
+          </a:prstGeom>
+          <a:ln w="19050">
+            <a:solidFill>
+              <a:schemeClr val="bg2">
+                <a:lumMod val="50000"/>
+              </a:schemeClr>
+            </a:solidFill>
+            <a:prstDash val="sysDash"/>
+          </a:ln>
+        </p:spPr>
+        <p:style>
+          <a:lnRef idx="1">
+            <a:schemeClr val="accent1"/>
+          </a:lnRef>
+          <a:fillRef idx="0">
+            <a:schemeClr val="accent1"/>
+          </a:fillRef>
+          <a:effectRef idx="0">
+            <a:schemeClr val="accent1"/>
+          </a:effectRef>
+          <a:fontRef idx="minor">
+            <a:schemeClr val="tx1"/>
+          </a:fontRef>
+        </p:style>
+      </p:cxnSp>
+      <p:cxnSp>
+        <p:nvCxnSpPr>
+          <p:cNvPr id="14" name="直接连接符 13">
+            <a:extLst>
+              <a:ext uri="{FF2B5EF4-FFF2-40B4-BE49-F238E27FC236}">
+                <a16:creationId xmlns:a16="http://schemas.microsoft.com/office/drawing/2014/main" id="{81601A2C-FC3C-7EEE-CC18-3A73C5E8E74F}"/>
+              </a:ext>
+            </a:extLst>
+          </p:cNvPr>
+          <p:cNvCxnSpPr>
+            <a:cxnSpLocks/>
+            <a:stCxn id="20" idx="2"/>
+          </p:cNvCxnSpPr>
+          <p:nvPr/>
+        </p:nvCxnSpPr>
+        <p:spPr>
+          <a:xfrm>
+            <a:off x="6018170" y="1211706"/>
+            <a:ext cx="0" cy="3540372"/>
+          </a:xfrm>
+          <a:prstGeom prst="line">
+            <a:avLst/>
+          </a:prstGeom>
+          <a:ln w="19050">
+            <a:solidFill>
+              <a:schemeClr val="bg2">
+                <a:lumMod val="50000"/>
+              </a:schemeClr>
+            </a:solidFill>
+            <a:prstDash val="sysDash"/>
+          </a:ln>
+        </p:spPr>
+        <p:style>
+          <a:lnRef idx="1">
+            <a:schemeClr val="accent1"/>
+          </a:lnRef>
+          <a:fillRef idx="0">
+            <a:schemeClr val="accent1"/>
+          </a:fillRef>
+          <a:effectRef idx="0">
+            <a:schemeClr val="accent1"/>
+          </a:effectRef>
+          <a:fontRef idx="minor">
+            <a:schemeClr val="tx1"/>
+          </a:fontRef>
+        </p:style>
+      </p:cxnSp>
+      <p:cxnSp>
+        <p:nvCxnSpPr>
+          <p:cNvPr id="17" name="直接连接符 16">
+            <a:extLst>
+              <a:ext uri="{FF2B5EF4-FFF2-40B4-BE49-F238E27FC236}">
+                <a16:creationId xmlns:a16="http://schemas.microsoft.com/office/drawing/2014/main" id="{259A2F24-CD25-558D-14E6-E441485961C2}"/>
+              </a:ext>
+            </a:extLst>
+          </p:cNvPr>
+          <p:cNvCxnSpPr/>
+          <p:nvPr/>
+        </p:nvCxnSpPr>
+        <p:spPr>
+          <a:xfrm>
+            <a:off x="8057144" y="1205927"/>
+            <a:ext cx="0" cy="3546151"/>
+          </a:xfrm>
+          <a:prstGeom prst="line">
+            <a:avLst/>
+          </a:prstGeom>
+          <a:ln w="19050">
+            <a:solidFill>
+              <a:schemeClr val="bg2">
+                <a:lumMod val="50000"/>
+              </a:schemeClr>
+            </a:solidFill>
+            <a:prstDash val="sysDash"/>
+          </a:ln>
+        </p:spPr>
+        <p:style>
+          <a:lnRef idx="1">
+            <a:schemeClr val="accent1"/>
+          </a:lnRef>
+          <a:fillRef idx="0">
+            <a:schemeClr val="accent1"/>
+          </a:fillRef>
+          <a:effectRef idx="0">
+            <a:schemeClr val="accent1"/>
+          </a:effectRef>
+          <a:fontRef idx="minor">
+            <a:schemeClr val="tx1"/>
+          </a:fontRef>
+        </p:style>
+      </p:cxnSp>
+      <p:cxnSp>
+        <p:nvCxnSpPr>
+          <p:cNvPr id="19" name="直接箭头连接符 18">
+            <a:extLst>
+              <a:ext uri="{FF2B5EF4-FFF2-40B4-BE49-F238E27FC236}">
+                <a16:creationId xmlns:a16="http://schemas.microsoft.com/office/drawing/2014/main" id="{EA1A64BF-0603-205D-5EB0-B8CE50235296}"/>
+              </a:ext>
+            </a:extLst>
+          </p:cNvPr>
+          <p:cNvCxnSpPr/>
+          <p:nvPr/>
+        </p:nvCxnSpPr>
+        <p:spPr>
+          <a:xfrm>
+            <a:off x="824848" y="1465688"/>
+            <a:ext cx="1331158" cy="0"/>
+          </a:xfrm>
+          <a:prstGeom prst="straightConnector1">
+            <a:avLst/>
+          </a:prstGeom>
+          <a:ln w="38100">
+            <a:tailEnd type="triangle"/>
+          </a:ln>
+        </p:spPr>
+        <p:style>
+          <a:lnRef idx="1">
+            <a:schemeClr val="accent1"/>
+          </a:lnRef>
+          <a:fillRef idx="0">
+            <a:schemeClr val="accent1"/>
+          </a:fillRef>
+          <a:effectRef idx="0">
+            <a:schemeClr val="accent1"/>
+          </a:effectRef>
+          <a:fontRef idx="minor">
+            <a:schemeClr val="tx1"/>
+          </a:fontRef>
+        </p:style>
+      </p:cxnSp>
+      <p:sp>
+        <p:nvSpPr>
+          <p:cNvPr id="24" name="文本框 23">
+            <a:extLst>
+              <a:ext uri="{FF2B5EF4-FFF2-40B4-BE49-F238E27FC236}">
+                <a16:creationId xmlns:a16="http://schemas.microsoft.com/office/drawing/2014/main" id="{506F288E-709B-AA42-E0A0-4A4594F04BDC}"/>
+              </a:ext>
+            </a:extLst>
+          </p:cNvPr>
+          <p:cNvSpPr txBox="1"/>
+          <p:nvPr/>
+        </p:nvSpPr>
+        <p:spPr>
+          <a:xfrm>
+            <a:off x="1060178" y="1217479"/>
+            <a:ext cx="734496" cy="248209"/>
+          </a:xfrm>
+          <a:prstGeom prst="rect">
+            <a:avLst/>
+          </a:prstGeom>
+          <a:noFill/>
+        </p:spPr>
+        <p:txBody>
+          <a:bodyPr wrap="none" rtlCol="0">
+            <a:spAutoFit/>
+          </a:bodyPr>
+          <a:lstStyle/>
+          <a:p>
+            <a:r>
+              <a:rPr lang="en-US" altLang="zh-CN" sz="1013" b="1" dirty="0"/>
+              <a:t>Topic</a:t>
+            </a:r>
+            <a:r>
+              <a:rPr lang="zh-CN" altLang="en-US" sz="1013" b="1" dirty="0"/>
+              <a:t>枚举</a:t>
+            </a:r>
+            <a:endParaRPr lang="en-US" altLang="zh-CN" sz="1013" b="1" dirty="0"/>
+          </a:p>
+        </p:txBody>
+      </p:sp>
+      <p:sp>
+        <p:nvSpPr>
+          <p:cNvPr id="25" name="文本框 24">
+            <a:extLst>
+              <a:ext uri="{FF2B5EF4-FFF2-40B4-BE49-F238E27FC236}">
+                <a16:creationId xmlns:a16="http://schemas.microsoft.com/office/drawing/2014/main" id="{CE2E97F4-09B9-63BB-AD87-78E0B721CA00}"/>
+              </a:ext>
+            </a:extLst>
+          </p:cNvPr>
+          <p:cNvSpPr txBox="1"/>
+          <p:nvPr/>
+        </p:nvSpPr>
+        <p:spPr>
+          <a:xfrm>
+            <a:off x="1035247" y="1596624"/>
+            <a:ext cx="974947" cy="248209"/>
+          </a:xfrm>
+          <a:prstGeom prst="rect">
+            <a:avLst/>
+          </a:prstGeom>
+          <a:noFill/>
+        </p:spPr>
+        <p:txBody>
+          <a:bodyPr wrap="none" rtlCol="0">
+            <a:spAutoFit/>
+          </a:bodyPr>
+          <a:lstStyle/>
+          <a:p>
+            <a:r>
+              <a:rPr lang="zh-CN" altLang="en-US" sz="1013" b="1" dirty="0"/>
+              <a:t>识别目标</a:t>
+            </a:r>
+            <a:r>
+              <a:rPr lang="en-US" altLang="zh-CN" sz="1013" b="1" dirty="0"/>
+              <a:t>topic</a:t>
+            </a:r>
+          </a:p>
+        </p:txBody>
+      </p:sp>
+      <p:cxnSp>
+        <p:nvCxnSpPr>
+          <p:cNvPr id="26" name="直接箭头连接符 25">
+            <a:extLst>
+              <a:ext uri="{FF2B5EF4-FFF2-40B4-BE49-F238E27FC236}">
+                <a16:creationId xmlns:a16="http://schemas.microsoft.com/office/drawing/2014/main" id="{3B214CAA-D45C-6588-DDCD-6C930D2FB432}"/>
+              </a:ext>
+            </a:extLst>
+          </p:cNvPr>
+          <p:cNvCxnSpPr>
+            <a:cxnSpLocks/>
+          </p:cNvCxnSpPr>
+          <p:nvPr/>
+        </p:nvCxnSpPr>
+        <p:spPr>
+          <a:xfrm flipH="1">
+            <a:off x="771874" y="1839649"/>
+            <a:ext cx="1384132" cy="0"/>
+          </a:xfrm>
+          <a:prstGeom prst="straightConnector1">
+            <a:avLst/>
+          </a:prstGeom>
+          <a:ln w="38100">
+            <a:tailEnd type="triangle"/>
+          </a:ln>
+        </p:spPr>
+        <p:style>
+          <a:lnRef idx="1">
+            <a:schemeClr val="accent1"/>
+          </a:lnRef>
+          <a:fillRef idx="0">
+            <a:schemeClr val="accent1"/>
+          </a:fillRef>
+          <a:effectRef idx="0">
+            <a:schemeClr val="accent1"/>
+          </a:effectRef>
+          <a:fontRef idx="minor">
+            <a:schemeClr val="tx1"/>
+          </a:fontRef>
+        </p:style>
+      </p:cxnSp>
+      <p:cxnSp>
+        <p:nvCxnSpPr>
+          <p:cNvPr id="30" name="直接箭头连接符 29">
+            <a:extLst>
+              <a:ext uri="{FF2B5EF4-FFF2-40B4-BE49-F238E27FC236}">
+                <a16:creationId xmlns:a16="http://schemas.microsoft.com/office/drawing/2014/main" id="{7C61E4C0-2EE6-4126-D851-D11A16273951}"/>
+              </a:ext>
+            </a:extLst>
+          </p:cNvPr>
+          <p:cNvCxnSpPr/>
+          <p:nvPr/>
+        </p:nvCxnSpPr>
+        <p:spPr>
+          <a:xfrm>
+            <a:off x="836971" y="2336067"/>
+            <a:ext cx="1331158" cy="0"/>
+          </a:xfrm>
+          <a:prstGeom prst="straightConnector1">
+            <a:avLst/>
+          </a:prstGeom>
+          <a:ln w="38100">
+            <a:tailEnd type="triangle"/>
+          </a:ln>
+        </p:spPr>
+        <p:style>
+          <a:lnRef idx="1">
+            <a:schemeClr val="accent1"/>
+          </a:lnRef>
+          <a:fillRef idx="0">
+            <a:schemeClr val="accent1"/>
+          </a:fillRef>
+          <a:effectRef idx="0">
+            <a:schemeClr val="accent1"/>
+          </a:effectRef>
+          <a:fontRef idx="minor">
+            <a:schemeClr val="tx1"/>
+          </a:fontRef>
+        </p:style>
+      </p:cxnSp>
+      <p:sp>
+        <p:nvSpPr>
+          <p:cNvPr id="31" name="文本框 30">
+            <a:extLst>
+              <a:ext uri="{FF2B5EF4-FFF2-40B4-BE49-F238E27FC236}">
+                <a16:creationId xmlns:a16="http://schemas.microsoft.com/office/drawing/2014/main" id="{B9A5B225-9D49-3560-FF62-613C976BAFFB}"/>
+              </a:ext>
+            </a:extLst>
+          </p:cNvPr>
+          <p:cNvSpPr txBox="1"/>
+          <p:nvPr/>
+        </p:nvSpPr>
+        <p:spPr>
+          <a:xfrm>
+            <a:off x="1072301" y="2087858"/>
+            <a:ext cx="704039" cy="248209"/>
+          </a:xfrm>
+          <a:prstGeom prst="rect">
+            <a:avLst/>
+          </a:prstGeom>
+          <a:noFill/>
+        </p:spPr>
+        <p:txBody>
+          <a:bodyPr wrap="none" rtlCol="0">
+            <a:spAutoFit/>
+          </a:bodyPr>
+          <a:lstStyle/>
+          <a:p>
+            <a:r>
+              <a:rPr lang="zh-CN" altLang="en-US" sz="1013" b="1" dirty="0"/>
+              <a:t>查询类型</a:t>
+            </a:r>
+            <a:endParaRPr lang="en-US" altLang="zh-CN" sz="1013" b="1" dirty="0"/>
+          </a:p>
+        </p:txBody>
+      </p:sp>
+      <p:sp>
+        <p:nvSpPr>
+          <p:cNvPr id="32" name="文本框 31">
+            <a:extLst>
+              <a:ext uri="{FF2B5EF4-FFF2-40B4-BE49-F238E27FC236}">
+                <a16:creationId xmlns:a16="http://schemas.microsoft.com/office/drawing/2014/main" id="{7DE38ADF-58BB-5D92-28AB-CEF2DE63801F}"/>
+              </a:ext>
+            </a:extLst>
+          </p:cNvPr>
+          <p:cNvSpPr txBox="1"/>
+          <p:nvPr/>
+        </p:nvSpPr>
+        <p:spPr>
+          <a:xfrm>
+            <a:off x="1133108" y="2461819"/>
+            <a:ext cx="724878" cy="248209"/>
+          </a:xfrm>
+          <a:prstGeom prst="rect">
+            <a:avLst/>
+          </a:prstGeom>
+          <a:noFill/>
+        </p:spPr>
+        <p:txBody>
+          <a:bodyPr wrap="none" rtlCol="0">
+            <a:spAutoFit/>
+          </a:bodyPr>
+          <a:lstStyle/>
+          <a:p>
+            <a:r>
+              <a:rPr lang="en-US" altLang="zh-CN" sz="1013" b="1" dirty="0" err="1"/>
+              <a:t>JointState</a:t>
+            </a:r>
+            <a:endParaRPr lang="en-US" altLang="zh-CN" sz="1013" b="1" dirty="0"/>
+          </a:p>
+        </p:txBody>
+      </p:sp>
+      <p:cxnSp>
+        <p:nvCxnSpPr>
+          <p:cNvPr id="33" name="直接箭头连接符 32">
+            <a:extLst>
+              <a:ext uri="{FF2B5EF4-FFF2-40B4-BE49-F238E27FC236}">
+                <a16:creationId xmlns:a16="http://schemas.microsoft.com/office/drawing/2014/main" id="{3FDEA29A-58F2-1159-3E8F-364845988628}"/>
+              </a:ext>
+            </a:extLst>
+          </p:cNvPr>
+          <p:cNvCxnSpPr>
+            <a:cxnSpLocks/>
+          </p:cNvCxnSpPr>
+          <p:nvPr/>
+        </p:nvCxnSpPr>
+        <p:spPr>
+          <a:xfrm flipH="1">
+            <a:off x="783997" y="2710028"/>
+            <a:ext cx="1384132" cy="0"/>
+          </a:xfrm>
+          <a:prstGeom prst="straightConnector1">
+            <a:avLst/>
+          </a:prstGeom>
+          <a:ln w="38100">
+            <a:tailEnd type="triangle"/>
+          </a:ln>
+        </p:spPr>
+        <p:style>
+          <a:lnRef idx="1">
+            <a:schemeClr val="accent1"/>
+          </a:lnRef>
+          <a:fillRef idx="0">
+            <a:schemeClr val="accent1"/>
+          </a:fillRef>
+          <a:effectRef idx="0">
+            <a:schemeClr val="accent1"/>
+          </a:effectRef>
+          <a:fontRef idx="minor">
+            <a:schemeClr val="tx1"/>
+          </a:fontRef>
+        </p:style>
+      </p:cxnSp>
+      <p:sp>
+        <p:nvSpPr>
+          <p:cNvPr id="35" name="文本框 34">
+            <a:extLst>
+              <a:ext uri="{FF2B5EF4-FFF2-40B4-BE49-F238E27FC236}">
+                <a16:creationId xmlns:a16="http://schemas.microsoft.com/office/drawing/2014/main" id="{38B5688E-6F9D-1486-1E57-7DBF589846D1}"/>
+              </a:ext>
+            </a:extLst>
+          </p:cNvPr>
+          <p:cNvSpPr txBox="1"/>
+          <p:nvPr/>
+        </p:nvSpPr>
+        <p:spPr>
+          <a:xfrm>
+            <a:off x="998222" y="2835779"/>
+            <a:ext cx="1061837" cy="248209"/>
+          </a:xfrm>
+          <a:prstGeom prst="rect">
+            <a:avLst/>
+          </a:prstGeom>
+          <a:noFill/>
+        </p:spPr>
+        <p:txBody>
+          <a:bodyPr wrap="square" rtlCol="0">
+            <a:spAutoFit/>
+          </a:bodyPr>
+          <a:lstStyle/>
+          <a:p>
+            <a:r>
+              <a:rPr lang="zh-CN" altLang="en-US" sz="1013" b="1" dirty="0"/>
+              <a:t>构造合法消息</a:t>
+            </a:r>
+            <a:endParaRPr lang="en-US" altLang="zh-CN" sz="1013" b="1" dirty="0"/>
+          </a:p>
+        </p:txBody>
+      </p:sp>
+      <p:cxnSp>
+        <p:nvCxnSpPr>
+          <p:cNvPr id="37" name="直接箭头连接符 36">
+            <a:extLst>
+              <a:ext uri="{FF2B5EF4-FFF2-40B4-BE49-F238E27FC236}">
+                <a16:creationId xmlns:a16="http://schemas.microsoft.com/office/drawing/2014/main" id="{E2192826-111C-8738-013E-336D1FBF88FC}"/>
+              </a:ext>
+            </a:extLst>
+          </p:cNvPr>
+          <p:cNvCxnSpPr>
+            <a:cxnSpLocks/>
+          </p:cNvCxnSpPr>
+          <p:nvPr/>
+        </p:nvCxnSpPr>
+        <p:spPr>
+          <a:xfrm>
+            <a:off x="834616" y="3456301"/>
+            <a:ext cx="3141553" cy="0"/>
+          </a:xfrm>
+          <a:prstGeom prst="straightConnector1">
+            <a:avLst/>
+          </a:prstGeom>
+          <a:ln w="38100">
+            <a:tailEnd type="triangle"/>
+          </a:ln>
+        </p:spPr>
+        <p:style>
+          <a:lnRef idx="1">
+            <a:schemeClr val="accent1"/>
+          </a:lnRef>
+          <a:fillRef idx="0">
+            <a:schemeClr val="accent1"/>
+          </a:fillRef>
+          <a:effectRef idx="0">
+            <a:schemeClr val="accent1"/>
+          </a:effectRef>
+          <a:fontRef idx="minor">
+            <a:schemeClr val="tx1"/>
+          </a:fontRef>
+        </p:style>
+      </p:cxnSp>
+      <p:sp>
+        <p:nvSpPr>
+          <p:cNvPr id="39" name="文本框 38">
+            <a:extLst>
+              <a:ext uri="{FF2B5EF4-FFF2-40B4-BE49-F238E27FC236}">
+                <a16:creationId xmlns:a16="http://schemas.microsoft.com/office/drawing/2014/main" id="{06F6D5FB-4E6E-C435-23B9-BD3458ACFE24}"/>
+              </a:ext>
+            </a:extLst>
+          </p:cNvPr>
+          <p:cNvSpPr txBox="1"/>
+          <p:nvPr/>
+        </p:nvSpPr>
+        <p:spPr>
+          <a:xfrm>
+            <a:off x="831244" y="3208092"/>
+            <a:ext cx="1599651" cy="248209"/>
+          </a:xfrm>
+          <a:prstGeom prst="rect">
+            <a:avLst/>
+          </a:prstGeom>
+          <a:noFill/>
+        </p:spPr>
+        <p:txBody>
+          <a:bodyPr wrap="square" rtlCol="0">
+            <a:spAutoFit/>
+          </a:bodyPr>
+          <a:lstStyle/>
+          <a:p>
+            <a:r>
+              <a:rPr lang="zh-CN" altLang="en-US" sz="1013" b="1" dirty="0"/>
+              <a:t>发布 </a:t>
+            </a:r>
+            <a:r>
+              <a:rPr lang="en-US" altLang="zh-CN" sz="1013" b="1" dirty="0"/>
+              <a:t>forged </a:t>
+            </a:r>
+            <a:r>
+              <a:rPr lang="en-US" altLang="zh-CN" sz="1013" b="1" dirty="0" err="1"/>
+              <a:t>JointState</a:t>
+            </a:r>
+            <a:endParaRPr lang="en-US" altLang="zh-CN" sz="1013" b="1" dirty="0"/>
+          </a:p>
+        </p:txBody>
+      </p:sp>
+      <p:cxnSp>
+        <p:nvCxnSpPr>
+          <p:cNvPr id="40" name="直接箭头连接符 39">
+            <a:extLst>
+              <a:ext uri="{FF2B5EF4-FFF2-40B4-BE49-F238E27FC236}">
+                <a16:creationId xmlns:a16="http://schemas.microsoft.com/office/drawing/2014/main" id="{4D1506E5-8147-F5A1-52AA-7639FA875480}"/>
+              </a:ext>
+            </a:extLst>
+          </p:cNvPr>
+          <p:cNvCxnSpPr>
+            <a:cxnSpLocks/>
+          </p:cNvCxnSpPr>
+          <p:nvPr/>
+        </p:nvCxnSpPr>
+        <p:spPr>
+          <a:xfrm>
+            <a:off x="4001055" y="3964307"/>
+            <a:ext cx="2020488" cy="0"/>
+          </a:xfrm>
+          <a:prstGeom prst="straightConnector1">
+            <a:avLst/>
+          </a:prstGeom>
+          <a:ln w="38100">
+            <a:tailEnd type="triangle"/>
+          </a:ln>
+        </p:spPr>
+        <p:style>
+          <a:lnRef idx="1">
+            <a:schemeClr val="accent1"/>
+          </a:lnRef>
+          <a:fillRef idx="0">
+            <a:schemeClr val="accent1"/>
+          </a:fillRef>
+          <a:effectRef idx="0">
+            <a:schemeClr val="accent1"/>
+          </a:effectRef>
+          <a:fontRef idx="minor">
+            <a:schemeClr val="tx1"/>
+          </a:fontRef>
+        </p:style>
+      </p:cxnSp>
+      <p:sp>
+        <p:nvSpPr>
+          <p:cNvPr id="41" name="文本框 40">
+            <a:extLst>
+              <a:ext uri="{FF2B5EF4-FFF2-40B4-BE49-F238E27FC236}">
+                <a16:creationId xmlns:a16="http://schemas.microsoft.com/office/drawing/2014/main" id="{C1983F8C-F687-EEB2-4E1C-1A41308EB52A}"/>
+              </a:ext>
+            </a:extLst>
+          </p:cNvPr>
+          <p:cNvSpPr txBox="1"/>
+          <p:nvPr/>
+        </p:nvSpPr>
+        <p:spPr>
+          <a:xfrm>
+            <a:off x="4510354" y="3721501"/>
+            <a:ext cx="1211414" cy="248209"/>
+          </a:xfrm>
+          <a:prstGeom prst="rect">
+            <a:avLst/>
+          </a:prstGeom>
+          <a:noFill/>
+        </p:spPr>
+        <p:txBody>
+          <a:bodyPr wrap="square" rtlCol="0">
+            <a:spAutoFit/>
+          </a:bodyPr>
+          <a:lstStyle/>
+          <a:p>
+            <a:r>
+              <a:rPr lang="zh-CN" altLang="en-US" sz="1013" b="1" dirty="0"/>
+              <a:t>被订阅</a:t>
+            </a:r>
+            <a:r>
+              <a:rPr lang="en-US" altLang="zh-CN" sz="1013" b="1" dirty="0"/>
+              <a:t>/</a:t>
+            </a:r>
+            <a:r>
+              <a:rPr lang="zh-CN" altLang="en-US" sz="1013" b="1" dirty="0"/>
+              <a:t>处理</a:t>
+            </a:r>
+            <a:endParaRPr lang="en-US" altLang="zh-CN" sz="1013" b="1" dirty="0"/>
+          </a:p>
+        </p:txBody>
+      </p:sp>
+      <p:cxnSp>
+        <p:nvCxnSpPr>
+          <p:cNvPr id="43" name="直接箭头连接符 42">
+            <a:extLst>
+              <a:ext uri="{FF2B5EF4-FFF2-40B4-BE49-F238E27FC236}">
+                <a16:creationId xmlns:a16="http://schemas.microsoft.com/office/drawing/2014/main" id="{82E6E458-E41E-B9A9-0B0E-340AD8FD418F}"/>
+              </a:ext>
+            </a:extLst>
+          </p:cNvPr>
+          <p:cNvCxnSpPr>
+            <a:cxnSpLocks/>
+          </p:cNvCxnSpPr>
+          <p:nvPr/>
+        </p:nvCxnSpPr>
+        <p:spPr>
+          <a:xfrm>
+            <a:off x="6052932" y="4174600"/>
+            <a:ext cx="2020488" cy="0"/>
+          </a:xfrm>
+          <a:prstGeom prst="straightConnector1">
+            <a:avLst/>
+          </a:prstGeom>
+          <a:ln w="38100">
+            <a:tailEnd type="triangle"/>
+          </a:ln>
+        </p:spPr>
+        <p:style>
+          <a:lnRef idx="1">
+            <a:schemeClr val="accent1"/>
+          </a:lnRef>
+          <a:fillRef idx="0">
+            <a:schemeClr val="accent1"/>
+          </a:fillRef>
+          <a:effectRef idx="0">
+            <a:schemeClr val="accent1"/>
+          </a:effectRef>
+          <a:fontRef idx="minor">
+            <a:schemeClr val="tx1"/>
+          </a:fontRef>
+        </p:style>
+      </p:cxnSp>
+      <p:sp>
+        <p:nvSpPr>
+          <p:cNvPr id="57" name="文本框 56">
+            <a:extLst>
+              <a:ext uri="{FF2B5EF4-FFF2-40B4-BE49-F238E27FC236}">
+                <a16:creationId xmlns:a16="http://schemas.microsoft.com/office/drawing/2014/main" id="{BDF3CB6F-3833-EA1F-097D-2FEAD5C0683B}"/>
+              </a:ext>
+            </a:extLst>
+          </p:cNvPr>
+          <p:cNvSpPr txBox="1"/>
+          <p:nvPr/>
+        </p:nvSpPr>
+        <p:spPr>
+          <a:xfrm>
+            <a:off x="6562231" y="3931794"/>
+            <a:ext cx="1211414" cy="248209"/>
+          </a:xfrm>
+          <a:prstGeom prst="rect">
+            <a:avLst/>
+          </a:prstGeom>
+          <a:noFill/>
+        </p:spPr>
+        <p:txBody>
+          <a:bodyPr wrap="square" rtlCol="0">
+            <a:spAutoFit/>
+          </a:bodyPr>
+          <a:lstStyle/>
+          <a:p>
+            <a:r>
+              <a:rPr lang="zh-CN" altLang="en-US" sz="1013" b="1" dirty="0"/>
+              <a:t>更新 </a:t>
+            </a:r>
+            <a:r>
+              <a:rPr lang="en-US" altLang="zh-CN" sz="1013" b="1" dirty="0"/>
+              <a:t>TF/</a:t>
+            </a:r>
+            <a:r>
+              <a:rPr lang="zh-CN" altLang="en-US" sz="1013" b="1" dirty="0"/>
+              <a:t>误导</a:t>
+            </a:r>
+            <a:r>
+              <a:rPr lang="en-US" altLang="zh-CN" sz="1013" b="1" dirty="0"/>
+              <a:t>RViz</a:t>
+            </a:r>
+          </a:p>
+        </p:txBody>
+      </p:sp>
+      <p:cxnSp>
+        <p:nvCxnSpPr>
+          <p:cNvPr id="58" name="直接箭头连接符 57">
+            <a:extLst>
+              <a:ext uri="{FF2B5EF4-FFF2-40B4-BE49-F238E27FC236}">
+                <a16:creationId xmlns:a16="http://schemas.microsoft.com/office/drawing/2014/main" id="{7333B166-3820-B459-DA8D-C2356DF1326A}"/>
+              </a:ext>
+            </a:extLst>
+          </p:cNvPr>
+          <p:cNvCxnSpPr>
+            <a:cxnSpLocks/>
+          </p:cNvCxnSpPr>
+          <p:nvPr/>
+        </p:nvCxnSpPr>
+        <p:spPr>
+          <a:xfrm>
+            <a:off x="860700" y="4617969"/>
+            <a:ext cx="7193072" cy="5681"/>
+          </a:xfrm>
+          <a:prstGeom prst="straightConnector1">
+            <a:avLst/>
+          </a:prstGeom>
+          <a:ln w="38100">
+            <a:tailEnd type="triangle"/>
+          </a:ln>
+        </p:spPr>
+        <p:style>
+          <a:lnRef idx="1">
+            <a:schemeClr val="accent1"/>
+          </a:lnRef>
+          <a:fillRef idx="0">
+            <a:schemeClr val="accent1"/>
+          </a:fillRef>
+          <a:effectRef idx="0">
+            <a:schemeClr val="accent1"/>
+          </a:effectRef>
+          <a:fontRef idx="minor">
+            <a:schemeClr val="tx1"/>
+          </a:fontRef>
+        </p:style>
+      </p:cxnSp>
+      <p:sp>
+        <p:nvSpPr>
+          <p:cNvPr id="59" name="文本框 58">
+            <a:extLst>
+              <a:ext uri="{FF2B5EF4-FFF2-40B4-BE49-F238E27FC236}">
+                <a16:creationId xmlns:a16="http://schemas.microsoft.com/office/drawing/2014/main" id="{FFEC95B3-096C-DC08-CB43-C6DAED5E07D5}"/>
+              </a:ext>
+            </a:extLst>
+          </p:cNvPr>
+          <p:cNvSpPr txBox="1"/>
+          <p:nvPr/>
+        </p:nvSpPr>
+        <p:spPr>
+          <a:xfrm>
+            <a:off x="6505053" y="4364358"/>
+            <a:ext cx="1061837" cy="248209"/>
+          </a:xfrm>
+          <a:prstGeom prst="rect">
+            <a:avLst/>
+          </a:prstGeom>
+          <a:noFill/>
+        </p:spPr>
+        <p:txBody>
+          <a:bodyPr wrap="square" rtlCol="0">
+            <a:spAutoFit/>
+          </a:bodyPr>
+          <a:lstStyle/>
+          <a:p>
+            <a:r>
+              <a:rPr lang="zh-CN" altLang="en-US" sz="1013" b="1" dirty="0"/>
+              <a:t>误导显示</a:t>
+            </a:r>
+            <a:endParaRPr lang="en-US" altLang="zh-CN" sz="1013" b="1" dirty="0"/>
+          </a:p>
+        </p:txBody>
+      </p:sp>
+      <p:sp>
+        <p:nvSpPr>
+          <p:cNvPr id="64" name="标注: 下箭头 63">
+            <a:extLst>
+              <a:ext uri="{FF2B5EF4-FFF2-40B4-BE49-F238E27FC236}">
+                <a16:creationId xmlns:a16="http://schemas.microsoft.com/office/drawing/2014/main" id="{D077E3E9-7F43-B2A5-1AFA-68FF1265EF19}"/>
+              </a:ext>
+            </a:extLst>
+          </p:cNvPr>
+          <p:cNvSpPr/>
+          <p:nvPr/>
+        </p:nvSpPr>
+        <p:spPr>
+          <a:xfrm>
+            <a:off x="2383010" y="2467003"/>
+            <a:ext cx="1315128" cy="985759"/>
+          </a:xfrm>
+          <a:prstGeom prst="downArrowCallout">
+            <a:avLst/>
+          </a:prstGeom>
+          <a:solidFill>
+            <a:schemeClr val="bg1"/>
+          </a:solidFill>
+          <a:ln>
+            <a:solidFill>
+              <a:schemeClr val="tx1"/>
+            </a:solidFill>
+          </a:ln>
+        </p:spPr>
+        <p:style>
+          <a:lnRef idx="2">
+            <a:schemeClr val="accent1">
+              <a:shade val="15000"/>
+            </a:schemeClr>
+          </a:lnRef>
+          <a:fillRef idx="1">
+            <a:schemeClr val="accent1"/>
+          </a:fillRef>
+          <a:effectRef idx="0">
+            <a:schemeClr val="accent1"/>
+          </a:effectRef>
+          <a:fontRef idx="minor">
+            <a:schemeClr val="lt1"/>
+          </a:fontRef>
+        </p:style>
+        <p:txBody>
+          <a:bodyPr rtlCol="0" anchor="ctr"/>
+          <a:lstStyle/>
+          <a:p>
+            <a:pPr algn="ctr"/>
+            <a:r>
+              <a:rPr lang="zh-CN" altLang="en-US" sz="1000" b="1" dirty="0">
+                <a:solidFill>
+                  <a:schemeClr val="tx1"/>
+                </a:solidFill>
+              </a:rPr>
+              <a:t>关键条件：</a:t>
+            </a:r>
+          </a:p>
+          <a:p>
+            <a:pPr algn="ctr"/>
+            <a:r>
+              <a:rPr lang="en-US" altLang="zh-CN" sz="1000" b="1" dirty="0">
+                <a:solidFill>
+                  <a:schemeClr val="tx1"/>
+                </a:solidFill>
+              </a:rPr>
+              <a:t>- </a:t>
+            </a:r>
+            <a:r>
+              <a:rPr lang="zh-CN" altLang="en-US" sz="1000" b="1" dirty="0">
+                <a:solidFill>
+                  <a:schemeClr val="tx1"/>
+                </a:solidFill>
+              </a:rPr>
+              <a:t>关节名称匹配</a:t>
+            </a:r>
+          </a:p>
+          <a:p>
+            <a:pPr algn="ctr"/>
+            <a:r>
+              <a:rPr lang="en-US" altLang="zh-CN" sz="1000" b="1" dirty="0">
+                <a:solidFill>
+                  <a:schemeClr val="tx1"/>
+                </a:solidFill>
+              </a:rPr>
+              <a:t>- </a:t>
+            </a:r>
+            <a:r>
+              <a:rPr lang="zh-CN" altLang="en-US" sz="1000" b="1" dirty="0">
+                <a:solidFill>
+                  <a:schemeClr val="tx1"/>
+                </a:solidFill>
+              </a:rPr>
+              <a:t>关节范围合法</a:t>
+            </a:r>
+          </a:p>
+          <a:p>
+            <a:pPr algn="ctr"/>
+            <a:r>
+              <a:rPr lang="en-US" altLang="zh-CN" sz="1000" b="1" dirty="0">
+                <a:solidFill>
+                  <a:schemeClr val="tx1"/>
+                </a:solidFill>
+              </a:rPr>
+              <a:t>- </a:t>
+            </a:r>
+            <a:r>
+              <a:rPr lang="zh-CN" altLang="en-US" sz="1000" b="1" dirty="0">
+                <a:solidFill>
+                  <a:schemeClr val="tx1"/>
+                </a:solidFill>
+              </a:rPr>
+              <a:t>时间戳有效</a:t>
+            </a:r>
+          </a:p>
+        </p:txBody>
+      </p:sp>
+    </p:spTree>
+    <p:extLst>
+      <p:ext uri="{BB962C8B-B14F-4D97-AF65-F5344CB8AC3E}">
+        <p14:creationId xmlns:p14="http://schemas.microsoft.com/office/powerpoint/2010/main" val="2315500915"/>
+      </p:ext>
+    </p:extLst>
+  </p:cSld>
+  <p:clrMapOvr>
+    <a:masterClrMapping/>
+  </p:clrMapOvr>
+</p:sld>
+</file>
+
+<file path=ppt/slides/slide5.xml><?xml version="1.0" encoding="utf-8"?>
+<p:sld xmlns:a="http://schemas.openxmlformats.org/drawingml/2006/main" xmlns:r="http://schemas.openxmlformats.org/officeDocument/2006/relationships" xmlns:p="http://schemas.openxmlformats.org/presentationml/2006/main">
+  <p:cSld>
+    <p:spTree>
+      <p:nvGrpSpPr>
+        <p:cNvPr id="1" name="">
+          <a:extLst>
+            <a:ext uri="{FF2B5EF4-FFF2-40B4-BE49-F238E27FC236}">
+              <a16:creationId xmlns:a16="http://schemas.microsoft.com/office/drawing/2014/main" id="{1B4DB2E3-675D-57C3-B803-E943FBE776C9}"/>
+            </a:ext>
+          </a:extLst>
+        </p:cNvPr>
+        <p:cNvGrpSpPr/>
+        <p:nvPr/>
+      </p:nvGrpSpPr>
+      <p:grpSpPr>
+        <a:xfrm>
+          <a:off x="0" y="0"/>
+          <a:ext cx="0" cy="0"/>
+          <a:chOff x="0" y="0"/>
+          <a:chExt cx="0" cy="0"/>
+        </a:xfrm>
+      </p:grpSpPr>
+      <p:sp>
+        <p:nvSpPr>
+          <p:cNvPr id="4" name="流程图: 过程 3">
+            <a:extLst>
+              <a:ext uri="{FF2B5EF4-FFF2-40B4-BE49-F238E27FC236}">
+                <a16:creationId xmlns:a16="http://schemas.microsoft.com/office/drawing/2014/main" id="{2CB30021-B770-F417-E08D-D10C3CA7062D}"/>
+              </a:ext>
+            </a:extLst>
+          </p:cNvPr>
+          <p:cNvSpPr/>
+          <p:nvPr/>
+        </p:nvSpPr>
+        <p:spPr>
+          <a:xfrm>
+            <a:off x="1037637" y="586012"/>
+            <a:ext cx="1120078" cy="248209"/>
+          </a:xfrm>
+          <a:prstGeom prst="flowChartProcess">
+            <a:avLst/>
+          </a:prstGeom>
+          <a:solidFill>
+            <a:schemeClr val="accent1">
+              <a:lumMod val="60000"/>
+              <a:lumOff val="40000"/>
+            </a:schemeClr>
+          </a:solidFill>
+        </p:spPr>
+        <p:style>
+          <a:lnRef idx="2">
+            <a:schemeClr val="accent1">
+              <a:shade val="15000"/>
+            </a:schemeClr>
+          </a:lnRef>
+          <a:fillRef idx="1">
+            <a:schemeClr val="accent1"/>
+          </a:fillRef>
+          <a:effectRef idx="0">
+            <a:schemeClr val="accent1"/>
+          </a:effectRef>
+          <a:fontRef idx="minor">
+            <a:schemeClr val="lt1"/>
+          </a:fontRef>
+        </p:style>
+        <p:txBody>
+          <a:bodyPr rtlCol="0" anchor="ctr"/>
+          <a:lstStyle/>
+          <a:p>
+            <a:pPr algn="ctr"/>
+            <a:r>
+              <a:rPr lang="zh-CN" altLang="en-US" sz="1013" b="1" dirty="0">
+                <a:solidFill>
+                  <a:schemeClr val="tx1"/>
+                </a:solidFill>
+              </a:rPr>
+              <a:t>攻击者节点</a:t>
+            </a:r>
+          </a:p>
+        </p:txBody>
+      </p:sp>
+      <p:sp>
+        <p:nvSpPr>
+          <p:cNvPr id="5" name="流程图: 过程 4">
+            <a:extLst>
+              <a:ext uri="{FF2B5EF4-FFF2-40B4-BE49-F238E27FC236}">
+                <a16:creationId xmlns:a16="http://schemas.microsoft.com/office/drawing/2014/main" id="{34D6B80A-72E0-14EA-A007-119F214B509F}"/>
+              </a:ext>
+            </a:extLst>
+          </p:cNvPr>
+          <p:cNvSpPr/>
+          <p:nvPr/>
+        </p:nvSpPr>
+        <p:spPr>
+          <a:xfrm>
+            <a:off x="3649628" y="157555"/>
+            <a:ext cx="1185612" cy="259761"/>
+          </a:xfrm>
+          <a:prstGeom prst="flowChartProcess">
+            <a:avLst/>
+          </a:prstGeom>
+          <a:solidFill>
+            <a:schemeClr val="accent2">
+              <a:lumMod val="40000"/>
+              <a:lumOff val="60000"/>
+            </a:schemeClr>
+          </a:solidFill>
+        </p:spPr>
+        <p:style>
+          <a:lnRef idx="2">
+            <a:schemeClr val="accent1">
+              <a:shade val="15000"/>
+            </a:schemeClr>
+          </a:lnRef>
+          <a:fillRef idx="1">
+            <a:schemeClr val="accent1"/>
+          </a:fillRef>
+          <a:effectRef idx="0">
+            <a:schemeClr val="accent1"/>
+          </a:effectRef>
+          <a:fontRef idx="minor">
+            <a:schemeClr val="lt1"/>
+          </a:fontRef>
+        </p:style>
+        <p:txBody>
+          <a:bodyPr rtlCol="0" anchor="ctr"/>
+          <a:lstStyle/>
+          <a:p>
+            <a:pPr algn="ctr"/>
+            <a:r>
+              <a:rPr lang="zh-CN" altLang="en-US" sz="1013" b="1" dirty="0">
+                <a:solidFill>
+                  <a:schemeClr val="tx1"/>
+                </a:solidFill>
+              </a:rPr>
+              <a:t>映射</a:t>
+            </a:r>
+            <a:endParaRPr lang="en-US" altLang="zh-CN" sz="1013" b="1" dirty="0">
+              <a:solidFill>
+                <a:schemeClr val="tx1"/>
+              </a:solidFill>
+            </a:endParaRPr>
+          </a:p>
+        </p:txBody>
+      </p:sp>
+      <p:sp>
+        <p:nvSpPr>
+          <p:cNvPr id="20" name="流程图: 过程 19">
+            <a:extLst>
+              <a:ext uri="{FF2B5EF4-FFF2-40B4-BE49-F238E27FC236}">
+                <a16:creationId xmlns:a16="http://schemas.microsoft.com/office/drawing/2014/main" id="{3628704D-FA46-62A5-55A9-87E42EB96C49}"/>
+              </a:ext>
+            </a:extLst>
+          </p:cNvPr>
+          <p:cNvSpPr/>
+          <p:nvPr/>
+        </p:nvSpPr>
+        <p:spPr>
+          <a:xfrm>
+            <a:off x="6185850" y="586012"/>
+            <a:ext cx="1926857" cy="248209"/>
+          </a:xfrm>
+          <a:prstGeom prst="flowChartProcess">
+            <a:avLst/>
+          </a:prstGeom>
+          <a:solidFill>
+            <a:schemeClr val="accent1">
+              <a:lumMod val="60000"/>
+              <a:lumOff val="40000"/>
+            </a:schemeClr>
+          </a:solidFill>
+        </p:spPr>
+        <p:style>
+          <a:lnRef idx="2">
+            <a:schemeClr val="accent1">
+              <a:shade val="15000"/>
+            </a:schemeClr>
+          </a:lnRef>
+          <a:fillRef idx="1">
+            <a:schemeClr val="accent1"/>
+          </a:fillRef>
+          <a:effectRef idx="0">
+            <a:schemeClr val="accent1"/>
+          </a:effectRef>
+          <a:fontRef idx="minor">
+            <a:schemeClr val="lt1"/>
+          </a:fontRef>
+        </p:style>
+        <p:txBody>
+          <a:bodyPr rtlCol="0" anchor="ctr"/>
+          <a:lstStyle/>
+          <a:p>
+            <a:pPr algn="ctr"/>
+            <a:r>
+              <a:rPr lang="en-US" altLang="zh-CN" sz="1013" b="1" dirty="0">
+                <a:solidFill>
+                  <a:schemeClr val="tx1"/>
+                </a:solidFill>
+              </a:rPr>
+              <a:t>host(...), </a:t>
+            </a:r>
+            <a:r>
+              <a:rPr lang="en-US" altLang="zh-CN" sz="1013" b="1" dirty="0" err="1">
+                <a:solidFill>
+                  <a:schemeClr val="tx1"/>
+                </a:solidFill>
+              </a:rPr>
+              <a:t>hacl</a:t>
+            </a:r>
+            <a:r>
+              <a:rPr lang="en-US" altLang="zh-CN" sz="1013" b="1" dirty="0">
+                <a:solidFill>
+                  <a:schemeClr val="tx1"/>
+                </a:solidFill>
+              </a:rPr>
+              <a:t>(...)</a:t>
+            </a:r>
+            <a:endParaRPr lang="zh-CN" altLang="en-US" sz="1013" b="1" dirty="0">
+              <a:solidFill>
+                <a:schemeClr val="tx1"/>
+              </a:solidFill>
+            </a:endParaRPr>
+          </a:p>
+        </p:txBody>
+      </p:sp>
+      <p:sp>
+        <p:nvSpPr>
+          <p:cNvPr id="21" name="流程图: 过程 20">
+            <a:extLst>
+              <a:ext uri="{FF2B5EF4-FFF2-40B4-BE49-F238E27FC236}">
+                <a16:creationId xmlns:a16="http://schemas.microsoft.com/office/drawing/2014/main" id="{457F2FB8-92A1-5F47-370B-450C3E346266}"/>
+              </a:ext>
+            </a:extLst>
+          </p:cNvPr>
+          <p:cNvSpPr/>
+          <p:nvPr/>
+        </p:nvSpPr>
+        <p:spPr>
+          <a:xfrm>
+            <a:off x="1118518" y="154770"/>
+            <a:ext cx="836152" cy="259761"/>
+          </a:xfrm>
+          <a:prstGeom prst="flowChartProcess">
+            <a:avLst/>
+          </a:prstGeom>
+          <a:solidFill>
+            <a:schemeClr val="accent3">
+              <a:lumMod val="40000"/>
+              <a:lumOff val="60000"/>
+            </a:schemeClr>
+          </a:solidFill>
+        </p:spPr>
+        <p:style>
+          <a:lnRef idx="2">
+            <a:schemeClr val="accent1">
+              <a:shade val="15000"/>
+            </a:schemeClr>
+          </a:lnRef>
+          <a:fillRef idx="1">
+            <a:schemeClr val="accent1"/>
+          </a:fillRef>
+          <a:effectRef idx="0">
+            <a:schemeClr val="accent1"/>
+          </a:effectRef>
+          <a:fontRef idx="minor">
+            <a:schemeClr val="lt1"/>
+          </a:fontRef>
+        </p:style>
+        <p:txBody>
+          <a:bodyPr rtlCol="0" anchor="ctr"/>
+          <a:lstStyle/>
+          <a:p>
+            <a:pPr algn="ctr"/>
+            <a:r>
+              <a:rPr lang="en-US" altLang="zh-CN" sz="1013" b="1" dirty="0">
+                <a:solidFill>
+                  <a:schemeClr val="tx1"/>
+                </a:solidFill>
+              </a:rPr>
+              <a:t>ROS2 </a:t>
+            </a:r>
+            <a:r>
+              <a:rPr lang="zh-CN" altLang="en-US" sz="1013" b="1" dirty="0">
+                <a:solidFill>
+                  <a:schemeClr val="tx1"/>
+                </a:solidFill>
+              </a:rPr>
+              <a:t>对象</a:t>
+            </a:r>
+            <a:endParaRPr lang="en-US" altLang="zh-CN" sz="1013" b="1" dirty="0">
+              <a:solidFill>
+                <a:schemeClr val="tx1"/>
+              </a:solidFill>
+            </a:endParaRPr>
+          </a:p>
+        </p:txBody>
+      </p:sp>
+      <p:sp>
+        <p:nvSpPr>
+          <p:cNvPr id="22" name="流程图: 过程 21">
+            <a:extLst>
+              <a:ext uri="{FF2B5EF4-FFF2-40B4-BE49-F238E27FC236}">
+                <a16:creationId xmlns:a16="http://schemas.microsoft.com/office/drawing/2014/main" id="{1E7D4301-0767-C742-6E2E-90F10A50979D}"/>
+              </a:ext>
+            </a:extLst>
+          </p:cNvPr>
+          <p:cNvSpPr/>
+          <p:nvPr/>
+        </p:nvSpPr>
+        <p:spPr>
+          <a:xfrm>
+            <a:off x="6556472" y="154881"/>
+            <a:ext cx="1185611" cy="248209"/>
+          </a:xfrm>
+          <a:prstGeom prst="flowChartProcess">
+            <a:avLst/>
+          </a:prstGeom>
+          <a:solidFill>
+            <a:schemeClr val="accent1">
+              <a:lumMod val="60000"/>
+              <a:lumOff val="40000"/>
+            </a:schemeClr>
+          </a:solidFill>
+        </p:spPr>
+        <p:style>
+          <a:lnRef idx="2">
+            <a:schemeClr val="accent1">
+              <a:shade val="15000"/>
+            </a:schemeClr>
+          </a:lnRef>
+          <a:fillRef idx="1">
+            <a:schemeClr val="accent1"/>
+          </a:fillRef>
+          <a:effectRef idx="0">
+            <a:schemeClr val="accent1"/>
+          </a:effectRef>
+          <a:fontRef idx="minor">
+            <a:schemeClr val="lt1"/>
+          </a:fontRef>
+        </p:style>
+        <p:txBody>
+          <a:bodyPr rtlCol="0" anchor="ctr"/>
+          <a:lstStyle/>
+          <a:p>
+            <a:pPr algn="ctr"/>
+            <a:r>
+              <a:rPr lang="en-US" altLang="zh-CN" sz="1013" b="1" dirty="0">
+                <a:solidFill>
+                  <a:schemeClr val="tx1"/>
+                </a:solidFill>
+              </a:rPr>
+              <a:t>XSB</a:t>
+            </a:r>
+            <a:r>
+              <a:rPr lang="zh-CN" altLang="en-US" sz="1013" b="1" dirty="0">
+                <a:solidFill>
+                  <a:schemeClr val="tx1"/>
+                </a:solidFill>
+              </a:rPr>
+              <a:t>元素</a:t>
+            </a:r>
+          </a:p>
+        </p:txBody>
+      </p:sp>
+      <p:cxnSp>
+        <p:nvCxnSpPr>
+          <p:cNvPr id="19" name="直接箭头连接符 18">
+            <a:extLst>
+              <a:ext uri="{FF2B5EF4-FFF2-40B4-BE49-F238E27FC236}">
+                <a16:creationId xmlns:a16="http://schemas.microsoft.com/office/drawing/2014/main" id="{1B0FFE05-C401-CE54-59F2-A231B92C6053}"/>
+              </a:ext>
+            </a:extLst>
+          </p:cNvPr>
+          <p:cNvCxnSpPr>
+            <a:cxnSpLocks/>
+            <a:stCxn id="4" idx="3"/>
+            <a:endCxn id="20" idx="1"/>
+          </p:cNvCxnSpPr>
+          <p:nvPr/>
+        </p:nvCxnSpPr>
+        <p:spPr>
+          <a:xfrm>
+            <a:off x="2157715" y="710117"/>
+            <a:ext cx="4028135" cy="0"/>
+          </a:xfrm>
+          <a:prstGeom prst="straightConnector1">
+            <a:avLst/>
+          </a:prstGeom>
+          <a:ln w="38100">
+            <a:tailEnd type="triangle"/>
+          </a:ln>
+        </p:spPr>
+        <p:style>
+          <a:lnRef idx="1">
+            <a:schemeClr val="accent1"/>
+          </a:lnRef>
+          <a:fillRef idx="0">
+            <a:schemeClr val="accent1"/>
+          </a:fillRef>
+          <a:effectRef idx="0">
+            <a:schemeClr val="accent1"/>
+          </a:effectRef>
+          <a:fontRef idx="minor">
+            <a:schemeClr val="tx1"/>
+          </a:fontRef>
+        </p:style>
+      </p:cxnSp>
+      <p:sp>
+        <p:nvSpPr>
+          <p:cNvPr id="24" name="文本框 23">
+            <a:extLst>
+              <a:ext uri="{FF2B5EF4-FFF2-40B4-BE49-F238E27FC236}">
+                <a16:creationId xmlns:a16="http://schemas.microsoft.com/office/drawing/2014/main" id="{FA7015E4-F76F-C33F-EAF4-15EFF399D841}"/>
+              </a:ext>
+            </a:extLst>
+          </p:cNvPr>
+          <p:cNvSpPr txBox="1"/>
+          <p:nvPr/>
+        </p:nvSpPr>
+        <p:spPr>
+          <a:xfrm>
+            <a:off x="3676185" y="483201"/>
+            <a:ext cx="1019831" cy="248209"/>
+          </a:xfrm>
+          <a:prstGeom prst="rect">
+            <a:avLst/>
+          </a:prstGeom>
+          <a:noFill/>
+        </p:spPr>
+        <p:txBody>
+          <a:bodyPr wrap="none" rtlCol="0">
+            <a:spAutoFit/>
+          </a:bodyPr>
+          <a:lstStyle/>
+          <a:p>
+            <a:r>
+              <a:rPr lang="zh-CN" altLang="en-US" sz="1013" b="1" dirty="0"/>
+              <a:t>主机</a:t>
+            </a:r>
+            <a:r>
+              <a:rPr lang="en-US" altLang="zh-CN" sz="1013" b="1" dirty="0"/>
+              <a:t>/</a:t>
+            </a:r>
+            <a:r>
+              <a:rPr lang="zh-CN" altLang="en-US" sz="1013" b="1" dirty="0"/>
+              <a:t>可达关系</a:t>
+            </a:r>
+            <a:endParaRPr lang="en-US" altLang="zh-CN" sz="1013" b="1" dirty="0"/>
+          </a:p>
+        </p:txBody>
+      </p:sp>
+      <p:sp>
+        <p:nvSpPr>
+          <p:cNvPr id="25" name="文本框 24">
+            <a:extLst>
+              <a:ext uri="{FF2B5EF4-FFF2-40B4-BE49-F238E27FC236}">
+                <a16:creationId xmlns:a16="http://schemas.microsoft.com/office/drawing/2014/main" id="{5ADEDEA7-B4DE-16F2-BAC7-8EF8F611CD3E}"/>
+              </a:ext>
+            </a:extLst>
+          </p:cNvPr>
+          <p:cNvSpPr txBox="1"/>
+          <p:nvPr/>
+        </p:nvSpPr>
+        <p:spPr>
+          <a:xfrm>
+            <a:off x="3760847" y="974435"/>
+            <a:ext cx="704039" cy="248209"/>
+          </a:xfrm>
+          <a:prstGeom prst="rect">
+            <a:avLst/>
+          </a:prstGeom>
+          <a:noFill/>
+        </p:spPr>
+        <p:txBody>
+          <a:bodyPr wrap="none" rtlCol="0">
+            <a:spAutoFit/>
+          </a:bodyPr>
+          <a:lstStyle/>
+          <a:p>
+            <a:r>
+              <a:rPr lang="zh-CN" altLang="en-US" sz="1013" b="1" dirty="0"/>
+              <a:t>话题事实</a:t>
+            </a:r>
+            <a:endParaRPr lang="en-US" altLang="zh-CN" sz="1013" b="1" dirty="0"/>
+          </a:p>
+        </p:txBody>
+      </p:sp>
+      <p:cxnSp>
+        <p:nvCxnSpPr>
+          <p:cNvPr id="26" name="直接箭头连接符 25">
+            <a:extLst>
+              <a:ext uri="{FF2B5EF4-FFF2-40B4-BE49-F238E27FC236}">
+                <a16:creationId xmlns:a16="http://schemas.microsoft.com/office/drawing/2014/main" id="{B70050DA-83EA-146D-BA88-877C61F37B74}"/>
+              </a:ext>
+            </a:extLst>
+          </p:cNvPr>
+          <p:cNvCxnSpPr>
+            <a:cxnSpLocks/>
+            <a:stCxn id="2" idx="3"/>
+            <a:endCxn id="18" idx="1"/>
+          </p:cNvCxnSpPr>
+          <p:nvPr/>
+        </p:nvCxnSpPr>
+        <p:spPr>
+          <a:xfrm>
+            <a:off x="2157715" y="1215670"/>
+            <a:ext cx="4028135" cy="0"/>
+          </a:xfrm>
+          <a:prstGeom prst="straightConnector1">
+            <a:avLst/>
+          </a:prstGeom>
+          <a:ln w="38100">
+            <a:tailEnd type="triangle"/>
+          </a:ln>
+        </p:spPr>
+        <p:style>
+          <a:lnRef idx="1">
+            <a:schemeClr val="accent1"/>
+          </a:lnRef>
+          <a:fillRef idx="0">
+            <a:schemeClr val="accent1"/>
+          </a:fillRef>
+          <a:effectRef idx="0">
+            <a:schemeClr val="accent1"/>
+          </a:effectRef>
+          <a:fontRef idx="minor">
+            <a:schemeClr val="tx1"/>
+          </a:fontRef>
+        </p:style>
+      </p:cxnSp>
+      <p:cxnSp>
+        <p:nvCxnSpPr>
+          <p:cNvPr id="30" name="直接箭头连接符 29">
+            <a:extLst>
+              <a:ext uri="{FF2B5EF4-FFF2-40B4-BE49-F238E27FC236}">
+                <a16:creationId xmlns:a16="http://schemas.microsoft.com/office/drawing/2014/main" id="{8C288136-A0CF-3F72-654E-ED877E807DED}"/>
+              </a:ext>
+            </a:extLst>
+          </p:cNvPr>
+          <p:cNvCxnSpPr>
+            <a:cxnSpLocks/>
+            <a:stCxn id="3" idx="3"/>
+            <a:endCxn id="36" idx="1"/>
+          </p:cNvCxnSpPr>
+          <p:nvPr/>
+        </p:nvCxnSpPr>
+        <p:spPr>
+          <a:xfrm flipV="1">
+            <a:off x="2166321" y="1775167"/>
+            <a:ext cx="4065767" cy="2265"/>
+          </a:xfrm>
+          <a:prstGeom prst="straightConnector1">
+            <a:avLst/>
+          </a:prstGeom>
+          <a:ln w="38100">
+            <a:tailEnd type="triangle"/>
+          </a:ln>
+        </p:spPr>
+        <p:style>
+          <a:lnRef idx="1">
+            <a:schemeClr val="accent1"/>
+          </a:lnRef>
+          <a:fillRef idx="0">
+            <a:schemeClr val="accent1"/>
+          </a:fillRef>
+          <a:effectRef idx="0">
+            <a:schemeClr val="accent1"/>
+          </a:effectRef>
+          <a:fontRef idx="minor">
+            <a:schemeClr val="tx1"/>
+          </a:fontRef>
+        </p:style>
+      </p:cxnSp>
+      <p:sp>
+        <p:nvSpPr>
+          <p:cNvPr id="31" name="文本框 30">
+            <a:extLst>
+              <a:ext uri="{FF2B5EF4-FFF2-40B4-BE49-F238E27FC236}">
+                <a16:creationId xmlns:a16="http://schemas.microsoft.com/office/drawing/2014/main" id="{DFFB0C49-F8BC-3D33-2BCF-34572B203C8A}"/>
+              </a:ext>
+            </a:extLst>
+          </p:cNvPr>
+          <p:cNvSpPr txBox="1"/>
+          <p:nvPr/>
+        </p:nvSpPr>
+        <p:spPr>
+          <a:xfrm>
+            <a:off x="3778706" y="1478963"/>
+            <a:ext cx="704039" cy="248209"/>
+          </a:xfrm>
+          <a:prstGeom prst="rect">
+            <a:avLst/>
+          </a:prstGeom>
+          <a:noFill/>
+        </p:spPr>
+        <p:txBody>
+          <a:bodyPr wrap="none" rtlCol="0">
+            <a:spAutoFit/>
+          </a:bodyPr>
+          <a:lstStyle/>
+          <a:p>
+            <a:r>
+              <a:rPr lang="zh-CN" altLang="en-US" sz="1013" b="1" dirty="0"/>
+              <a:t>通信关系</a:t>
+            </a:r>
+            <a:endParaRPr lang="en-US" altLang="zh-CN" sz="1013" b="1" dirty="0"/>
+          </a:p>
+        </p:txBody>
+      </p:sp>
+      <p:cxnSp>
+        <p:nvCxnSpPr>
+          <p:cNvPr id="37" name="直接箭头连接符 36">
+            <a:extLst>
+              <a:ext uri="{FF2B5EF4-FFF2-40B4-BE49-F238E27FC236}">
+                <a16:creationId xmlns:a16="http://schemas.microsoft.com/office/drawing/2014/main" id="{4AC4E2E6-A113-16ED-AB6E-2EF643377951}"/>
+              </a:ext>
+            </a:extLst>
+          </p:cNvPr>
+          <p:cNvCxnSpPr>
+            <a:cxnSpLocks/>
+            <a:stCxn id="9" idx="3"/>
+            <a:endCxn id="55" idx="1"/>
+          </p:cNvCxnSpPr>
+          <p:nvPr/>
+        </p:nvCxnSpPr>
+        <p:spPr>
+          <a:xfrm>
+            <a:off x="2166321" y="3302283"/>
+            <a:ext cx="4070406" cy="0"/>
+          </a:xfrm>
+          <a:prstGeom prst="straightConnector1">
+            <a:avLst/>
+          </a:prstGeom>
+          <a:ln w="38100">
+            <a:tailEnd type="triangle"/>
+          </a:ln>
+        </p:spPr>
+        <p:style>
+          <a:lnRef idx="1">
+            <a:schemeClr val="accent1"/>
+          </a:lnRef>
+          <a:fillRef idx="0">
+            <a:schemeClr val="accent1"/>
+          </a:fillRef>
+          <a:effectRef idx="0">
+            <a:schemeClr val="accent1"/>
+          </a:effectRef>
+          <a:fontRef idx="minor">
+            <a:schemeClr val="tx1"/>
+          </a:fontRef>
+        </p:style>
+      </p:cxnSp>
+      <p:sp>
+        <p:nvSpPr>
+          <p:cNvPr id="39" name="文本框 38">
+            <a:extLst>
+              <a:ext uri="{FF2B5EF4-FFF2-40B4-BE49-F238E27FC236}">
+                <a16:creationId xmlns:a16="http://schemas.microsoft.com/office/drawing/2014/main" id="{3C5A540D-2459-CF5E-3815-344AF2778B59}"/>
+              </a:ext>
+            </a:extLst>
+          </p:cNvPr>
+          <p:cNvSpPr txBox="1"/>
+          <p:nvPr/>
+        </p:nvSpPr>
+        <p:spPr>
+          <a:xfrm>
+            <a:off x="3735163" y="3014888"/>
+            <a:ext cx="1599651" cy="248209"/>
+          </a:xfrm>
+          <a:prstGeom prst="rect">
+            <a:avLst/>
+          </a:prstGeom>
+          <a:noFill/>
+        </p:spPr>
+        <p:txBody>
+          <a:bodyPr wrap="square" rtlCol="0">
+            <a:spAutoFit/>
+          </a:bodyPr>
+          <a:lstStyle/>
+          <a:p>
+            <a:r>
+              <a:rPr lang="zh-CN" altLang="en-US" sz="1013" b="1" dirty="0"/>
+              <a:t>攻击规则</a:t>
+            </a:r>
+            <a:endParaRPr lang="en-US" altLang="zh-CN" sz="1013" b="1" dirty="0"/>
+          </a:p>
+        </p:txBody>
+      </p:sp>
+      <p:sp>
+        <p:nvSpPr>
+          <p:cNvPr id="41" name="文本框 40">
+            <a:extLst>
+              <a:ext uri="{FF2B5EF4-FFF2-40B4-BE49-F238E27FC236}">
+                <a16:creationId xmlns:a16="http://schemas.microsoft.com/office/drawing/2014/main" id="{41D2C6B3-5A8B-1AD9-5F44-E0DD5DD89252}"/>
+              </a:ext>
+            </a:extLst>
+          </p:cNvPr>
+          <p:cNvSpPr txBox="1"/>
+          <p:nvPr/>
+        </p:nvSpPr>
+        <p:spPr>
+          <a:xfrm>
+            <a:off x="3719851" y="3919330"/>
+            <a:ext cx="1211414" cy="248209"/>
+          </a:xfrm>
+          <a:prstGeom prst="rect">
+            <a:avLst/>
+          </a:prstGeom>
+          <a:noFill/>
+        </p:spPr>
+        <p:txBody>
+          <a:bodyPr wrap="square" rtlCol="0">
+            <a:spAutoFit/>
+          </a:bodyPr>
+          <a:lstStyle/>
+          <a:p>
+            <a:r>
+              <a:rPr lang="zh-CN" altLang="en-US" sz="1013" b="1" dirty="0"/>
+              <a:t>查询结论</a:t>
+            </a:r>
+            <a:endParaRPr lang="en-US" altLang="zh-CN" sz="1013" b="1" dirty="0"/>
+          </a:p>
+        </p:txBody>
+      </p:sp>
+      <p:cxnSp>
+        <p:nvCxnSpPr>
+          <p:cNvPr id="58" name="直接箭头连接符 57">
+            <a:extLst>
+              <a:ext uri="{FF2B5EF4-FFF2-40B4-BE49-F238E27FC236}">
+                <a16:creationId xmlns:a16="http://schemas.microsoft.com/office/drawing/2014/main" id="{864F8175-3DD6-19BA-2076-40AC5927B239}"/>
+              </a:ext>
+            </a:extLst>
+          </p:cNvPr>
+          <p:cNvCxnSpPr>
+            <a:cxnSpLocks/>
+            <a:stCxn id="13" idx="3"/>
+            <a:endCxn id="61" idx="1"/>
+          </p:cNvCxnSpPr>
+          <p:nvPr/>
+        </p:nvCxnSpPr>
+        <p:spPr>
+          <a:xfrm>
+            <a:off x="2175809" y="4167539"/>
+            <a:ext cx="4071717" cy="7598"/>
+          </a:xfrm>
+          <a:prstGeom prst="straightConnector1">
+            <a:avLst/>
+          </a:prstGeom>
+          <a:ln w="38100">
+            <a:tailEnd type="triangle"/>
+          </a:ln>
+        </p:spPr>
+        <p:style>
+          <a:lnRef idx="1">
+            <a:schemeClr val="accent1"/>
+          </a:lnRef>
+          <a:fillRef idx="0">
+            <a:schemeClr val="accent1"/>
+          </a:fillRef>
+          <a:effectRef idx="0">
+            <a:schemeClr val="accent1"/>
+          </a:effectRef>
+          <a:fontRef idx="minor">
+            <a:schemeClr val="tx1"/>
+          </a:fontRef>
+        </p:style>
+      </p:cxnSp>
+      <p:sp>
+        <p:nvSpPr>
+          <p:cNvPr id="2" name="流程图: 过程 1">
+            <a:extLst>
+              <a:ext uri="{FF2B5EF4-FFF2-40B4-BE49-F238E27FC236}">
+                <a16:creationId xmlns:a16="http://schemas.microsoft.com/office/drawing/2014/main" id="{9AF6DB0C-8F28-CD33-D8FC-442887960095}"/>
+              </a:ext>
+            </a:extLst>
+          </p:cNvPr>
+          <p:cNvSpPr/>
+          <p:nvPr/>
+        </p:nvSpPr>
+        <p:spPr>
+          <a:xfrm>
+            <a:off x="1037637" y="1033720"/>
+            <a:ext cx="1120078" cy="363900"/>
+          </a:xfrm>
+          <a:prstGeom prst="flowChartProcess">
+            <a:avLst/>
+          </a:prstGeom>
+          <a:solidFill>
+            <a:schemeClr val="accent1">
+              <a:lumMod val="60000"/>
+              <a:lumOff val="40000"/>
+            </a:schemeClr>
+          </a:solidFill>
+        </p:spPr>
+        <p:style>
+          <a:lnRef idx="2">
+            <a:schemeClr val="accent1">
+              <a:shade val="15000"/>
+            </a:schemeClr>
+          </a:lnRef>
+          <a:fillRef idx="1">
+            <a:schemeClr val="accent1"/>
+          </a:fillRef>
+          <a:effectRef idx="0">
+            <a:schemeClr val="accent1"/>
+          </a:effectRef>
+          <a:fontRef idx="minor">
+            <a:schemeClr val="lt1"/>
+          </a:fontRef>
+        </p:style>
+        <p:txBody>
+          <a:bodyPr rtlCol="0" anchor="ctr"/>
+          <a:lstStyle/>
+          <a:p>
+            <a:pPr algn="ctr"/>
+            <a:r>
+              <a:rPr lang="en-US" altLang="zh-CN" sz="1013" b="1" dirty="0">
+                <a:solidFill>
+                  <a:schemeClr val="tx1"/>
+                </a:solidFill>
+              </a:rPr>
+              <a:t>ROS2 topic</a:t>
+            </a:r>
+          </a:p>
+          <a:p>
+            <a:pPr algn="ctr"/>
+            <a:r>
+              <a:rPr lang="en-US" altLang="zh-CN" sz="1013" b="1" dirty="0">
+                <a:solidFill>
+                  <a:schemeClr val="tx1"/>
+                </a:solidFill>
+              </a:rPr>
+              <a:t>(…)</a:t>
+            </a:r>
+            <a:endParaRPr lang="zh-CN" altLang="en-US" sz="1013" b="1" dirty="0">
+              <a:solidFill>
+                <a:schemeClr val="tx1"/>
+              </a:solidFill>
+            </a:endParaRPr>
+          </a:p>
+        </p:txBody>
+      </p:sp>
+      <p:sp>
+        <p:nvSpPr>
+          <p:cNvPr id="3" name="流程图: 过程 2">
+            <a:extLst>
+              <a:ext uri="{FF2B5EF4-FFF2-40B4-BE49-F238E27FC236}">
+                <a16:creationId xmlns:a16="http://schemas.microsoft.com/office/drawing/2014/main" id="{3F5C5C1F-3872-1088-91B6-20250D1A9BFA}"/>
+              </a:ext>
+            </a:extLst>
+          </p:cNvPr>
+          <p:cNvSpPr/>
+          <p:nvPr/>
+        </p:nvSpPr>
+        <p:spPr>
+          <a:xfrm>
+            <a:off x="1046243" y="1595482"/>
+            <a:ext cx="1120078" cy="363900"/>
+          </a:xfrm>
+          <a:prstGeom prst="flowChartProcess">
+            <a:avLst/>
+          </a:prstGeom>
+          <a:solidFill>
+            <a:schemeClr val="accent1">
+              <a:lumMod val="60000"/>
+              <a:lumOff val="40000"/>
+            </a:schemeClr>
+          </a:solidFill>
+        </p:spPr>
+        <p:style>
+          <a:lnRef idx="2">
+            <a:schemeClr val="accent1">
+              <a:shade val="15000"/>
+            </a:schemeClr>
+          </a:lnRef>
+          <a:fillRef idx="1">
+            <a:schemeClr val="accent1"/>
+          </a:fillRef>
+          <a:effectRef idx="0">
+            <a:schemeClr val="accent1"/>
+          </a:effectRef>
+          <a:fontRef idx="minor">
+            <a:schemeClr val="lt1"/>
+          </a:fontRef>
+        </p:style>
+        <p:txBody>
+          <a:bodyPr rtlCol="0" anchor="ctr"/>
+          <a:lstStyle/>
+          <a:p>
+            <a:pPr algn="ctr"/>
+            <a:r>
+              <a:rPr lang="zh-CN" altLang="en-US" sz="1013" b="1" dirty="0">
+                <a:solidFill>
+                  <a:schemeClr val="tx1"/>
+                </a:solidFill>
+              </a:rPr>
+              <a:t>发布者</a:t>
+            </a:r>
+            <a:r>
+              <a:rPr lang="en-US" altLang="zh-CN" sz="1013" b="1" dirty="0">
+                <a:solidFill>
+                  <a:schemeClr val="tx1"/>
+                </a:solidFill>
+              </a:rPr>
+              <a:t>/</a:t>
+            </a:r>
+            <a:r>
+              <a:rPr lang="zh-CN" altLang="en-US" sz="1013" b="1" dirty="0">
+                <a:solidFill>
+                  <a:schemeClr val="tx1"/>
+                </a:solidFill>
+              </a:rPr>
+              <a:t>订阅者</a:t>
+            </a:r>
+            <a:endParaRPr lang="en-US" altLang="zh-CN" sz="1013" b="1" dirty="0">
+              <a:solidFill>
+                <a:schemeClr val="tx1"/>
+              </a:solidFill>
+            </a:endParaRPr>
+          </a:p>
+          <a:p>
+            <a:pPr algn="ctr"/>
+            <a:r>
+              <a:rPr lang="en-US" altLang="zh-CN" sz="1013" b="1" dirty="0">
+                <a:solidFill>
+                  <a:schemeClr val="tx1"/>
+                </a:solidFill>
+              </a:rPr>
+              <a:t>(…)</a:t>
+            </a:r>
+            <a:endParaRPr lang="zh-CN" altLang="en-US" sz="1013" b="1" dirty="0">
+              <a:solidFill>
+                <a:schemeClr val="tx1"/>
+              </a:solidFill>
+            </a:endParaRPr>
+          </a:p>
+        </p:txBody>
+      </p:sp>
+      <p:sp>
+        <p:nvSpPr>
+          <p:cNvPr id="7" name="流程图: 过程 6">
+            <a:extLst>
+              <a:ext uri="{FF2B5EF4-FFF2-40B4-BE49-F238E27FC236}">
+                <a16:creationId xmlns:a16="http://schemas.microsoft.com/office/drawing/2014/main" id="{78671B01-7174-F59D-392D-4E80F7D4D1C6}"/>
+              </a:ext>
+            </a:extLst>
+          </p:cNvPr>
+          <p:cNvSpPr/>
+          <p:nvPr/>
+        </p:nvSpPr>
+        <p:spPr>
+          <a:xfrm>
+            <a:off x="1046243" y="2136519"/>
+            <a:ext cx="1120078" cy="248209"/>
+          </a:xfrm>
+          <a:prstGeom prst="flowChartProcess">
+            <a:avLst/>
+          </a:prstGeom>
+          <a:solidFill>
+            <a:schemeClr val="accent1">
+              <a:lumMod val="60000"/>
+              <a:lumOff val="40000"/>
+            </a:schemeClr>
+          </a:solidFill>
+        </p:spPr>
+        <p:style>
+          <a:lnRef idx="2">
+            <a:schemeClr val="accent1">
+              <a:shade val="15000"/>
+            </a:schemeClr>
+          </a:lnRef>
+          <a:fillRef idx="1">
+            <a:schemeClr val="accent1"/>
+          </a:fillRef>
+          <a:effectRef idx="0">
+            <a:schemeClr val="accent1"/>
+          </a:effectRef>
+          <a:fontRef idx="minor">
+            <a:schemeClr val="lt1"/>
+          </a:fontRef>
+        </p:style>
+        <p:txBody>
+          <a:bodyPr rtlCol="0" anchor="ctr"/>
+          <a:lstStyle/>
+          <a:p>
+            <a:pPr algn="ctr"/>
+            <a:r>
+              <a:rPr lang="zh-CN" altLang="en-US" sz="1013" b="1" dirty="0">
+                <a:solidFill>
+                  <a:schemeClr val="tx1"/>
+                </a:solidFill>
+              </a:rPr>
+              <a:t>显示链</a:t>
+            </a:r>
+          </a:p>
+        </p:txBody>
+      </p:sp>
+      <p:sp>
+        <p:nvSpPr>
+          <p:cNvPr id="9" name="流程图: 过程 8">
+            <a:extLst>
+              <a:ext uri="{FF2B5EF4-FFF2-40B4-BE49-F238E27FC236}">
+                <a16:creationId xmlns:a16="http://schemas.microsoft.com/office/drawing/2014/main" id="{32097377-34CC-691A-EFBE-6021A0637415}"/>
+              </a:ext>
+            </a:extLst>
+          </p:cNvPr>
+          <p:cNvSpPr/>
+          <p:nvPr/>
+        </p:nvSpPr>
+        <p:spPr>
+          <a:xfrm>
+            <a:off x="1046243" y="3178178"/>
+            <a:ext cx="1120078" cy="248209"/>
+          </a:xfrm>
+          <a:prstGeom prst="flowChartProcess">
+            <a:avLst/>
+          </a:prstGeom>
+          <a:solidFill>
+            <a:schemeClr val="accent1">
+              <a:lumMod val="60000"/>
+              <a:lumOff val="40000"/>
+            </a:schemeClr>
+          </a:solidFill>
+        </p:spPr>
+        <p:style>
+          <a:lnRef idx="2">
+            <a:schemeClr val="accent1">
+              <a:shade val="15000"/>
+            </a:schemeClr>
+          </a:lnRef>
+          <a:fillRef idx="1">
+            <a:schemeClr val="accent1"/>
+          </a:fillRef>
+          <a:effectRef idx="0">
+            <a:schemeClr val="accent1"/>
+          </a:effectRef>
+          <a:fontRef idx="minor">
+            <a:schemeClr val="lt1"/>
+          </a:fontRef>
+        </p:style>
+        <p:txBody>
+          <a:bodyPr rtlCol="0" anchor="ctr"/>
+          <a:lstStyle/>
+          <a:p>
+            <a:pPr algn="ctr"/>
+            <a:r>
+              <a:rPr lang="zh-CN" altLang="en-US" sz="1013" b="1" dirty="0">
+                <a:solidFill>
+                  <a:schemeClr val="tx1"/>
+                </a:solidFill>
+              </a:rPr>
+              <a:t>攻击动作</a:t>
+            </a:r>
+          </a:p>
+        </p:txBody>
+      </p:sp>
+      <p:sp>
+        <p:nvSpPr>
+          <p:cNvPr id="13" name="流程图: 过程 12">
+            <a:extLst>
+              <a:ext uri="{FF2B5EF4-FFF2-40B4-BE49-F238E27FC236}">
+                <a16:creationId xmlns:a16="http://schemas.microsoft.com/office/drawing/2014/main" id="{4F538C0F-0B05-9617-4B56-3CAA0445516A}"/>
+              </a:ext>
+            </a:extLst>
+          </p:cNvPr>
+          <p:cNvSpPr/>
+          <p:nvPr/>
+        </p:nvSpPr>
+        <p:spPr>
+          <a:xfrm>
+            <a:off x="1055731" y="4043434"/>
+            <a:ext cx="1120078" cy="248209"/>
+          </a:xfrm>
+          <a:prstGeom prst="flowChartProcess">
+            <a:avLst/>
+          </a:prstGeom>
+          <a:solidFill>
+            <a:schemeClr val="accent1">
+              <a:lumMod val="60000"/>
+              <a:lumOff val="40000"/>
+            </a:schemeClr>
+          </a:solidFill>
+        </p:spPr>
+        <p:style>
+          <a:lnRef idx="2">
+            <a:schemeClr val="accent1">
+              <a:shade val="15000"/>
+            </a:schemeClr>
+          </a:lnRef>
+          <a:fillRef idx="1">
+            <a:schemeClr val="accent1"/>
+          </a:fillRef>
+          <a:effectRef idx="0">
+            <a:schemeClr val="accent1"/>
+          </a:effectRef>
+          <a:fontRef idx="minor">
+            <a:schemeClr val="lt1"/>
+          </a:fontRef>
+        </p:style>
+        <p:txBody>
+          <a:bodyPr rtlCol="0" anchor="ctr"/>
+          <a:lstStyle/>
+          <a:p>
+            <a:pPr algn="ctr"/>
+            <a:r>
+              <a:rPr lang="zh-CN" altLang="en-US" sz="1013" b="1" dirty="0">
+                <a:solidFill>
+                  <a:schemeClr val="tx1"/>
+                </a:solidFill>
+              </a:rPr>
+              <a:t>攻击结果</a:t>
+            </a:r>
+          </a:p>
+        </p:txBody>
+      </p:sp>
+      <p:sp>
+        <p:nvSpPr>
+          <p:cNvPr id="18" name="流程图: 过程 17">
+            <a:extLst>
+              <a:ext uri="{FF2B5EF4-FFF2-40B4-BE49-F238E27FC236}">
+                <a16:creationId xmlns:a16="http://schemas.microsoft.com/office/drawing/2014/main" id="{5614162B-82C9-01B0-77A4-D4AEA6657412}"/>
+              </a:ext>
+            </a:extLst>
+          </p:cNvPr>
+          <p:cNvSpPr/>
+          <p:nvPr/>
+        </p:nvSpPr>
+        <p:spPr>
+          <a:xfrm>
+            <a:off x="6185850" y="1091565"/>
+            <a:ext cx="1926857" cy="248209"/>
+          </a:xfrm>
+          <a:prstGeom prst="flowChartProcess">
+            <a:avLst/>
+          </a:prstGeom>
+          <a:solidFill>
+            <a:schemeClr val="accent1">
+              <a:lumMod val="60000"/>
+              <a:lumOff val="40000"/>
+            </a:schemeClr>
+          </a:solidFill>
+        </p:spPr>
+        <p:style>
+          <a:lnRef idx="2">
+            <a:schemeClr val="accent1">
+              <a:shade val="15000"/>
+            </a:schemeClr>
+          </a:lnRef>
+          <a:fillRef idx="1">
+            <a:schemeClr val="accent1"/>
+          </a:fillRef>
+          <a:effectRef idx="0">
+            <a:schemeClr val="accent1"/>
+          </a:effectRef>
+          <a:fontRef idx="minor">
+            <a:schemeClr val="lt1"/>
+          </a:fontRef>
+        </p:style>
+        <p:txBody>
+          <a:bodyPr rtlCol="0" anchor="ctr"/>
+          <a:lstStyle/>
+          <a:p>
+            <a:pPr algn="ctr"/>
+            <a:r>
+              <a:rPr lang="en-US" altLang="zh-CN" sz="1013" b="1" dirty="0" err="1">
+                <a:solidFill>
+                  <a:schemeClr val="tx1"/>
+                </a:solidFill>
+              </a:rPr>
+              <a:t>rosTopic</a:t>
+            </a:r>
+            <a:r>
+              <a:rPr lang="en-US" altLang="zh-CN" sz="1013" b="1" dirty="0">
+                <a:solidFill>
+                  <a:schemeClr val="tx1"/>
+                </a:solidFill>
+              </a:rPr>
+              <a:t>(...), </a:t>
+            </a:r>
+            <a:r>
+              <a:rPr lang="en-US" altLang="zh-CN" sz="1013" b="1" dirty="0" err="1">
+                <a:solidFill>
+                  <a:schemeClr val="tx1"/>
+                </a:solidFill>
+              </a:rPr>
+              <a:t>messageType</a:t>
+            </a:r>
+            <a:r>
+              <a:rPr lang="en-US" altLang="zh-CN" sz="1013" b="1" dirty="0">
+                <a:solidFill>
+                  <a:schemeClr val="tx1"/>
+                </a:solidFill>
+              </a:rPr>
+              <a:t>(…)</a:t>
+            </a:r>
+            <a:endParaRPr lang="zh-CN" altLang="en-US" sz="1013" b="1" dirty="0">
+              <a:solidFill>
+                <a:schemeClr val="tx1"/>
+              </a:solidFill>
+            </a:endParaRPr>
+          </a:p>
+        </p:txBody>
+      </p:sp>
+      <p:sp>
+        <p:nvSpPr>
+          <p:cNvPr id="36" name="流程图: 过程 35">
+            <a:extLst>
+              <a:ext uri="{FF2B5EF4-FFF2-40B4-BE49-F238E27FC236}">
+                <a16:creationId xmlns:a16="http://schemas.microsoft.com/office/drawing/2014/main" id="{F16F3A73-C166-C4F9-93CF-0343727A47CF}"/>
+              </a:ext>
+            </a:extLst>
+          </p:cNvPr>
+          <p:cNvSpPr/>
+          <p:nvPr/>
+        </p:nvSpPr>
+        <p:spPr>
+          <a:xfrm>
+            <a:off x="6232088" y="1651062"/>
+            <a:ext cx="1926857" cy="248209"/>
+          </a:xfrm>
+          <a:prstGeom prst="flowChartProcess">
+            <a:avLst/>
+          </a:prstGeom>
+          <a:solidFill>
+            <a:schemeClr val="accent1">
+              <a:lumMod val="60000"/>
+              <a:lumOff val="40000"/>
+            </a:schemeClr>
+          </a:solidFill>
+        </p:spPr>
+        <p:style>
+          <a:lnRef idx="2">
+            <a:schemeClr val="accent1">
+              <a:shade val="15000"/>
+            </a:schemeClr>
+          </a:lnRef>
+          <a:fillRef idx="1">
+            <a:schemeClr val="accent1"/>
+          </a:fillRef>
+          <a:effectRef idx="0">
+            <a:schemeClr val="accent1"/>
+          </a:effectRef>
+          <a:fontRef idx="minor">
+            <a:schemeClr val="lt1"/>
+          </a:fontRef>
+        </p:style>
+        <p:txBody>
+          <a:bodyPr rtlCol="0" anchor="ctr"/>
+          <a:lstStyle/>
+          <a:p>
+            <a:pPr algn="ctr"/>
+            <a:r>
+              <a:rPr lang="en-US" altLang="zh-CN" sz="1013" b="1" dirty="0">
+                <a:solidFill>
+                  <a:schemeClr val="tx1"/>
+                </a:solidFill>
+              </a:rPr>
+              <a:t>publishes(...), subscribes(...)</a:t>
+            </a:r>
+            <a:endParaRPr lang="zh-CN" altLang="en-US" sz="1013" b="1" dirty="0">
+              <a:solidFill>
+                <a:schemeClr val="tx1"/>
+              </a:solidFill>
+            </a:endParaRPr>
+          </a:p>
+        </p:txBody>
+      </p:sp>
+      <p:sp>
+        <p:nvSpPr>
+          <p:cNvPr id="44" name="流程图: 过程 43">
+            <a:extLst>
+              <a:ext uri="{FF2B5EF4-FFF2-40B4-BE49-F238E27FC236}">
+                <a16:creationId xmlns:a16="http://schemas.microsoft.com/office/drawing/2014/main" id="{2CC3E7FE-9465-59AD-53AA-04046AA00588}"/>
+              </a:ext>
+            </a:extLst>
+          </p:cNvPr>
+          <p:cNvSpPr/>
+          <p:nvPr/>
+        </p:nvSpPr>
+        <p:spPr>
+          <a:xfrm>
+            <a:off x="6233398" y="2120525"/>
+            <a:ext cx="1926857" cy="248209"/>
+          </a:xfrm>
+          <a:prstGeom prst="flowChartProcess">
+            <a:avLst/>
+          </a:prstGeom>
+          <a:solidFill>
+            <a:schemeClr val="accent1">
+              <a:lumMod val="60000"/>
+              <a:lumOff val="40000"/>
+            </a:schemeClr>
+          </a:solidFill>
+        </p:spPr>
+        <p:style>
+          <a:lnRef idx="2">
+            <a:schemeClr val="accent1">
+              <a:shade val="15000"/>
+            </a:schemeClr>
+          </a:lnRef>
+          <a:fillRef idx="1">
+            <a:schemeClr val="accent1"/>
+          </a:fillRef>
+          <a:effectRef idx="0">
+            <a:schemeClr val="accent1"/>
+          </a:effectRef>
+          <a:fontRef idx="minor">
+            <a:schemeClr val="lt1"/>
+          </a:fontRef>
+        </p:style>
+        <p:txBody>
+          <a:bodyPr rtlCol="0" anchor="ctr"/>
+          <a:lstStyle/>
+          <a:p>
+            <a:pPr algn="ctr"/>
+            <a:r>
+              <a:rPr lang="en-US" altLang="zh-CN" sz="1013" b="1" dirty="0" err="1">
+                <a:solidFill>
+                  <a:schemeClr val="tx1"/>
+                </a:solidFill>
+              </a:rPr>
+              <a:t>trustsSubscriberInput</a:t>
+            </a:r>
+            <a:r>
+              <a:rPr lang="en-US" altLang="zh-CN" sz="1013" b="1" dirty="0">
+                <a:solidFill>
+                  <a:schemeClr val="tx1"/>
+                </a:solidFill>
+              </a:rPr>
+              <a:t>(...)</a:t>
+            </a:r>
+            <a:endParaRPr lang="zh-CN" altLang="en-US" sz="1013" b="1" dirty="0">
+              <a:solidFill>
+                <a:schemeClr val="tx1"/>
+              </a:solidFill>
+            </a:endParaRPr>
+          </a:p>
+        </p:txBody>
+      </p:sp>
+      <p:sp>
+        <p:nvSpPr>
+          <p:cNvPr id="45" name="文本框 44">
+            <a:extLst>
+              <a:ext uri="{FF2B5EF4-FFF2-40B4-BE49-F238E27FC236}">
+                <a16:creationId xmlns:a16="http://schemas.microsoft.com/office/drawing/2014/main" id="{19DBBC88-B8B4-2AEC-C4C9-C42D7AE554A7}"/>
+              </a:ext>
+            </a:extLst>
+          </p:cNvPr>
+          <p:cNvSpPr txBox="1"/>
+          <p:nvPr/>
+        </p:nvSpPr>
+        <p:spPr>
+          <a:xfrm>
+            <a:off x="3723733" y="1976145"/>
+            <a:ext cx="704039" cy="248209"/>
+          </a:xfrm>
+          <a:prstGeom prst="rect">
+            <a:avLst/>
+          </a:prstGeom>
+          <a:noFill/>
+        </p:spPr>
+        <p:txBody>
+          <a:bodyPr wrap="none" rtlCol="0">
+            <a:spAutoFit/>
+          </a:bodyPr>
+          <a:lstStyle/>
+          <a:p>
+            <a:r>
+              <a:rPr lang="zh-CN" altLang="en-US" sz="1013" b="1" dirty="0"/>
+              <a:t>信任假设</a:t>
+            </a:r>
+            <a:endParaRPr lang="en-US" altLang="zh-CN" sz="1013" b="1" dirty="0"/>
+          </a:p>
+        </p:txBody>
+      </p:sp>
+      <p:cxnSp>
+        <p:nvCxnSpPr>
+          <p:cNvPr id="46" name="直接箭头连接符 45">
+            <a:extLst>
+              <a:ext uri="{FF2B5EF4-FFF2-40B4-BE49-F238E27FC236}">
+                <a16:creationId xmlns:a16="http://schemas.microsoft.com/office/drawing/2014/main" id="{E7384D11-3CB6-B53C-3AC8-B70F654050D4}"/>
+              </a:ext>
+            </a:extLst>
+          </p:cNvPr>
+          <p:cNvCxnSpPr>
+            <a:cxnSpLocks/>
+            <a:stCxn id="7" idx="3"/>
+            <a:endCxn id="44" idx="1"/>
+          </p:cNvCxnSpPr>
+          <p:nvPr/>
+        </p:nvCxnSpPr>
+        <p:spPr>
+          <a:xfrm flipV="1">
+            <a:off x="2166321" y="2244630"/>
+            <a:ext cx="4067077" cy="15994"/>
+          </a:xfrm>
+          <a:prstGeom prst="straightConnector1">
+            <a:avLst/>
+          </a:prstGeom>
+          <a:ln w="38100">
+            <a:tailEnd type="triangle"/>
+          </a:ln>
+        </p:spPr>
+        <p:style>
+          <a:lnRef idx="1">
+            <a:schemeClr val="accent1"/>
+          </a:lnRef>
+          <a:fillRef idx="0">
+            <a:schemeClr val="accent1"/>
+          </a:fillRef>
+          <a:effectRef idx="0">
+            <a:schemeClr val="accent1"/>
+          </a:effectRef>
+          <a:fontRef idx="minor">
+            <a:schemeClr val="tx1"/>
+          </a:fontRef>
+        </p:style>
+      </p:cxnSp>
+      <p:sp>
+        <p:nvSpPr>
+          <p:cNvPr id="50" name="流程图: 过程 49">
+            <a:extLst>
+              <a:ext uri="{FF2B5EF4-FFF2-40B4-BE49-F238E27FC236}">
+                <a16:creationId xmlns:a16="http://schemas.microsoft.com/office/drawing/2014/main" id="{053EF8EA-D064-AAE7-4273-3FE18B72DFC5}"/>
+              </a:ext>
+            </a:extLst>
+          </p:cNvPr>
+          <p:cNvSpPr/>
+          <p:nvPr/>
+        </p:nvSpPr>
+        <p:spPr>
+          <a:xfrm>
+            <a:off x="1037637" y="2522700"/>
+            <a:ext cx="1120078" cy="248209"/>
+          </a:xfrm>
+          <a:prstGeom prst="flowChartProcess">
+            <a:avLst/>
+          </a:prstGeom>
+          <a:solidFill>
+            <a:schemeClr val="accent1">
+              <a:lumMod val="60000"/>
+              <a:lumOff val="40000"/>
+            </a:schemeClr>
+          </a:solidFill>
+        </p:spPr>
+        <p:style>
+          <a:lnRef idx="2">
+            <a:schemeClr val="accent1">
+              <a:shade val="15000"/>
+            </a:schemeClr>
+          </a:lnRef>
+          <a:fillRef idx="1">
+            <a:schemeClr val="accent1"/>
+          </a:fillRef>
+          <a:effectRef idx="0">
+            <a:schemeClr val="accent1"/>
+          </a:effectRef>
+          <a:fontRef idx="minor">
+            <a:schemeClr val="lt1"/>
+          </a:fontRef>
+        </p:style>
+        <p:txBody>
+          <a:bodyPr rtlCol="0" anchor="ctr"/>
+          <a:lstStyle/>
+          <a:p>
+            <a:pPr algn="ctr"/>
+            <a:r>
+              <a:rPr lang="zh-CN" altLang="en-US" sz="1013" b="1" dirty="0">
+                <a:solidFill>
+                  <a:schemeClr val="tx1"/>
+                </a:solidFill>
+              </a:rPr>
+              <a:t>桥接节点</a:t>
+            </a:r>
+          </a:p>
+        </p:txBody>
+      </p:sp>
+      <p:sp>
+        <p:nvSpPr>
+          <p:cNvPr id="51" name="流程图: 过程 50">
+            <a:extLst>
+              <a:ext uri="{FF2B5EF4-FFF2-40B4-BE49-F238E27FC236}">
+                <a16:creationId xmlns:a16="http://schemas.microsoft.com/office/drawing/2014/main" id="{4D9A5D6E-8310-F4A1-EBA1-56EC4D932222}"/>
+              </a:ext>
+            </a:extLst>
+          </p:cNvPr>
+          <p:cNvSpPr/>
+          <p:nvPr/>
+        </p:nvSpPr>
+        <p:spPr>
+          <a:xfrm>
+            <a:off x="6246768" y="2490181"/>
+            <a:ext cx="1926857" cy="313247"/>
+          </a:xfrm>
+          <a:prstGeom prst="flowChartProcess">
+            <a:avLst/>
+          </a:prstGeom>
+          <a:solidFill>
+            <a:schemeClr val="accent1">
+              <a:lumMod val="60000"/>
+              <a:lumOff val="40000"/>
+            </a:schemeClr>
+          </a:solidFill>
+        </p:spPr>
+        <p:style>
+          <a:lnRef idx="2">
+            <a:schemeClr val="accent1">
+              <a:shade val="15000"/>
+            </a:schemeClr>
+          </a:lnRef>
+          <a:fillRef idx="1">
+            <a:schemeClr val="accent1"/>
+          </a:fillRef>
+          <a:effectRef idx="0">
+            <a:schemeClr val="accent1"/>
+          </a:effectRef>
+          <a:fontRef idx="minor">
+            <a:schemeClr val="lt1"/>
+          </a:fontRef>
+        </p:style>
+        <p:txBody>
+          <a:bodyPr rtlCol="0" anchor="ctr"/>
+          <a:lstStyle/>
+          <a:p>
+            <a:pPr algn="ctr"/>
+            <a:r>
+              <a:rPr lang="en-US" altLang="zh-CN" sz="1013" b="1" dirty="0" err="1">
+                <a:solidFill>
+                  <a:schemeClr val="tx1"/>
+                </a:solidFill>
+              </a:rPr>
+              <a:t>bridgeNode</a:t>
+            </a:r>
+            <a:r>
+              <a:rPr lang="en-US" altLang="zh-CN" sz="1013" b="1" dirty="0">
+                <a:solidFill>
+                  <a:schemeClr val="tx1"/>
+                </a:solidFill>
+              </a:rPr>
+              <a:t>(...)</a:t>
+            </a:r>
+          </a:p>
+          <a:p>
+            <a:pPr algn="ctr"/>
+            <a:r>
+              <a:rPr lang="zh-CN" altLang="en-US" sz="1013" b="1" dirty="0">
+                <a:solidFill>
+                  <a:schemeClr val="tx1"/>
+                </a:solidFill>
+              </a:rPr>
+              <a:t> </a:t>
+            </a:r>
+            <a:r>
+              <a:rPr lang="en-US" altLang="zh-CN" sz="1013" b="1" dirty="0" err="1">
+                <a:solidFill>
+                  <a:schemeClr val="tx1"/>
+                </a:solidFill>
+              </a:rPr>
+              <a:t>forwardsToPhysicalLayer</a:t>
+            </a:r>
+            <a:r>
+              <a:rPr lang="en-US" altLang="zh-CN" sz="1013" b="1" dirty="0">
+                <a:solidFill>
+                  <a:schemeClr val="tx1"/>
+                </a:solidFill>
+              </a:rPr>
+              <a:t>(…)</a:t>
+            </a:r>
+            <a:endParaRPr lang="zh-CN" altLang="en-US" sz="1013" b="1" dirty="0">
+              <a:solidFill>
+                <a:schemeClr val="tx1"/>
+              </a:solidFill>
+            </a:endParaRPr>
+          </a:p>
+        </p:txBody>
+      </p:sp>
+      <p:sp>
+        <p:nvSpPr>
+          <p:cNvPr id="52" name="文本框 51">
+            <a:extLst>
+              <a:ext uri="{FF2B5EF4-FFF2-40B4-BE49-F238E27FC236}">
+                <a16:creationId xmlns:a16="http://schemas.microsoft.com/office/drawing/2014/main" id="{EB659158-B0FB-0274-B8BC-5441348D7F1C}"/>
+              </a:ext>
+            </a:extLst>
+          </p:cNvPr>
+          <p:cNvSpPr txBox="1"/>
+          <p:nvPr/>
+        </p:nvSpPr>
+        <p:spPr>
+          <a:xfrm>
+            <a:off x="3737103" y="2394845"/>
+            <a:ext cx="979755" cy="248209"/>
+          </a:xfrm>
+          <a:prstGeom prst="rect">
+            <a:avLst/>
+          </a:prstGeom>
+          <a:noFill/>
+        </p:spPr>
+        <p:txBody>
+          <a:bodyPr wrap="none" rtlCol="0">
+            <a:spAutoFit/>
+          </a:bodyPr>
+          <a:lstStyle/>
+          <a:p>
+            <a:r>
+              <a:rPr lang="zh-CN" altLang="en-US" sz="1013" b="1" dirty="0"/>
+              <a:t>下游传播条件</a:t>
+            </a:r>
+            <a:endParaRPr lang="en-US" altLang="zh-CN" sz="1013" b="1" dirty="0"/>
+          </a:p>
+        </p:txBody>
+      </p:sp>
+      <p:cxnSp>
+        <p:nvCxnSpPr>
+          <p:cNvPr id="53" name="直接箭头连接符 52">
+            <a:extLst>
+              <a:ext uri="{FF2B5EF4-FFF2-40B4-BE49-F238E27FC236}">
+                <a16:creationId xmlns:a16="http://schemas.microsoft.com/office/drawing/2014/main" id="{58BDD5E1-77F0-AC4C-C242-37B98F840163}"/>
+              </a:ext>
+            </a:extLst>
+          </p:cNvPr>
+          <p:cNvCxnSpPr>
+            <a:cxnSpLocks/>
+            <a:stCxn id="50" idx="3"/>
+            <a:endCxn id="51" idx="1"/>
+          </p:cNvCxnSpPr>
+          <p:nvPr/>
+        </p:nvCxnSpPr>
+        <p:spPr>
+          <a:xfrm>
+            <a:off x="2157715" y="2646805"/>
+            <a:ext cx="4089053" cy="0"/>
+          </a:xfrm>
+          <a:prstGeom prst="straightConnector1">
+            <a:avLst/>
+          </a:prstGeom>
+          <a:ln w="38100">
+            <a:tailEnd type="triangle"/>
+          </a:ln>
+        </p:spPr>
+        <p:style>
+          <a:lnRef idx="1">
+            <a:schemeClr val="accent1"/>
+          </a:lnRef>
+          <a:fillRef idx="0">
+            <a:schemeClr val="accent1"/>
+          </a:fillRef>
+          <a:effectRef idx="0">
+            <a:schemeClr val="accent1"/>
+          </a:effectRef>
+          <a:fontRef idx="minor">
+            <a:schemeClr val="tx1"/>
+          </a:fontRef>
+        </p:style>
+      </p:cxnSp>
+      <p:sp>
+        <p:nvSpPr>
+          <p:cNvPr id="55" name="流程图: 过程 54">
+            <a:extLst>
+              <a:ext uri="{FF2B5EF4-FFF2-40B4-BE49-F238E27FC236}">
+                <a16:creationId xmlns:a16="http://schemas.microsoft.com/office/drawing/2014/main" id="{EBE1C48A-5554-778C-BFAB-83607B4984BC}"/>
+              </a:ext>
+            </a:extLst>
+          </p:cNvPr>
+          <p:cNvSpPr/>
+          <p:nvPr/>
+        </p:nvSpPr>
+        <p:spPr>
+          <a:xfrm>
+            <a:off x="6236727" y="2908882"/>
+            <a:ext cx="1922217" cy="786801"/>
+          </a:xfrm>
+          <a:prstGeom prst="flowChartProcess">
+            <a:avLst/>
+          </a:prstGeom>
+          <a:solidFill>
+            <a:schemeClr val="accent1">
+              <a:lumMod val="60000"/>
+              <a:lumOff val="40000"/>
+            </a:schemeClr>
+          </a:solidFill>
+        </p:spPr>
+        <p:style>
+          <a:lnRef idx="2">
+            <a:schemeClr val="accent1">
+              <a:shade val="15000"/>
+            </a:schemeClr>
+          </a:lnRef>
+          <a:fillRef idx="1">
+            <a:schemeClr val="accent1"/>
+          </a:fillRef>
+          <a:effectRef idx="0">
+            <a:schemeClr val="accent1"/>
+          </a:effectRef>
+          <a:fontRef idx="minor">
+            <a:schemeClr val="lt1"/>
+          </a:fontRef>
+        </p:style>
+        <p:txBody>
+          <a:bodyPr rtlCol="0" anchor="ctr"/>
+          <a:lstStyle/>
+          <a:p>
+            <a:pPr algn="ctr"/>
+            <a:r>
+              <a:rPr lang="en-US" altLang="zh-CN" sz="1013" b="1" dirty="0" err="1">
+                <a:solidFill>
+                  <a:schemeClr val="tx1"/>
+                </a:solidFill>
+              </a:rPr>
+              <a:t>enumerateTopic</a:t>
+            </a:r>
+            <a:r>
+              <a:rPr lang="en-US" altLang="zh-CN" sz="1013" b="1" dirty="0">
+                <a:solidFill>
+                  <a:schemeClr val="tx1"/>
+                </a:solidFill>
+              </a:rPr>
+              <a:t>(...)</a:t>
+            </a:r>
+          </a:p>
+          <a:p>
+            <a:pPr algn="ctr"/>
+            <a:r>
+              <a:rPr lang="en-US" altLang="zh-CN" sz="1013" b="1" dirty="0" err="1">
+                <a:solidFill>
+                  <a:schemeClr val="tx1"/>
+                </a:solidFill>
+              </a:rPr>
+              <a:t>forgeValidJointState</a:t>
+            </a:r>
+            <a:r>
+              <a:rPr lang="en-US" altLang="zh-CN" sz="1013" b="1" dirty="0">
+                <a:solidFill>
+                  <a:schemeClr val="tx1"/>
+                </a:solidFill>
+              </a:rPr>
+              <a:t>(...)</a:t>
+            </a:r>
+          </a:p>
+          <a:p>
+            <a:pPr algn="ctr"/>
+            <a:r>
+              <a:rPr lang="en-US" altLang="zh-CN" sz="1013" b="1" dirty="0" err="1">
+                <a:solidFill>
+                  <a:schemeClr val="tx1"/>
+                </a:solidFill>
+              </a:rPr>
+              <a:t>injectForgedJointState</a:t>
+            </a:r>
+            <a:r>
+              <a:rPr lang="en-US" altLang="zh-CN" sz="1013" b="1" dirty="0">
+                <a:solidFill>
+                  <a:schemeClr val="tx1"/>
+                </a:solidFill>
+              </a:rPr>
+              <a:t>(...)</a:t>
+            </a:r>
+          </a:p>
+          <a:p>
+            <a:pPr algn="ctr"/>
+            <a:r>
+              <a:rPr lang="en-US" altLang="zh-CN" sz="1013" b="1" dirty="0" err="1">
+                <a:solidFill>
+                  <a:schemeClr val="tx1"/>
+                </a:solidFill>
+              </a:rPr>
+              <a:t>tamperTFStream</a:t>
+            </a:r>
+            <a:r>
+              <a:rPr lang="en-US" altLang="zh-CN" sz="1013" b="1" dirty="0">
+                <a:solidFill>
+                  <a:schemeClr val="tx1"/>
+                </a:solidFill>
+              </a:rPr>
+              <a:t>(...)</a:t>
+            </a:r>
+          </a:p>
+          <a:p>
+            <a:pPr algn="ctr"/>
+            <a:r>
+              <a:rPr lang="en-US" altLang="zh-CN" sz="1013" b="1" dirty="0" err="1">
+                <a:solidFill>
+                  <a:schemeClr val="tx1"/>
+                </a:solidFill>
+              </a:rPr>
+              <a:t>competingPublisherState</a:t>
+            </a:r>
+            <a:r>
+              <a:rPr lang="en-US" altLang="zh-CN" sz="1013" b="1" dirty="0">
+                <a:solidFill>
+                  <a:schemeClr val="tx1"/>
+                </a:solidFill>
+              </a:rPr>
+              <a:t>(...)</a:t>
+            </a:r>
+            <a:endParaRPr lang="zh-CN" altLang="en-US" sz="1013" b="1" dirty="0">
+              <a:solidFill>
+                <a:schemeClr val="tx1"/>
+              </a:solidFill>
+            </a:endParaRPr>
+          </a:p>
+        </p:txBody>
+      </p:sp>
+      <p:sp>
+        <p:nvSpPr>
+          <p:cNvPr id="61" name="流程图: 过程 60">
+            <a:extLst>
+              <a:ext uri="{FF2B5EF4-FFF2-40B4-BE49-F238E27FC236}">
+                <a16:creationId xmlns:a16="http://schemas.microsoft.com/office/drawing/2014/main" id="{B139C133-A022-0930-FA72-A09E29C12873}"/>
+              </a:ext>
+            </a:extLst>
+          </p:cNvPr>
+          <p:cNvSpPr/>
+          <p:nvPr/>
+        </p:nvSpPr>
+        <p:spPr>
+          <a:xfrm>
+            <a:off x="6247526" y="3911732"/>
+            <a:ext cx="1922217" cy="526810"/>
+          </a:xfrm>
+          <a:prstGeom prst="flowChartProcess">
+            <a:avLst/>
+          </a:prstGeom>
+          <a:solidFill>
+            <a:schemeClr val="accent1">
+              <a:lumMod val="60000"/>
+              <a:lumOff val="40000"/>
+            </a:schemeClr>
+          </a:solidFill>
+        </p:spPr>
+        <p:style>
+          <a:lnRef idx="2">
+            <a:schemeClr val="accent1">
+              <a:shade val="15000"/>
+            </a:schemeClr>
+          </a:lnRef>
+          <a:fillRef idx="1">
+            <a:schemeClr val="accent1"/>
+          </a:fillRef>
+          <a:effectRef idx="0">
+            <a:schemeClr val="accent1"/>
+          </a:effectRef>
+          <a:fontRef idx="minor">
+            <a:schemeClr val="lt1"/>
+          </a:fontRef>
+        </p:style>
+        <p:txBody>
+          <a:bodyPr rtlCol="0" anchor="ctr"/>
+          <a:lstStyle/>
+          <a:p>
+            <a:pPr algn="ctr"/>
+            <a:r>
+              <a:rPr lang="en-US" altLang="zh-CN" sz="1013" b="1" dirty="0" err="1">
+                <a:solidFill>
+                  <a:schemeClr val="tx1"/>
+                </a:solidFill>
+              </a:rPr>
+              <a:t>misleadPoseDisplay</a:t>
+            </a:r>
+            <a:r>
+              <a:rPr lang="en-US" altLang="zh-CN" sz="1013" b="1" dirty="0">
+                <a:solidFill>
+                  <a:schemeClr val="tx1"/>
+                </a:solidFill>
+              </a:rPr>
+              <a:t>(...)</a:t>
+            </a:r>
+          </a:p>
+          <a:p>
+            <a:pPr algn="ctr"/>
+            <a:r>
+              <a:rPr lang="en-US" altLang="zh-CN" sz="1013" b="1" dirty="0" err="1">
+                <a:solidFill>
+                  <a:schemeClr val="tx1"/>
+                </a:solidFill>
+              </a:rPr>
+              <a:t>oscillatingPoseDisplay</a:t>
+            </a:r>
+            <a:r>
+              <a:rPr lang="en-US" altLang="zh-CN" sz="1013" b="1" dirty="0">
+                <a:solidFill>
+                  <a:schemeClr val="tx1"/>
+                </a:solidFill>
+              </a:rPr>
+              <a:t>(...)</a:t>
+            </a:r>
+          </a:p>
+          <a:p>
+            <a:pPr algn="ctr"/>
+            <a:r>
+              <a:rPr lang="en-US" altLang="zh-CN" sz="1013" b="1" dirty="0" err="1">
+                <a:solidFill>
+                  <a:schemeClr val="tx1"/>
+                </a:solidFill>
+              </a:rPr>
+              <a:t>policyViolation</a:t>
+            </a:r>
+            <a:r>
+              <a:rPr lang="en-US" altLang="zh-CN" sz="1013" b="1" dirty="0">
+                <a:solidFill>
+                  <a:schemeClr val="tx1"/>
+                </a:solidFill>
+              </a:rPr>
+              <a:t>(...)</a:t>
+            </a:r>
+            <a:endParaRPr lang="zh-CN" altLang="en-US" sz="1013" b="1" dirty="0">
+              <a:solidFill>
+                <a:schemeClr val="tx1"/>
+              </a:solidFill>
+            </a:endParaRPr>
+          </a:p>
+        </p:txBody>
+      </p:sp>
+      <p:sp>
+        <p:nvSpPr>
+          <p:cNvPr id="72" name="文本框 71">
+            <a:extLst>
+              <a:ext uri="{FF2B5EF4-FFF2-40B4-BE49-F238E27FC236}">
+                <a16:creationId xmlns:a16="http://schemas.microsoft.com/office/drawing/2014/main" id="{4A988E90-4CD6-F74E-4FA7-F2D3AE147781}"/>
+              </a:ext>
+            </a:extLst>
+          </p:cNvPr>
+          <p:cNvSpPr txBox="1"/>
+          <p:nvPr/>
+        </p:nvSpPr>
+        <p:spPr>
+          <a:xfrm>
+            <a:off x="144751" y="1028288"/>
+            <a:ext cx="665695" cy="369332"/>
+          </a:xfrm>
+          <a:prstGeom prst="rect">
+            <a:avLst/>
+          </a:prstGeom>
+          <a:noFill/>
+        </p:spPr>
+        <p:txBody>
+          <a:bodyPr wrap="none" rtlCol="0">
+            <a:spAutoFit/>
+          </a:bodyPr>
+          <a:lstStyle/>
+          <a:p>
+            <a:r>
+              <a:rPr lang="en-US" altLang="zh-CN" b="1" dirty="0">
+                <a:solidFill>
+                  <a:schemeClr val="bg2">
+                    <a:lumMod val="75000"/>
+                  </a:schemeClr>
+                </a:solidFill>
+              </a:rPr>
+              <a:t>Facts</a:t>
+            </a:r>
+          </a:p>
+        </p:txBody>
+      </p:sp>
+      <p:sp>
+        <p:nvSpPr>
+          <p:cNvPr id="73" name="文本框 72">
+            <a:extLst>
+              <a:ext uri="{FF2B5EF4-FFF2-40B4-BE49-F238E27FC236}">
+                <a16:creationId xmlns:a16="http://schemas.microsoft.com/office/drawing/2014/main" id="{97888C18-D218-C56A-7B50-72D93E970C85}"/>
+              </a:ext>
+            </a:extLst>
+          </p:cNvPr>
+          <p:cNvSpPr txBox="1"/>
+          <p:nvPr/>
+        </p:nvSpPr>
+        <p:spPr>
+          <a:xfrm>
+            <a:off x="144750" y="2305515"/>
+            <a:ext cx="700833" cy="369332"/>
+          </a:xfrm>
+          <a:prstGeom prst="rect">
+            <a:avLst/>
+          </a:prstGeom>
+          <a:noFill/>
+        </p:spPr>
+        <p:txBody>
+          <a:bodyPr wrap="none" rtlCol="0">
+            <a:spAutoFit/>
+          </a:bodyPr>
+          <a:lstStyle/>
+          <a:p>
+            <a:r>
+              <a:rPr lang="en-US" altLang="zh-CN" b="1" dirty="0">
+                <a:solidFill>
+                  <a:schemeClr val="bg2">
+                    <a:lumMod val="75000"/>
+                  </a:schemeClr>
+                </a:solidFill>
+              </a:rPr>
+              <a:t>Rules</a:t>
+            </a:r>
+          </a:p>
+        </p:txBody>
+      </p:sp>
+      <p:sp>
+        <p:nvSpPr>
+          <p:cNvPr id="74" name="文本框 73">
+            <a:extLst>
+              <a:ext uri="{FF2B5EF4-FFF2-40B4-BE49-F238E27FC236}">
+                <a16:creationId xmlns:a16="http://schemas.microsoft.com/office/drawing/2014/main" id="{64FC6AF1-6560-DAA1-9239-710F5A561B74}"/>
+              </a:ext>
+            </a:extLst>
+          </p:cNvPr>
+          <p:cNvSpPr txBox="1"/>
+          <p:nvPr/>
+        </p:nvSpPr>
+        <p:spPr>
+          <a:xfrm>
+            <a:off x="144751" y="3674102"/>
+            <a:ext cx="926857" cy="369332"/>
+          </a:xfrm>
+          <a:prstGeom prst="rect">
+            <a:avLst/>
+          </a:prstGeom>
+          <a:noFill/>
+        </p:spPr>
+        <p:txBody>
+          <a:bodyPr wrap="none" rtlCol="0">
+            <a:spAutoFit/>
+          </a:bodyPr>
+          <a:lstStyle/>
+          <a:p>
+            <a:r>
+              <a:rPr lang="en-US" altLang="zh-CN" b="1" dirty="0">
+                <a:solidFill>
+                  <a:schemeClr val="bg2">
+                    <a:lumMod val="75000"/>
+                  </a:schemeClr>
+                </a:solidFill>
+              </a:rPr>
+              <a:t>Queries</a:t>
+            </a:r>
+          </a:p>
+        </p:txBody>
+      </p:sp>
+    </p:spTree>
+    <p:extLst>
+      <p:ext uri="{BB962C8B-B14F-4D97-AF65-F5344CB8AC3E}">
+        <p14:creationId xmlns:p14="http://schemas.microsoft.com/office/powerpoint/2010/main" val="2457894277"/>
+      </p:ext>
+    </p:extLst>
+  </p:cSld>
+  <p:clrMapOvr>
+    <a:masterClrMapping/>
+  </p:clrMapOvr>
+</p:sld>
+</file>
+
+<file path=ppt/slides/slide6.xml><?xml version="1.0" encoding="utf-8"?>
+<p:sld xmlns:a="http://schemas.openxmlformats.org/drawingml/2006/main" xmlns:r="http://schemas.openxmlformats.org/officeDocument/2006/relationships" xmlns:p="http://schemas.openxmlformats.org/presentationml/2006/main">
+  <p:cSld>
+    <p:spTree>
+      <p:nvGrpSpPr>
+        <p:cNvPr id="1" name="">
+          <a:extLst>
+            <a:ext uri="{FF2B5EF4-FFF2-40B4-BE49-F238E27FC236}">
               <a16:creationId xmlns:a16="http://schemas.microsoft.com/office/drawing/2014/main" id="{71F0BF03-717F-AD51-261A-32BB78DA46B5}"/>
             </a:ext>
           </a:extLst>
@@ -6598,7 +10099,7 @@
 </p:sld>
 </file>
 
-<file path=ppt/slides/slide5.xml><?xml version="1.0" encoding="utf-8"?>
+<file path=ppt/slides/slide7.xml><?xml version="1.0" encoding="utf-8"?>
 <p:sld xmlns:a="http://schemas.openxmlformats.org/drawingml/2006/main" xmlns:r="http://schemas.openxmlformats.org/officeDocument/2006/relationships" xmlns:p="http://schemas.openxmlformats.org/presentationml/2006/main">
   <p:cSld>
     <p:spTree>
@@ -6606,7 +10107,7 @@
         <p:cNvPr id="1" name="">
           <a:extLst>
             <a:ext uri="{FF2B5EF4-FFF2-40B4-BE49-F238E27FC236}">
-              <a16:creationId xmlns:a16="http://schemas.microsoft.com/office/drawing/2014/main" id="{43A60FA7-66B9-687B-16BE-83478BC4D874}"/>
+              <a16:creationId xmlns:a16="http://schemas.microsoft.com/office/drawing/2014/main" id="{8E97DB3C-63B4-5B8F-90DE-83D2E9CC8C33}"/>
             </a:ext>
           </a:extLst>
         </p:cNvPr>
@@ -6624,7 +10125,79 @@
     </p:spTree>
     <p:extLst>
       <p:ext uri="{BB962C8B-B14F-4D97-AF65-F5344CB8AC3E}">
-        <p14:creationId xmlns:p14="http://schemas.microsoft.com/office/powerpoint/2010/main" val="3653332716"/>
+        <p14:creationId xmlns:p14="http://schemas.microsoft.com/office/powerpoint/2010/main" val="3113690307"/>
+      </p:ext>
+    </p:extLst>
+  </p:cSld>
+  <p:clrMapOvr>
+    <a:masterClrMapping/>
+  </p:clrMapOvr>
+</p:sld>
+</file>
+
+<file path=ppt/slides/slide8.xml><?xml version="1.0" encoding="utf-8"?>
+<p:sld xmlns:a="http://schemas.openxmlformats.org/drawingml/2006/main" xmlns:r="http://schemas.openxmlformats.org/officeDocument/2006/relationships" xmlns:p="http://schemas.openxmlformats.org/presentationml/2006/main">
+  <p:cSld>
+    <p:spTree>
+      <p:nvGrpSpPr>
+        <p:cNvPr id="1" name="">
+          <a:extLst>
+            <a:ext uri="{FF2B5EF4-FFF2-40B4-BE49-F238E27FC236}">
+              <a16:creationId xmlns:a16="http://schemas.microsoft.com/office/drawing/2014/main" id="{C421C4BB-0D73-3AB5-5AA9-CA7435D7D91E}"/>
+            </a:ext>
+          </a:extLst>
+        </p:cNvPr>
+        <p:cNvGrpSpPr/>
+        <p:nvPr/>
+      </p:nvGrpSpPr>
+      <p:grpSpPr>
+        <a:xfrm>
+          <a:off x="0" y="0"/>
+          <a:ext cx="0" cy="0"/>
+          <a:chOff x="0" y="0"/>
+          <a:chExt cx="0" cy="0"/>
+        </a:xfrm>
+      </p:grpSpPr>
+    </p:spTree>
+    <p:extLst>
+      <p:ext uri="{BB962C8B-B14F-4D97-AF65-F5344CB8AC3E}">
+        <p14:creationId xmlns:p14="http://schemas.microsoft.com/office/powerpoint/2010/main" val="441005315"/>
+      </p:ext>
+    </p:extLst>
+  </p:cSld>
+  <p:clrMapOvr>
+    <a:masterClrMapping/>
+  </p:clrMapOvr>
+</p:sld>
+</file>
+
+<file path=ppt/slides/slide9.xml><?xml version="1.0" encoding="utf-8"?>
+<p:sld xmlns:a="http://schemas.openxmlformats.org/drawingml/2006/main" xmlns:r="http://schemas.openxmlformats.org/officeDocument/2006/relationships" xmlns:p="http://schemas.openxmlformats.org/presentationml/2006/main">
+  <p:cSld>
+    <p:spTree>
+      <p:nvGrpSpPr>
+        <p:cNvPr id="1" name="">
+          <a:extLst>
+            <a:ext uri="{FF2B5EF4-FFF2-40B4-BE49-F238E27FC236}">
+              <a16:creationId xmlns:a16="http://schemas.microsoft.com/office/drawing/2014/main" id="{6CB55446-B51C-E3B6-97C8-2A8FE04D7919}"/>
+            </a:ext>
+          </a:extLst>
+        </p:cNvPr>
+        <p:cNvGrpSpPr/>
+        <p:nvPr/>
+      </p:nvGrpSpPr>
+      <p:grpSpPr>
+        <a:xfrm>
+          <a:off x="0" y="0"/>
+          <a:ext cx="0" cy="0"/>
+          <a:chOff x="0" y="0"/>
+          <a:chExt cx="0" cy="0"/>
+        </a:xfrm>
+      </p:grpSpPr>
+    </p:spTree>
+    <p:extLst>
+      <p:ext uri="{BB962C8B-B14F-4D97-AF65-F5344CB8AC3E}">
+        <p14:creationId xmlns:p14="http://schemas.microsoft.com/office/powerpoint/2010/main" val="2859455352"/>
       </p:ext>
     </p:extLst>
   </p:cSld>

--- a/report/src/src.pptx
+++ b/report/src/src.pptx
@@ -10,11 +10,10 @@
     <p:sldId id="260" r:id="rId4"/>
     <p:sldId id="264" r:id="rId5"/>
     <p:sldId id="265" r:id="rId6"/>
-    <p:sldId id="258" r:id="rId7"/>
-    <p:sldId id="261" r:id="rId8"/>
-    <p:sldId id="262" r:id="rId9"/>
-    <p:sldId id="263" r:id="rId10"/>
-    <p:sldId id="259" r:id="rId11"/>
+    <p:sldId id="266" r:id="rId7"/>
+    <p:sldId id="267" r:id="rId8"/>
+    <p:sldId id="268" r:id="rId9"/>
+    <p:sldId id="269" r:id="rId10"/>
   </p:sldIdLst>
   <p:sldSz cx="9144000" cy="5143500" type="screen16x9"/>
   <p:notesSz cx="6858000" cy="9144000"/>
@@ -3826,42 +3825,6 @@
 </p:sld>
 </file>
 
-<file path=ppt/slides/slide10.xml><?xml version="1.0" encoding="utf-8"?>
-<p:sld xmlns:a="http://schemas.openxmlformats.org/drawingml/2006/main" xmlns:r="http://schemas.openxmlformats.org/officeDocument/2006/relationships" xmlns:p="http://schemas.openxmlformats.org/presentationml/2006/main">
-  <p:cSld>
-    <p:spTree>
-      <p:nvGrpSpPr>
-        <p:cNvPr id="1" name="">
-          <a:extLst>
-            <a:ext uri="{FF2B5EF4-FFF2-40B4-BE49-F238E27FC236}">
-              <a16:creationId xmlns:a16="http://schemas.microsoft.com/office/drawing/2014/main" id="{43A60FA7-66B9-687B-16BE-83478BC4D874}"/>
-            </a:ext>
-          </a:extLst>
-        </p:cNvPr>
-        <p:cNvGrpSpPr/>
-        <p:nvPr/>
-      </p:nvGrpSpPr>
-      <p:grpSpPr>
-        <a:xfrm>
-          <a:off x="0" y="0"/>
-          <a:ext cx="0" cy="0"/>
-          <a:chOff x="0" y="0"/>
-          <a:chExt cx="0" cy="0"/>
-        </a:xfrm>
-      </p:grpSpPr>
-    </p:spTree>
-    <p:extLst>
-      <p:ext uri="{BB962C8B-B14F-4D97-AF65-F5344CB8AC3E}">
-        <p14:creationId xmlns:p14="http://schemas.microsoft.com/office/powerpoint/2010/main" val="3653332716"/>
-      </p:ext>
-    </p:extLst>
-  </p:cSld>
-  <p:clrMapOvr>
-    <a:masterClrMapping/>
-  </p:clrMapOvr>
-</p:sld>
-</file>
-
 <file path=ppt/slides/slide2.xml><?xml version="1.0" encoding="utf-8"?>
 <p:sld xmlns:a="http://schemas.openxmlformats.org/drawingml/2006/main" xmlns:r="http://schemas.openxmlformats.org/officeDocument/2006/relationships" xmlns:p="http://schemas.openxmlformats.org/presentationml/2006/main">
   <p:cSld>
@@ -10071,7 +10034,7 @@
         <p:cNvPr id="1" name="">
           <a:extLst>
             <a:ext uri="{FF2B5EF4-FFF2-40B4-BE49-F238E27FC236}">
-              <a16:creationId xmlns:a16="http://schemas.microsoft.com/office/drawing/2014/main" id="{71F0BF03-717F-AD51-261A-32BB78DA46B5}"/>
+              <a16:creationId xmlns:a16="http://schemas.microsoft.com/office/drawing/2014/main" id="{08559C86-954E-2BDA-FCC9-C6651CF81451}"/>
             </a:ext>
           </a:extLst>
         </p:cNvPr>
@@ -10086,10 +10049,1582 @@
           <a:chExt cx="0" cy="0"/>
         </a:xfrm>
       </p:grpSpPr>
+      <p:sp>
+        <p:nvSpPr>
+          <p:cNvPr id="4" name="流程图: 过程 3">
+            <a:extLst>
+              <a:ext uri="{FF2B5EF4-FFF2-40B4-BE49-F238E27FC236}">
+                <a16:creationId xmlns:a16="http://schemas.microsoft.com/office/drawing/2014/main" id="{AD0756A6-951F-BAD0-A47F-94396EE6B2AF}"/>
+              </a:ext>
+            </a:extLst>
+          </p:cNvPr>
+          <p:cNvSpPr/>
+          <p:nvPr/>
+        </p:nvSpPr>
+        <p:spPr>
+          <a:xfrm>
+            <a:off x="465623" y="1069617"/>
+            <a:ext cx="1926857" cy="248209"/>
+          </a:xfrm>
+          <a:prstGeom prst="flowChartProcess">
+            <a:avLst/>
+          </a:prstGeom>
+          <a:solidFill>
+            <a:schemeClr val="accent1">
+              <a:lumMod val="60000"/>
+              <a:lumOff val="40000"/>
+            </a:schemeClr>
+          </a:solidFill>
+        </p:spPr>
+        <p:style>
+          <a:lnRef idx="2">
+            <a:schemeClr val="accent1">
+              <a:shade val="15000"/>
+            </a:schemeClr>
+          </a:lnRef>
+          <a:fillRef idx="1">
+            <a:schemeClr val="accent1"/>
+          </a:fillRef>
+          <a:effectRef idx="0">
+            <a:schemeClr val="accent1"/>
+          </a:effectRef>
+          <a:fontRef idx="minor">
+            <a:schemeClr val="lt1"/>
+          </a:fontRef>
+        </p:style>
+        <p:txBody>
+          <a:bodyPr rtlCol="0" anchor="ctr"/>
+          <a:lstStyle/>
+          <a:p>
+            <a:pPr algn="ctr"/>
+            <a:r>
+              <a:rPr lang="en-US" altLang="zh-CN" sz="1013" b="1" dirty="0" err="1">
+                <a:solidFill>
+                  <a:schemeClr val="tx1"/>
+                </a:solidFill>
+              </a:rPr>
+              <a:t>enumerateTopic</a:t>
+            </a:r>
+            <a:r>
+              <a:rPr lang="en-US" altLang="zh-CN" sz="1013" b="1" dirty="0">
+                <a:solidFill>
+                  <a:schemeClr val="tx1"/>
+                </a:solidFill>
+              </a:rPr>
+              <a:t>(...)</a:t>
+            </a:r>
+            <a:endParaRPr lang="zh-CN" altLang="en-US" sz="1013" b="1" dirty="0">
+              <a:solidFill>
+                <a:schemeClr val="tx1"/>
+              </a:solidFill>
+            </a:endParaRPr>
+          </a:p>
+        </p:txBody>
+      </p:sp>
+      <p:sp>
+        <p:nvSpPr>
+          <p:cNvPr id="5" name="流程图: 过程 4">
+            <a:extLst>
+              <a:ext uri="{FF2B5EF4-FFF2-40B4-BE49-F238E27FC236}">
+                <a16:creationId xmlns:a16="http://schemas.microsoft.com/office/drawing/2014/main" id="{34747F86-D32C-DCDE-AE53-AAEE65E1CD82}"/>
+              </a:ext>
+            </a:extLst>
+          </p:cNvPr>
+          <p:cNvSpPr/>
+          <p:nvPr/>
+        </p:nvSpPr>
+        <p:spPr>
+          <a:xfrm>
+            <a:off x="2888538" y="1067953"/>
+            <a:ext cx="1926855" cy="259761"/>
+          </a:xfrm>
+          <a:prstGeom prst="flowChartProcess">
+            <a:avLst/>
+          </a:prstGeom>
+          <a:solidFill>
+            <a:schemeClr val="accent1">
+              <a:lumMod val="60000"/>
+              <a:lumOff val="40000"/>
+            </a:schemeClr>
+          </a:solidFill>
+        </p:spPr>
+        <p:style>
+          <a:lnRef idx="2">
+            <a:schemeClr val="accent1">
+              <a:shade val="15000"/>
+            </a:schemeClr>
+          </a:lnRef>
+          <a:fillRef idx="1">
+            <a:schemeClr val="accent1"/>
+          </a:fillRef>
+          <a:effectRef idx="0">
+            <a:schemeClr val="accent1"/>
+          </a:effectRef>
+          <a:fontRef idx="minor">
+            <a:schemeClr val="lt1"/>
+          </a:fontRef>
+        </p:style>
+        <p:txBody>
+          <a:bodyPr rtlCol="0" anchor="ctr"/>
+          <a:lstStyle/>
+          <a:p>
+            <a:pPr algn="ctr"/>
+            <a:r>
+              <a:rPr lang="en-US" altLang="zh-CN" sz="1013" b="1" dirty="0" err="1">
+                <a:solidFill>
+                  <a:schemeClr val="tx1"/>
+                </a:solidFill>
+              </a:rPr>
+              <a:t>learnMessageSchema</a:t>
+            </a:r>
+            <a:r>
+              <a:rPr lang="en-US" altLang="zh-CN" sz="1013" b="1" dirty="0">
+                <a:solidFill>
+                  <a:schemeClr val="tx1"/>
+                </a:solidFill>
+              </a:rPr>
+              <a:t>(...)</a:t>
+            </a:r>
+          </a:p>
+        </p:txBody>
+      </p:sp>
+      <p:cxnSp>
+        <p:nvCxnSpPr>
+          <p:cNvPr id="23" name="直接箭头连接符 22">
+            <a:extLst>
+              <a:ext uri="{FF2B5EF4-FFF2-40B4-BE49-F238E27FC236}">
+                <a16:creationId xmlns:a16="http://schemas.microsoft.com/office/drawing/2014/main" id="{4BD1419B-28E4-A599-C798-B0E42459A86C}"/>
+              </a:ext>
+            </a:extLst>
+          </p:cNvPr>
+          <p:cNvCxnSpPr>
+            <a:cxnSpLocks/>
+            <a:stCxn id="21" idx="3"/>
+            <a:endCxn id="22" idx="1"/>
+          </p:cNvCxnSpPr>
+          <p:nvPr/>
+        </p:nvCxnSpPr>
+        <p:spPr>
+          <a:xfrm>
+            <a:off x="4815391" y="2231897"/>
+            <a:ext cx="930467" cy="5776"/>
+          </a:xfrm>
+          <a:prstGeom prst="straightConnector1">
+            <a:avLst/>
+          </a:prstGeom>
+          <a:ln w="38100">
+            <a:tailEnd type="triangle"/>
+          </a:ln>
+        </p:spPr>
+        <p:style>
+          <a:lnRef idx="1">
+            <a:schemeClr val="accent1"/>
+          </a:lnRef>
+          <a:fillRef idx="0">
+            <a:schemeClr val="accent1"/>
+          </a:fillRef>
+          <a:effectRef idx="0">
+            <a:schemeClr val="accent1"/>
+          </a:effectRef>
+          <a:fontRef idx="minor">
+            <a:schemeClr val="tx1"/>
+          </a:fontRef>
+        </p:style>
+      </p:cxnSp>
+      <p:cxnSp>
+        <p:nvCxnSpPr>
+          <p:cNvPr id="68" name="直接箭头连接符 67">
+            <a:extLst>
+              <a:ext uri="{FF2B5EF4-FFF2-40B4-BE49-F238E27FC236}">
+                <a16:creationId xmlns:a16="http://schemas.microsoft.com/office/drawing/2014/main" id="{55C5E49F-F8AF-14CC-BDA4-0EB18E46FC6F}"/>
+              </a:ext>
+            </a:extLst>
+          </p:cNvPr>
+          <p:cNvCxnSpPr>
+            <a:cxnSpLocks/>
+            <a:stCxn id="20" idx="2"/>
+            <a:endCxn id="46" idx="3"/>
+          </p:cNvCxnSpPr>
+          <p:nvPr/>
+        </p:nvCxnSpPr>
+        <p:spPr>
+          <a:xfrm flipH="1">
+            <a:off x="2392481" y="1323220"/>
+            <a:ext cx="3747025" cy="446697"/>
+          </a:xfrm>
+          <a:prstGeom prst="straightConnector1">
+            <a:avLst/>
+          </a:prstGeom>
+          <a:ln w="38100">
+            <a:tailEnd type="triangle"/>
+          </a:ln>
+        </p:spPr>
+        <p:style>
+          <a:lnRef idx="1">
+            <a:schemeClr val="accent1"/>
+          </a:lnRef>
+          <a:fillRef idx="0">
+            <a:schemeClr val="accent1"/>
+          </a:fillRef>
+          <a:effectRef idx="0">
+            <a:schemeClr val="accent1"/>
+          </a:effectRef>
+          <a:fontRef idx="minor">
+            <a:schemeClr val="tx1"/>
+          </a:fontRef>
+        </p:style>
+      </p:cxnSp>
+      <p:cxnSp>
+        <p:nvCxnSpPr>
+          <p:cNvPr id="80" name="直接箭头连接符 79">
+            <a:extLst>
+              <a:ext uri="{FF2B5EF4-FFF2-40B4-BE49-F238E27FC236}">
+                <a16:creationId xmlns:a16="http://schemas.microsoft.com/office/drawing/2014/main" id="{BA9D0923-E17C-30DB-02E1-34C75611FC42}"/>
+              </a:ext>
+            </a:extLst>
+          </p:cNvPr>
+          <p:cNvCxnSpPr>
+            <a:cxnSpLocks/>
+            <a:stCxn id="5" idx="3"/>
+            <a:endCxn id="20" idx="1"/>
+          </p:cNvCxnSpPr>
+          <p:nvPr/>
+        </p:nvCxnSpPr>
+        <p:spPr>
+          <a:xfrm>
+            <a:off x="4815393" y="1197834"/>
+            <a:ext cx="360684" cy="1282"/>
+          </a:xfrm>
+          <a:prstGeom prst="straightConnector1">
+            <a:avLst/>
+          </a:prstGeom>
+          <a:ln w="38100">
+            <a:tailEnd type="triangle"/>
+          </a:ln>
+        </p:spPr>
+        <p:style>
+          <a:lnRef idx="1">
+            <a:schemeClr val="accent1"/>
+          </a:lnRef>
+          <a:fillRef idx="0">
+            <a:schemeClr val="accent1"/>
+          </a:fillRef>
+          <a:effectRef idx="0">
+            <a:schemeClr val="accent1"/>
+          </a:effectRef>
+          <a:fontRef idx="minor">
+            <a:schemeClr val="tx1"/>
+          </a:fontRef>
+        </p:style>
+      </p:cxnSp>
+      <p:cxnSp>
+        <p:nvCxnSpPr>
+          <p:cNvPr id="83" name="直接箭头连接符 82">
+            <a:extLst>
+              <a:ext uri="{FF2B5EF4-FFF2-40B4-BE49-F238E27FC236}">
+                <a16:creationId xmlns:a16="http://schemas.microsoft.com/office/drawing/2014/main" id="{3A487726-7325-FB1F-CA14-E6BF002F65EE}"/>
+              </a:ext>
+            </a:extLst>
+          </p:cNvPr>
+          <p:cNvCxnSpPr>
+            <a:cxnSpLocks/>
+            <a:stCxn id="4" idx="3"/>
+            <a:endCxn id="5" idx="1"/>
+          </p:cNvCxnSpPr>
+          <p:nvPr/>
+        </p:nvCxnSpPr>
+        <p:spPr>
+          <a:xfrm>
+            <a:off x="2392480" y="1193722"/>
+            <a:ext cx="496058" cy="4112"/>
+          </a:xfrm>
+          <a:prstGeom prst="straightConnector1">
+            <a:avLst/>
+          </a:prstGeom>
+          <a:ln w="38100">
+            <a:tailEnd type="triangle"/>
+          </a:ln>
+        </p:spPr>
+        <p:style>
+          <a:lnRef idx="1">
+            <a:schemeClr val="accent1"/>
+          </a:lnRef>
+          <a:fillRef idx="0">
+            <a:schemeClr val="accent1"/>
+          </a:fillRef>
+          <a:effectRef idx="0">
+            <a:schemeClr val="accent1"/>
+          </a:effectRef>
+          <a:fontRef idx="minor">
+            <a:schemeClr val="tx1"/>
+          </a:fontRef>
+        </p:style>
+      </p:cxnSp>
+      <p:sp>
+        <p:nvSpPr>
+          <p:cNvPr id="20" name="流程图: 过程 19">
+            <a:extLst>
+              <a:ext uri="{FF2B5EF4-FFF2-40B4-BE49-F238E27FC236}">
+                <a16:creationId xmlns:a16="http://schemas.microsoft.com/office/drawing/2014/main" id="{060DDFDB-0958-0FA2-F960-7881B63AFC96}"/>
+              </a:ext>
+            </a:extLst>
+          </p:cNvPr>
+          <p:cNvSpPr/>
+          <p:nvPr/>
+        </p:nvSpPr>
+        <p:spPr>
+          <a:xfrm>
+            <a:off x="5176077" y="1075011"/>
+            <a:ext cx="1926857" cy="248209"/>
+          </a:xfrm>
+          <a:prstGeom prst="flowChartProcess">
+            <a:avLst/>
+          </a:prstGeom>
+          <a:solidFill>
+            <a:schemeClr val="accent1">
+              <a:lumMod val="60000"/>
+              <a:lumOff val="40000"/>
+            </a:schemeClr>
+          </a:solidFill>
+        </p:spPr>
+        <p:style>
+          <a:lnRef idx="2">
+            <a:schemeClr val="accent1">
+              <a:shade val="15000"/>
+            </a:schemeClr>
+          </a:lnRef>
+          <a:fillRef idx="1">
+            <a:schemeClr val="accent1"/>
+          </a:fillRef>
+          <a:effectRef idx="0">
+            <a:schemeClr val="accent1"/>
+          </a:effectRef>
+          <a:fontRef idx="minor">
+            <a:schemeClr val="lt1"/>
+          </a:fontRef>
+        </p:style>
+        <p:txBody>
+          <a:bodyPr rtlCol="0" anchor="ctr"/>
+          <a:lstStyle/>
+          <a:p>
+            <a:pPr algn="ctr"/>
+            <a:r>
+              <a:rPr lang="en-US" altLang="zh-CN" sz="1013" b="1" dirty="0" err="1">
+                <a:solidFill>
+                  <a:schemeClr val="tx1"/>
+                </a:solidFill>
+              </a:rPr>
+              <a:t>forgeValidJointState</a:t>
+            </a:r>
+            <a:r>
+              <a:rPr lang="en-US" altLang="zh-CN" sz="1013" b="1" dirty="0">
+                <a:solidFill>
+                  <a:schemeClr val="tx1"/>
+                </a:solidFill>
+              </a:rPr>
+              <a:t>(...)</a:t>
+            </a:r>
+            <a:endParaRPr lang="zh-CN" altLang="en-US" sz="1013" b="1" dirty="0">
+              <a:solidFill>
+                <a:schemeClr val="tx1"/>
+              </a:solidFill>
+            </a:endParaRPr>
+          </a:p>
+        </p:txBody>
+      </p:sp>
+      <p:sp>
+        <p:nvSpPr>
+          <p:cNvPr id="21" name="流程图: 过程 20">
+            <a:extLst>
+              <a:ext uri="{FF2B5EF4-FFF2-40B4-BE49-F238E27FC236}">
+                <a16:creationId xmlns:a16="http://schemas.microsoft.com/office/drawing/2014/main" id="{D4A2504E-085E-4BF7-4449-B530D321C191}"/>
+              </a:ext>
+            </a:extLst>
+          </p:cNvPr>
+          <p:cNvSpPr/>
+          <p:nvPr/>
+        </p:nvSpPr>
+        <p:spPr>
+          <a:xfrm>
+            <a:off x="2888536" y="2102016"/>
+            <a:ext cx="1926855" cy="259761"/>
+          </a:xfrm>
+          <a:prstGeom prst="flowChartProcess">
+            <a:avLst/>
+          </a:prstGeom>
+          <a:solidFill>
+            <a:schemeClr val="accent2">
+              <a:lumMod val="40000"/>
+              <a:lumOff val="60000"/>
+            </a:schemeClr>
+          </a:solidFill>
+        </p:spPr>
+        <p:style>
+          <a:lnRef idx="2">
+            <a:schemeClr val="accent1">
+              <a:shade val="15000"/>
+            </a:schemeClr>
+          </a:lnRef>
+          <a:fillRef idx="1">
+            <a:schemeClr val="accent1"/>
+          </a:fillRef>
+          <a:effectRef idx="0">
+            <a:schemeClr val="accent1"/>
+          </a:effectRef>
+          <a:fontRef idx="minor">
+            <a:schemeClr val="lt1"/>
+          </a:fontRef>
+        </p:style>
+        <p:txBody>
+          <a:bodyPr rtlCol="0" anchor="ctr"/>
+          <a:lstStyle/>
+          <a:p>
+            <a:pPr algn="ctr"/>
+            <a:r>
+              <a:rPr lang="en-US" altLang="zh-CN" sz="1013" b="1" dirty="0" err="1">
+                <a:solidFill>
+                  <a:schemeClr val="tx1"/>
+                </a:solidFill>
+              </a:rPr>
+              <a:t>tamperTFStream</a:t>
+            </a:r>
+            <a:r>
+              <a:rPr lang="en-US" altLang="zh-CN" sz="1013" b="1" dirty="0">
+                <a:solidFill>
+                  <a:schemeClr val="tx1"/>
+                </a:solidFill>
+              </a:rPr>
+              <a:t>(...)</a:t>
+            </a:r>
+          </a:p>
+        </p:txBody>
+      </p:sp>
+      <p:sp>
+        <p:nvSpPr>
+          <p:cNvPr id="22" name="流程图: 过程 21">
+            <a:extLst>
+              <a:ext uri="{FF2B5EF4-FFF2-40B4-BE49-F238E27FC236}">
+                <a16:creationId xmlns:a16="http://schemas.microsoft.com/office/drawing/2014/main" id="{7A0DAF72-85FA-E803-7AD6-F04A2FE5DCA8}"/>
+              </a:ext>
+            </a:extLst>
+          </p:cNvPr>
+          <p:cNvSpPr/>
+          <p:nvPr/>
+        </p:nvSpPr>
+        <p:spPr>
+          <a:xfrm>
+            <a:off x="5745858" y="2113568"/>
+            <a:ext cx="1926857" cy="248209"/>
+          </a:xfrm>
+          <a:prstGeom prst="flowChartProcess">
+            <a:avLst/>
+          </a:prstGeom>
+          <a:solidFill>
+            <a:schemeClr val="accent2">
+              <a:lumMod val="40000"/>
+              <a:lumOff val="60000"/>
+            </a:schemeClr>
+          </a:solidFill>
+        </p:spPr>
+        <p:style>
+          <a:lnRef idx="2">
+            <a:schemeClr val="accent1">
+              <a:shade val="15000"/>
+            </a:schemeClr>
+          </a:lnRef>
+          <a:fillRef idx="1">
+            <a:schemeClr val="accent1"/>
+          </a:fillRef>
+          <a:effectRef idx="0">
+            <a:schemeClr val="accent1"/>
+          </a:effectRef>
+          <a:fontRef idx="minor">
+            <a:schemeClr val="lt1"/>
+          </a:fontRef>
+        </p:style>
+        <p:txBody>
+          <a:bodyPr rtlCol="0" anchor="ctr"/>
+          <a:lstStyle/>
+          <a:p>
+            <a:pPr algn="ctr"/>
+            <a:r>
+              <a:rPr lang="en-US" altLang="zh-CN" sz="1013" b="1" dirty="0" err="1">
+                <a:solidFill>
+                  <a:schemeClr val="tx1"/>
+                </a:solidFill>
+              </a:rPr>
+              <a:t>misleadPoseDisplay</a:t>
+            </a:r>
+            <a:r>
+              <a:rPr lang="en-US" altLang="zh-CN" sz="1013" b="1" dirty="0">
+                <a:solidFill>
+                  <a:schemeClr val="tx1"/>
+                </a:solidFill>
+              </a:rPr>
+              <a:t>(...)</a:t>
+            </a:r>
+            <a:endParaRPr lang="zh-CN" altLang="en-US" sz="1013" b="1" dirty="0">
+              <a:solidFill>
+                <a:schemeClr val="tx1"/>
+              </a:solidFill>
+            </a:endParaRPr>
+          </a:p>
+        </p:txBody>
+      </p:sp>
+      <p:sp>
+        <p:nvSpPr>
+          <p:cNvPr id="45" name="标注: 下箭头 44">
+            <a:extLst>
+              <a:ext uri="{FF2B5EF4-FFF2-40B4-BE49-F238E27FC236}">
+                <a16:creationId xmlns:a16="http://schemas.microsoft.com/office/drawing/2014/main" id="{1AA8D196-8CBA-A1DD-B1C4-57865DFE8860}"/>
+              </a:ext>
+            </a:extLst>
+          </p:cNvPr>
+          <p:cNvSpPr/>
+          <p:nvPr/>
+        </p:nvSpPr>
+        <p:spPr>
+          <a:xfrm>
+            <a:off x="5335595" y="158718"/>
+            <a:ext cx="1607820" cy="895905"/>
+          </a:xfrm>
+          <a:prstGeom prst="downArrowCallout">
+            <a:avLst/>
+          </a:prstGeom>
+          <a:solidFill>
+            <a:schemeClr val="bg1"/>
+          </a:solidFill>
+        </p:spPr>
+        <p:style>
+          <a:lnRef idx="2">
+            <a:schemeClr val="accent1">
+              <a:shade val="15000"/>
+            </a:schemeClr>
+          </a:lnRef>
+          <a:fillRef idx="1">
+            <a:schemeClr val="accent1"/>
+          </a:fillRef>
+          <a:effectRef idx="0">
+            <a:schemeClr val="accent1"/>
+          </a:effectRef>
+          <a:fontRef idx="minor">
+            <a:schemeClr val="lt1"/>
+          </a:fontRef>
+        </p:style>
+        <p:txBody>
+          <a:bodyPr rtlCol="0" anchor="ctr"/>
+          <a:lstStyle/>
+          <a:p>
+            <a:pPr algn="ctr"/>
+            <a:r>
+              <a:rPr lang="zh-CN" altLang="en-US" sz="1000" b="1" dirty="0">
+                <a:solidFill>
+                  <a:schemeClr val="tx1"/>
+                </a:solidFill>
+              </a:rPr>
+              <a:t>关键条件</a:t>
+            </a:r>
+          </a:p>
+          <a:p>
+            <a:pPr algn="ctr"/>
+            <a:r>
+              <a:rPr lang="en-US" altLang="zh-CN" sz="1000" b="1" dirty="0">
+                <a:solidFill>
+                  <a:schemeClr val="tx1"/>
+                </a:solidFill>
+              </a:rPr>
+              <a:t>- </a:t>
+            </a:r>
+            <a:r>
+              <a:rPr lang="zh-CN" altLang="en-US" sz="1000" b="1" dirty="0">
+                <a:solidFill>
+                  <a:schemeClr val="tx1"/>
+                </a:solidFill>
+              </a:rPr>
+              <a:t>关节名称匹配</a:t>
+            </a:r>
+          </a:p>
+          <a:p>
+            <a:pPr algn="ctr"/>
+            <a:r>
+              <a:rPr lang="en-US" altLang="zh-CN" sz="1000" b="1" dirty="0">
+                <a:solidFill>
+                  <a:schemeClr val="tx1"/>
+                </a:solidFill>
+              </a:rPr>
+              <a:t>- </a:t>
+            </a:r>
+            <a:r>
+              <a:rPr lang="zh-CN" altLang="en-US" sz="1000" b="1" dirty="0">
+                <a:solidFill>
+                  <a:schemeClr val="tx1"/>
+                </a:solidFill>
+              </a:rPr>
+              <a:t>关节范围合法</a:t>
+            </a:r>
+          </a:p>
+          <a:p>
+            <a:pPr algn="ctr"/>
+            <a:r>
+              <a:rPr lang="en-US" altLang="zh-CN" sz="1000" b="1" dirty="0">
+                <a:solidFill>
+                  <a:schemeClr val="tx1"/>
+                </a:solidFill>
+              </a:rPr>
+              <a:t>- </a:t>
+            </a:r>
+            <a:r>
+              <a:rPr lang="zh-CN" altLang="en-US" sz="1000" b="1" dirty="0">
+                <a:solidFill>
+                  <a:schemeClr val="tx1"/>
+                </a:solidFill>
+              </a:rPr>
+              <a:t>时间戳有效</a:t>
+            </a:r>
+          </a:p>
+        </p:txBody>
+      </p:sp>
+      <p:sp>
+        <p:nvSpPr>
+          <p:cNvPr id="46" name="流程图: 过程 45">
+            <a:extLst>
+              <a:ext uri="{FF2B5EF4-FFF2-40B4-BE49-F238E27FC236}">
+                <a16:creationId xmlns:a16="http://schemas.microsoft.com/office/drawing/2014/main" id="{CB39DAFC-3483-A092-927A-A3304EE9A535}"/>
+              </a:ext>
+            </a:extLst>
+          </p:cNvPr>
+          <p:cNvSpPr/>
+          <p:nvPr/>
+        </p:nvSpPr>
+        <p:spPr>
+          <a:xfrm>
+            <a:off x="465624" y="1645812"/>
+            <a:ext cx="1926857" cy="248209"/>
+          </a:xfrm>
+          <a:prstGeom prst="flowChartProcess">
+            <a:avLst/>
+          </a:prstGeom>
+          <a:solidFill>
+            <a:schemeClr val="accent2">
+              <a:lumMod val="40000"/>
+              <a:lumOff val="60000"/>
+            </a:schemeClr>
+          </a:solidFill>
+        </p:spPr>
+        <p:style>
+          <a:lnRef idx="2">
+            <a:schemeClr val="accent1">
+              <a:shade val="15000"/>
+            </a:schemeClr>
+          </a:lnRef>
+          <a:fillRef idx="1">
+            <a:schemeClr val="accent1"/>
+          </a:fillRef>
+          <a:effectRef idx="0">
+            <a:schemeClr val="accent1"/>
+          </a:effectRef>
+          <a:fontRef idx="minor">
+            <a:schemeClr val="lt1"/>
+          </a:fontRef>
+        </p:style>
+        <p:txBody>
+          <a:bodyPr rtlCol="0" anchor="ctr"/>
+          <a:lstStyle/>
+          <a:p>
+            <a:pPr algn="ctr"/>
+            <a:r>
+              <a:rPr lang="en-US" altLang="zh-CN" sz="1013" b="1" dirty="0" err="1">
+                <a:solidFill>
+                  <a:schemeClr val="tx1"/>
+                </a:solidFill>
+              </a:rPr>
+              <a:t>injectForgedJointState</a:t>
+            </a:r>
+            <a:r>
+              <a:rPr lang="en-US" altLang="zh-CN" sz="1013" b="1" dirty="0">
+                <a:solidFill>
+                  <a:schemeClr val="tx1"/>
+                </a:solidFill>
+              </a:rPr>
+              <a:t>(...)</a:t>
+            </a:r>
+            <a:endParaRPr lang="zh-CN" altLang="en-US" sz="1013" b="1" dirty="0">
+              <a:solidFill>
+                <a:schemeClr val="tx1"/>
+              </a:solidFill>
+            </a:endParaRPr>
+          </a:p>
+        </p:txBody>
+      </p:sp>
+      <p:sp>
+        <p:nvSpPr>
+          <p:cNvPr id="47" name="流程图: 过程 46">
+            <a:extLst>
+              <a:ext uri="{FF2B5EF4-FFF2-40B4-BE49-F238E27FC236}">
+                <a16:creationId xmlns:a16="http://schemas.microsoft.com/office/drawing/2014/main" id="{A95984B8-1E4F-E9E3-098A-6F32ADE9DFB6}"/>
+              </a:ext>
+            </a:extLst>
+          </p:cNvPr>
+          <p:cNvSpPr/>
+          <p:nvPr/>
+        </p:nvSpPr>
+        <p:spPr>
+          <a:xfrm>
+            <a:off x="1677128" y="2948242"/>
+            <a:ext cx="2120987" cy="259761"/>
+          </a:xfrm>
+          <a:prstGeom prst="flowChartProcess">
+            <a:avLst/>
+          </a:prstGeom>
+          <a:solidFill>
+            <a:srgbClr val="FF0000"/>
+          </a:solidFill>
+        </p:spPr>
+        <p:style>
+          <a:lnRef idx="2">
+            <a:schemeClr val="accent1">
+              <a:shade val="15000"/>
+            </a:schemeClr>
+          </a:lnRef>
+          <a:fillRef idx="1">
+            <a:schemeClr val="accent1"/>
+          </a:fillRef>
+          <a:effectRef idx="0">
+            <a:schemeClr val="accent1"/>
+          </a:effectRef>
+          <a:fontRef idx="minor">
+            <a:schemeClr val="lt1"/>
+          </a:fontRef>
+        </p:style>
+        <p:txBody>
+          <a:bodyPr rtlCol="0" anchor="ctr"/>
+          <a:lstStyle/>
+          <a:p>
+            <a:pPr algn="ctr"/>
+            <a:r>
+              <a:rPr lang="en-US" altLang="zh-CN" sz="1013" b="1" dirty="0" err="1">
+                <a:solidFill>
+                  <a:schemeClr val="tx1"/>
+                </a:solidFill>
+              </a:rPr>
+              <a:t>legitimatePublisher</a:t>
+            </a:r>
+            <a:r>
+              <a:rPr lang="en-US" altLang="zh-CN" sz="1013" b="1" dirty="0">
+                <a:solidFill>
+                  <a:schemeClr val="tx1"/>
+                </a:solidFill>
+              </a:rPr>
+              <a:t>(...)</a:t>
+            </a:r>
+          </a:p>
+        </p:txBody>
+      </p:sp>
+      <p:cxnSp>
+        <p:nvCxnSpPr>
+          <p:cNvPr id="48" name="直接箭头连接符 47">
+            <a:extLst>
+              <a:ext uri="{FF2B5EF4-FFF2-40B4-BE49-F238E27FC236}">
+                <a16:creationId xmlns:a16="http://schemas.microsoft.com/office/drawing/2014/main" id="{16E6E32D-23D8-DB39-5200-DAAA6252B050}"/>
+              </a:ext>
+            </a:extLst>
+          </p:cNvPr>
+          <p:cNvCxnSpPr>
+            <a:cxnSpLocks/>
+            <a:stCxn id="54" idx="3"/>
+            <a:endCxn id="55" idx="1"/>
+          </p:cNvCxnSpPr>
+          <p:nvPr/>
+        </p:nvCxnSpPr>
+        <p:spPr>
+          <a:xfrm flipV="1">
+            <a:off x="2392480" y="4508066"/>
+            <a:ext cx="856739" cy="2838"/>
+          </a:xfrm>
+          <a:prstGeom prst="straightConnector1">
+            <a:avLst/>
+          </a:prstGeom>
+          <a:ln w="38100">
+            <a:tailEnd type="triangle"/>
+          </a:ln>
+        </p:spPr>
+        <p:style>
+          <a:lnRef idx="1">
+            <a:schemeClr val="accent1"/>
+          </a:lnRef>
+          <a:fillRef idx="0">
+            <a:schemeClr val="accent1"/>
+          </a:fillRef>
+          <a:effectRef idx="0">
+            <a:schemeClr val="accent1"/>
+          </a:effectRef>
+          <a:fontRef idx="minor">
+            <a:schemeClr val="tx1"/>
+          </a:fontRef>
+        </p:style>
+      </p:cxnSp>
+      <p:cxnSp>
+        <p:nvCxnSpPr>
+          <p:cNvPr id="51" name="直接箭头连接符 50">
+            <a:extLst>
+              <a:ext uri="{FF2B5EF4-FFF2-40B4-BE49-F238E27FC236}">
+                <a16:creationId xmlns:a16="http://schemas.microsoft.com/office/drawing/2014/main" id="{F6E89D4B-1F77-95B8-60A3-917D4364BFAE}"/>
+              </a:ext>
+            </a:extLst>
+          </p:cNvPr>
+          <p:cNvCxnSpPr>
+            <a:cxnSpLocks/>
+            <a:stCxn id="47" idx="3"/>
+            <a:endCxn id="60" idx="1"/>
+          </p:cNvCxnSpPr>
+          <p:nvPr/>
+        </p:nvCxnSpPr>
+        <p:spPr>
+          <a:xfrm>
+            <a:off x="3798115" y="3078123"/>
+            <a:ext cx="414533" cy="356799"/>
+          </a:xfrm>
+          <a:prstGeom prst="straightConnector1">
+            <a:avLst/>
+          </a:prstGeom>
+          <a:ln w="38100">
+            <a:tailEnd type="triangle"/>
+          </a:ln>
+        </p:spPr>
+        <p:style>
+          <a:lnRef idx="1">
+            <a:schemeClr val="accent1"/>
+          </a:lnRef>
+          <a:fillRef idx="0">
+            <a:schemeClr val="accent1"/>
+          </a:fillRef>
+          <a:effectRef idx="0">
+            <a:schemeClr val="accent1"/>
+          </a:effectRef>
+          <a:fontRef idx="minor">
+            <a:schemeClr val="tx1"/>
+          </a:fontRef>
+        </p:style>
+      </p:cxnSp>
+      <p:cxnSp>
+        <p:nvCxnSpPr>
+          <p:cNvPr id="52" name="直接箭头连接符 51">
+            <a:extLst>
+              <a:ext uri="{FF2B5EF4-FFF2-40B4-BE49-F238E27FC236}">
+                <a16:creationId xmlns:a16="http://schemas.microsoft.com/office/drawing/2014/main" id="{007F0B5F-8C1D-2136-BA74-E014EAD42FCA}"/>
+              </a:ext>
+            </a:extLst>
+          </p:cNvPr>
+          <p:cNvCxnSpPr>
+            <a:cxnSpLocks/>
+            <a:stCxn id="46" idx="2"/>
+            <a:endCxn id="21" idx="1"/>
+          </p:cNvCxnSpPr>
+          <p:nvPr/>
+        </p:nvCxnSpPr>
+        <p:spPr>
+          <a:xfrm>
+            <a:off x="1429053" y="1894021"/>
+            <a:ext cx="1459483" cy="337876"/>
+          </a:xfrm>
+          <a:prstGeom prst="straightConnector1">
+            <a:avLst/>
+          </a:prstGeom>
+          <a:ln w="38100">
+            <a:tailEnd type="triangle"/>
+          </a:ln>
+        </p:spPr>
+        <p:style>
+          <a:lnRef idx="1">
+            <a:schemeClr val="accent1"/>
+          </a:lnRef>
+          <a:fillRef idx="0">
+            <a:schemeClr val="accent1"/>
+          </a:fillRef>
+          <a:effectRef idx="0">
+            <a:schemeClr val="accent1"/>
+          </a:effectRef>
+          <a:fontRef idx="minor">
+            <a:schemeClr val="tx1"/>
+          </a:fontRef>
+        </p:style>
+      </p:cxnSp>
+      <p:sp>
+        <p:nvSpPr>
+          <p:cNvPr id="53" name="流程图: 过程 52">
+            <a:extLst>
+              <a:ext uri="{FF2B5EF4-FFF2-40B4-BE49-F238E27FC236}">
+                <a16:creationId xmlns:a16="http://schemas.microsoft.com/office/drawing/2014/main" id="{23061A1D-9BB7-E5A7-EDC9-E2EEF9810884}"/>
+              </a:ext>
+            </a:extLst>
+          </p:cNvPr>
+          <p:cNvSpPr/>
+          <p:nvPr/>
+        </p:nvSpPr>
+        <p:spPr>
+          <a:xfrm>
+            <a:off x="6450574" y="3310817"/>
+            <a:ext cx="1926857" cy="248209"/>
+          </a:xfrm>
+          <a:prstGeom prst="flowChartProcess">
+            <a:avLst/>
+          </a:prstGeom>
+          <a:solidFill>
+            <a:srgbClr val="FF0000"/>
+          </a:solidFill>
+        </p:spPr>
+        <p:style>
+          <a:lnRef idx="2">
+            <a:schemeClr val="accent1">
+              <a:shade val="15000"/>
+            </a:schemeClr>
+          </a:lnRef>
+          <a:fillRef idx="1">
+            <a:schemeClr val="accent1"/>
+          </a:fillRef>
+          <a:effectRef idx="0">
+            <a:schemeClr val="accent1"/>
+          </a:effectRef>
+          <a:fontRef idx="minor">
+            <a:schemeClr val="lt1"/>
+          </a:fontRef>
+        </p:style>
+        <p:txBody>
+          <a:bodyPr rtlCol="0" anchor="ctr"/>
+          <a:lstStyle/>
+          <a:p>
+            <a:pPr algn="ctr"/>
+            <a:r>
+              <a:rPr lang="en-US" altLang="zh-CN" sz="1013" b="1" dirty="0" err="1">
+                <a:solidFill>
+                  <a:schemeClr val="tx1"/>
+                </a:solidFill>
+              </a:rPr>
+              <a:t>oscillatingPoseDisplay</a:t>
+            </a:r>
+            <a:r>
+              <a:rPr lang="en-US" altLang="zh-CN" sz="1013" b="1" dirty="0">
+                <a:solidFill>
+                  <a:schemeClr val="tx1"/>
+                </a:solidFill>
+              </a:rPr>
+              <a:t>(...)</a:t>
+            </a:r>
+            <a:endParaRPr lang="zh-CN" altLang="en-US" sz="1013" b="1" dirty="0">
+              <a:solidFill>
+                <a:schemeClr val="tx1"/>
+              </a:solidFill>
+            </a:endParaRPr>
+          </a:p>
+        </p:txBody>
+      </p:sp>
+      <p:sp>
+        <p:nvSpPr>
+          <p:cNvPr id="54" name="流程图: 过程 53">
+            <a:extLst>
+              <a:ext uri="{FF2B5EF4-FFF2-40B4-BE49-F238E27FC236}">
+                <a16:creationId xmlns:a16="http://schemas.microsoft.com/office/drawing/2014/main" id="{A8DEF697-6025-9D6A-6092-C4A86C36B47A}"/>
+              </a:ext>
+            </a:extLst>
+          </p:cNvPr>
+          <p:cNvSpPr/>
+          <p:nvPr/>
+        </p:nvSpPr>
+        <p:spPr>
+          <a:xfrm>
+            <a:off x="465625" y="4381023"/>
+            <a:ext cx="1926855" cy="259761"/>
+          </a:xfrm>
+          <a:prstGeom prst="flowChartProcess">
+            <a:avLst/>
+          </a:prstGeom>
+          <a:solidFill>
+            <a:schemeClr val="bg2">
+              <a:lumMod val="75000"/>
+            </a:schemeClr>
+          </a:solidFill>
+        </p:spPr>
+        <p:style>
+          <a:lnRef idx="2">
+            <a:schemeClr val="accent1">
+              <a:shade val="15000"/>
+            </a:schemeClr>
+          </a:lnRef>
+          <a:fillRef idx="1">
+            <a:schemeClr val="accent1"/>
+          </a:fillRef>
+          <a:effectRef idx="0">
+            <a:schemeClr val="accent1"/>
+          </a:effectRef>
+          <a:fontRef idx="minor">
+            <a:schemeClr val="lt1"/>
+          </a:fontRef>
+        </p:style>
+        <p:txBody>
+          <a:bodyPr rtlCol="0" anchor="ctr"/>
+          <a:lstStyle/>
+          <a:p>
+            <a:pPr algn="ctr"/>
+            <a:r>
+              <a:rPr lang="en-US" altLang="zh-CN" sz="1013" b="1" dirty="0" err="1">
+                <a:solidFill>
+                  <a:schemeClr val="tx1"/>
+                </a:solidFill>
+              </a:rPr>
+              <a:t>propagateToBridge</a:t>
+            </a:r>
+            <a:r>
+              <a:rPr lang="en-US" altLang="zh-CN" sz="1013" b="1" dirty="0">
+                <a:solidFill>
+                  <a:schemeClr val="tx1"/>
+                </a:solidFill>
+              </a:rPr>
+              <a:t>(...)</a:t>
+            </a:r>
+          </a:p>
+        </p:txBody>
+      </p:sp>
+      <p:sp>
+        <p:nvSpPr>
+          <p:cNvPr id="55" name="流程图: 过程 54">
+            <a:extLst>
+              <a:ext uri="{FF2B5EF4-FFF2-40B4-BE49-F238E27FC236}">
+                <a16:creationId xmlns:a16="http://schemas.microsoft.com/office/drawing/2014/main" id="{3E465E17-6726-4E67-89A9-0BD0AC194BDF}"/>
+              </a:ext>
+            </a:extLst>
+          </p:cNvPr>
+          <p:cNvSpPr/>
+          <p:nvPr/>
+        </p:nvSpPr>
+        <p:spPr>
+          <a:xfrm>
+            <a:off x="3249219" y="4383961"/>
+            <a:ext cx="1926857" cy="248209"/>
+          </a:xfrm>
+          <a:prstGeom prst="flowChartProcess">
+            <a:avLst/>
+          </a:prstGeom>
+          <a:solidFill>
+            <a:schemeClr val="bg2">
+              <a:lumMod val="75000"/>
+            </a:schemeClr>
+          </a:solidFill>
+        </p:spPr>
+        <p:style>
+          <a:lnRef idx="2">
+            <a:schemeClr val="accent1">
+              <a:shade val="15000"/>
+            </a:schemeClr>
+          </a:lnRef>
+          <a:fillRef idx="1">
+            <a:schemeClr val="accent1"/>
+          </a:fillRef>
+          <a:effectRef idx="0">
+            <a:schemeClr val="accent1"/>
+          </a:effectRef>
+          <a:fontRef idx="minor">
+            <a:schemeClr val="lt1"/>
+          </a:fontRef>
+        </p:style>
+        <p:txBody>
+          <a:bodyPr rtlCol="0" anchor="ctr"/>
+          <a:lstStyle/>
+          <a:p>
+            <a:pPr algn="ctr"/>
+            <a:r>
+              <a:rPr lang="en-US" altLang="zh-CN" sz="1013" b="1" dirty="0" err="1">
+                <a:solidFill>
+                  <a:schemeClr val="tx1"/>
+                </a:solidFill>
+              </a:rPr>
+              <a:t>physicalLayerRisk</a:t>
+            </a:r>
+            <a:r>
+              <a:rPr lang="en-US" altLang="zh-CN" sz="1013" b="1" dirty="0">
+                <a:solidFill>
+                  <a:schemeClr val="tx1"/>
+                </a:solidFill>
+              </a:rPr>
+              <a:t>(...)</a:t>
+            </a:r>
+            <a:endParaRPr lang="zh-CN" altLang="en-US" sz="1013" b="1" dirty="0">
+              <a:solidFill>
+                <a:schemeClr val="tx1"/>
+              </a:solidFill>
+            </a:endParaRPr>
+          </a:p>
+        </p:txBody>
+      </p:sp>
+      <p:sp>
+        <p:nvSpPr>
+          <p:cNvPr id="60" name="流程图: 过程 59">
+            <a:extLst>
+              <a:ext uri="{FF2B5EF4-FFF2-40B4-BE49-F238E27FC236}">
+                <a16:creationId xmlns:a16="http://schemas.microsoft.com/office/drawing/2014/main" id="{DA7D02B2-0AD2-04F6-3E81-C1449BC3F0B0}"/>
+              </a:ext>
+            </a:extLst>
+          </p:cNvPr>
+          <p:cNvSpPr/>
+          <p:nvPr/>
+        </p:nvSpPr>
+        <p:spPr>
+          <a:xfrm>
+            <a:off x="4212648" y="3310817"/>
+            <a:ext cx="1926857" cy="248209"/>
+          </a:xfrm>
+          <a:prstGeom prst="flowChartProcess">
+            <a:avLst/>
+          </a:prstGeom>
+          <a:solidFill>
+            <a:srgbClr val="FF0000"/>
+          </a:solidFill>
+        </p:spPr>
+        <p:style>
+          <a:lnRef idx="2">
+            <a:schemeClr val="accent1">
+              <a:shade val="15000"/>
+            </a:schemeClr>
+          </a:lnRef>
+          <a:fillRef idx="1">
+            <a:schemeClr val="accent1"/>
+          </a:fillRef>
+          <a:effectRef idx="0">
+            <a:schemeClr val="accent1"/>
+          </a:effectRef>
+          <a:fontRef idx="minor">
+            <a:schemeClr val="lt1"/>
+          </a:fontRef>
+        </p:style>
+        <p:txBody>
+          <a:bodyPr rtlCol="0" anchor="ctr"/>
+          <a:lstStyle/>
+          <a:p>
+            <a:pPr algn="ctr"/>
+            <a:r>
+              <a:rPr lang="en-US" altLang="zh-CN" sz="1013" b="1" dirty="0" err="1">
+                <a:solidFill>
+                  <a:schemeClr val="tx1"/>
+                </a:solidFill>
+              </a:rPr>
+              <a:t>competingPublisherState</a:t>
+            </a:r>
+            <a:r>
+              <a:rPr lang="en-US" altLang="zh-CN" sz="1013" b="1" dirty="0">
+                <a:solidFill>
+                  <a:schemeClr val="tx1"/>
+                </a:solidFill>
+              </a:rPr>
+              <a:t>(...)</a:t>
+            </a:r>
+            <a:endParaRPr lang="zh-CN" altLang="en-US" sz="1013" b="1" dirty="0">
+              <a:solidFill>
+                <a:schemeClr val="tx1"/>
+              </a:solidFill>
+            </a:endParaRPr>
+          </a:p>
+        </p:txBody>
+      </p:sp>
+      <p:sp>
+        <p:nvSpPr>
+          <p:cNvPr id="65" name="流程图: 过程 64">
+            <a:extLst>
+              <a:ext uri="{FF2B5EF4-FFF2-40B4-BE49-F238E27FC236}">
+                <a16:creationId xmlns:a16="http://schemas.microsoft.com/office/drawing/2014/main" id="{F8FF36C8-EFD0-88A5-3FF6-8143DAB54393}"/>
+              </a:ext>
+            </a:extLst>
+          </p:cNvPr>
+          <p:cNvSpPr/>
+          <p:nvPr/>
+        </p:nvSpPr>
+        <p:spPr>
+          <a:xfrm>
+            <a:off x="1677127" y="3565681"/>
+            <a:ext cx="2120987" cy="259761"/>
+          </a:xfrm>
+          <a:prstGeom prst="flowChartProcess">
+            <a:avLst/>
+          </a:prstGeom>
+          <a:solidFill>
+            <a:srgbClr val="FF0000"/>
+          </a:solidFill>
+        </p:spPr>
+        <p:style>
+          <a:lnRef idx="2">
+            <a:schemeClr val="accent1">
+              <a:shade val="15000"/>
+            </a:schemeClr>
+          </a:lnRef>
+          <a:fillRef idx="1">
+            <a:schemeClr val="accent1"/>
+          </a:fillRef>
+          <a:effectRef idx="0">
+            <a:schemeClr val="accent1"/>
+          </a:effectRef>
+          <a:fontRef idx="minor">
+            <a:schemeClr val="lt1"/>
+          </a:fontRef>
+        </p:style>
+        <p:txBody>
+          <a:bodyPr rtlCol="0" anchor="ctr"/>
+          <a:lstStyle/>
+          <a:p>
+            <a:pPr algn="ctr"/>
+            <a:r>
+              <a:rPr lang="en-US" altLang="zh-CN" sz="1013" b="1" dirty="0" err="1">
+                <a:solidFill>
+                  <a:schemeClr val="tx1"/>
+                </a:solidFill>
+              </a:rPr>
+              <a:t>maliciousPublisher</a:t>
+            </a:r>
+            <a:r>
+              <a:rPr lang="en-US" altLang="zh-CN" sz="1013" b="1" dirty="0">
+                <a:solidFill>
+                  <a:schemeClr val="tx1"/>
+                </a:solidFill>
+              </a:rPr>
+              <a:t>(...)</a:t>
+            </a:r>
+          </a:p>
+        </p:txBody>
+      </p:sp>
+      <p:cxnSp>
+        <p:nvCxnSpPr>
+          <p:cNvPr id="66" name="直接箭头连接符 65">
+            <a:extLst>
+              <a:ext uri="{FF2B5EF4-FFF2-40B4-BE49-F238E27FC236}">
+                <a16:creationId xmlns:a16="http://schemas.microsoft.com/office/drawing/2014/main" id="{CF2F6D7A-A17B-F912-1AEA-E61FC4EE2024}"/>
+              </a:ext>
+            </a:extLst>
+          </p:cNvPr>
+          <p:cNvCxnSpPr>
+            <a:cxnSpLocks/>
+            <a:stCxn id="65" idx="3"/>
+            <a:endCxn id="60" idx="1"/>
+          </p:cNvCxnSpPr>
+          <p:nvPr/>
+        </p:nvCxnSpPr>
+        <p:spPr>
+          <a:xfrm flipV="1">
+            <a:off x="3798114" y="3434922"/>
+            <a:ext cx="414534" cy="260640"/>
+          </a:xfrm>
+          <a:prstGeom prst="straightConnector1">
+            <a:avLst/>
+          </a:prstGeom>
+          <a:ln w="38100">
+            <a:tailEnd type="triangle"/>
+          </a:ln>
+        </p:spPr>
+        <p:style>
+          <a:lnRef idx="1">
+            <a:schemeClr val="accent1"/>
+          </a:lnRef>
+          <a:fillRef idx="0">
+            <a:schemeClr val="accent1"/>
+          </a:fillRef>
+          <a:effectRef idx="0">
+            <a:schemeClr val="accent1"/>
+          </a:effectRef>
+          <a:fontRef idx="minor">
+            <a:schemeClr val="tx1"/>
+          </a:fontRef>
+        </p:style>
+      </p:cxnSp>
+      <p:cxnSp>
+        <p:nvCxnSpPr>
+          <p:cNvPr id="70" name="直接箭头连接符 69">
+            <a:extLst>
+              <a:ext uri="{FF2B5EF4-FFF2-40B4-BE49-F238E27FC236}">
+                <a16:creationId xmlns:a16="http://schemas.microsoft.com/office/drawing/2014/main" id="{D1E27D12-635B-F76B-1B1D-8B2A57C387B0}"/>
+              </a:ext>
+            </a:extLst>
+          </p:cNvPr>
+          <p:cNvCxnSpPr>
+            <a:cxnSpLocks/>
+            <a:stCxn id="60" idx="3"/>
+            <a:endCxn id="53" idx="1"/>
+          </p:cNvCxnSpPr>
+          <p:nvPr/>
+        </p:nvCxnSpPr>
+        <p:spPr>
+          <a:xfrm>
+            <a:off x="6139505" y="3434922"/>
+            <a:ext cx="311069" cy="0"/>
+          </a:xfrm>
+          <a:prstGeom prst="straightConnector1">
+            <a:avLst/>
+          </a:prstGeom>
+          <a:ln w="38100">
+            <a:tailEnd type="triangle"/>
+          </a:ln>
+        </p:spPr>
+        <p:style>
+          <a:lnRef idx="1">
+            <a:schemeClr val="accent1"/>
+          </a:lnRef>
+          <a:fillRef idx="0">
+            <a:schemeClr val="accent1"/>
+          </a:fillRef>
+          <a:effectRef idx="0">
+            <a:schemeClr val="accent1"/>
+          </a:effectRef>
+          <a:fontRef idx="minor">
+            <a:schemeClr val="tx1"/>
+          </a:fontRef>
+        </p:style>
+      </p:cxnSp>
+      <p:sp>
+        <p:nvSpPr>
+          <p:cNvPr id="32" name="文本框 31">
+            <a:extLst>
+              <a:ext uri="{FF2B5EF4-FFF2-40B4-BE49-F238E27FC236}">
+                <a16:creationId xmlns:a16="http://schemas.microsoft.com/office/drawing/2014/main" id="{9FD1758F-7E68-00BE-44CC-219264EFC865}"/>
+              </a:ext>
+            </a:extLst>
+          </p:cNvPr>
+          <p:cNvSpPr txBox="1"/>
+          <p:nvPr/>
+        </p:nvSpPr>
+        <p:spPr>
+          <a:xfrm>
+            <a:off x="226577" y="243733"/>
+            <a:ext cx="2927025" cy="369332"/>
+          </a:xfrm>
+          <a:prstGeom prst="rect">
+            <a:avLst/>
+          </a:prstGeom>
+          <a:noFill/>
+        </p:spPr>
+        <p:txBody>
+          <a:bodyPr wrap="square" rtlCol="0">
+            <a:spAutoFit/>
+          </a:bodyPr>
+          <a:lstStyle/>
+          <a:p>
+            <a:r>
+              <a:rPr lang="zh-CN" altLang="en-US" b="1" dirty="0">
+                <a:solidFill>
+                  <a:schemeClr val="bg2">
+                    <a:lumMod val="75000"/>
+                  </a:schemeClr>
+                </a:solidFill>
+              </a:rPr>
+              <a:t>主链：显示层状态欺骗主链</a:t>
+            </a:r>
+            <a:endParaRPr lang="en-US" altLang="zh-CN" b="1" dirty="0">
+              <a:solidFill>
+                <a:schemeClr val="bg2">
+                  <a:lumMod val="75000"/>
+                </a:schemeClr>
+              </a:solidFill>
+            </a:endParaRPr>
+          </a:p>
+        </p:txBody>
+      </p:sp>
+      <p:sp>
+        <p:nvSpPr>
+          <p:cNvPr id="71" name="文本框 70">
+            <a:extLst>
+              <a:ext uri="{FF2B5EF4-FFF2-40B4-BE49-F238E27FC236}">
+                <a16:creationId xmlns:a16="http://schemas.microsoft.com/office/drawing/2014/main" id="{EC2A57A3-E7D9-44A0-F861-07EFD38941FC}"/>
+              </a:ext>
+            </a:extLst>
+          </p:cNvPr>
+          <p:cNvSpPr txBox="1"/>
+          <p:nvPr/>
+        </p:nvSpPr>
+        <p:spPr>
+          <a:xfrm>
+            <a:off x="4282345" y="2817237"/>
+            <a:ext cx="2927025" cy="307777"/>
+          </a:xfrm>
+          <a:prstGeom prst="rect">
+            <a:avLst/>
+          </a:prstGeom>
+          <a:noFill/>
+        </p:spPr>
+        <p:txBody>
+          <a:bodyPr wrap="square" rtlCol="0">
+            <a:spAutoFit/>
+          </a:bodyPr>
+          <a:lstStyle/>
+          <a:p>
+            <a:r>
+              <a:rPr lang="zh-CN" altLang="en-US" sz="1400" b="1" dirty="0">
+                <a:solidFill>
+                  <a:schemeClr val="bg2">
+                    <a:lumMod val="75000"/>
+                  </a:schemeClr>
+                </a:solidFill>
+              </a:rPr>
+              <a:t>扩展链 </a:t>
+            </a:r>
+            <a:r>
+              <a:rPr lang="en-US" altLang="zh-CN" sz="1400" b="1" dirty="0">
+                <a:solidFill>
+                  <a:schemeClr val="bg2">
+                    <a:lumMod val="75000"/>
+                  </a:schemeClr>
+                </a:solidFill>
+              </a:rPr>
+              <a:t>A</a:t>
+            </a:r>
+            <a:r>
+              <a:rPr lang="zh-CN" altLang="en-US" sz="1400" b="1" dirty="0">
+                <a:solidFill>
+                  <a:schemeClr val="bg2">
+                    <a:lumMod val="75000"/>
+                  </a:schemeClr>
+                </a:solidFill>
+              </a:rPr>
+              <a:t>：竞争性 </a:t>
+            </a:r>
+            <a:r>
+              <a:rPr lang="en-US" altLang="zh-CN" sz="1400" b="1" dirty="0">
+                <a:solidFill>
+                  <a:schemeClr val="bg2">
+                    <a:lumMod val="75000"/>
+                  </a:schemeClr>
+                </a:solidFill>
+              </a:rPr>
+              <a:t>publisher </a:t>
+            </a:r>
+            <a:r>
+              <a:rPr lang="zh-CN" altLang="en-US" sz="1400" b="1" dirty="0">
+                <a:solidFill>
+                  <a:schemeClr val="bg2">
+                    <a:lumMod val="75000"/>
+                  </a:schemeClr>
+                </a:solidFill>
+              </a:rPr>
+              <a:t>风险</a:t>
+            </a:r>
+            <a:endParaRPr lang="en-US" altLang="zh-CN" sz="1400" b="1" dirty="0">
+              <a:solidFill>
+                <a:schemeClr val="bg2">
+                  <a:lumMod val="75000"/>
+                </a:schemeClr>
+              </a:solidFill>
+            </a:endParaRPr>
+          </a:p>
+        </p:txBody>
+      </p:sp>
+      <p:sp>
+        <p:nvSpPr>
+          <p:cNvPr id="72" name="文本框 71">
+            <a:extLst>
+              <a:ext uri="{FF2B5EF4-FFF2-40B4-BE49-F238E27FC236}">
+                <a16:creationId xmlns:a16="http://schemas.microsoft.com/office/drawing/2014/main" id="{DB39FEB6-194E-7A2E-F7BF-524215E5AB8B}"/>
+              </a:ext>
+            </a:extLst>
+          </p:cNvPr>
+          <p:cNvSpPr txBox="1"/>
+          <p:nvPr/>
+        </p:nvSpPr>
+        <p:spPr>
+          <a:xfrm>
+            <a:off x="4175909" y="4052361"/>
+            <a:ext cx="2927025" cy="307777"/>
+          </a:xfrm>
+          <a:prstGeom prst="rect">
+            <a:avLst/>
+          </a:prstGeom>
+          <a:noFill/>
+        </p:spPr>
+        <p:txBody>
+          <a:bodyPr wrap="square" rtlCol="0">
+            <a:spAutoFit/>
+          </a:bodyPr>
+          <a:lstStyle/>
+          <a:p>
+            <a:r>
+              <a:rPr lang="zh-CN" altLang="en-US" sz="1400" b="1" dirty="0">
+                <a:solidFill>
+                  <a:schemeClr val="bg2">
+                    <a:lumMod val="75000"/>
+                  </a:schemeClr>
+                </a:solidFill>
+              </a:rPr>
+              <a:t>扩展链 </a:t>
+            </a:r>
+            <a:r>
+              <a:rPr lang="en-US" altLang="zh-CN" sz="1400" b="1" dirty="0">
+                <a:solidFill>
+                  <a:schemeClr val="bg2">
+                    <a:lumMod val="75000"/>
+                  </a:schemeClr>
+                </a:solidFill>
+              </a:rPr>
+              <a:t>B</a:t>
+            </a:r>
+            <a:r>
+              <a:rPr lang="zh-CN" altLang="en-US" sz="1400" b="1" dirty="0">
+                <a:solidFill>
+                  <a:schemeClr val="bg2">
+                    <a:lumMod val="75000"/>
+                  </a:schemeClr>
+                </a:solidFill>
+              </a:rPr>
+              <a:t>：物理层传播风险</a:t>
+            </a:r>
+            <a:endParaRPr lang="en-US" altLang="zh-CN" sz="1400" b="1" dirty="0">
+              <a:solidFill>
+                <a:schemeClr val="bg2">
+                  <a:lumMod val="75000"/>
+                </a:schemeClr>
+              </a:solidFill>
+            </a:endParaRPr>
+          </a:p>
+        </p:txBody>
+      </p:sp>
+      <p:cxnSp>
+        <p:nvCxnSpPr>
+          <p:cNvPr id="73" name="直接箭头连接符 72">
+            <a:extLst>
+              <a:ext uri="{FF2B5EF4-FFF2-40B4-BE49-F238E27FC236}">
+                <a16:creationId xmlns:a16="http://schemas.microsoft.com/office/drawing/2014/main" id="{33A5EC64-E7CF-F859-A057-7CB80D72754E}"/>
+              </a:ext>
+            </a:extLst>
+          </p:cNvPr>
+          <p:cNvCxnSpPr>
+            <a:cxnSpLocks/>
+            <a:stCxn id="46" idx="2"/>
+            <a:endCxn id="54" idx="0"/>
+          </p:cNvCxnSpPr>
+          <p:nvPr/>
+        </p:nvCxnSpPr>
+        <p:spPr>
+          <a:xfrm>
+            <a:off x="1429053" y="1894021"/>
+            <a:ext cx="0" cy="2487002"/>
+          </a:xfrm>
+          <a:prstGeom prst="straightConnector1">
+            <a:avLst/>
+          </a:prstGeom>
+          <a:ln w="38100">
+            <a:tailEnd type="triangle"/>
+          </a:ln>
+        </p:spPr>
+        <p:style>
+          <a:lnRef idx="1">
+            <a:schemeClr val="accent1"/>
+          </a:lnRef>
+          <a:fillRef idx="0">
+            <a:schemeClr val="accent1"/>
+          </a:fillRef>
+          <a:effectRef idx="0">
+            <a:schemeClr val="accent1"/>
+          </a:effectRef>
+          <a:fontRef idx="minor">
+            <a:schemeClr val="tx1"/>
+          </a:fontRef>
+        </p:style>
+      </p:cxnSp>
     </p:spTree>
     <p:extLst>
       <p:ext uri="{BB962C8B-B14F-4D97-AF65-F5344CB8AC3E}">
-        <p14:creationId xmlns:p14="http://schemas.microsoft.com/office/powerpoint/2010/main" val="2471740064"/>
+        <p14:creationId xmlns:p14="http://schemas.microsoft.com/office/powerpoint/2010/main" val="2734894086"/>
       </p:ext>
     </p:extLst>
   </p:cSld>
@@ -10107,7 +11642,7 @@
         <p:cNvPr id="1" name="">
           <a:extLst>
             <a:ext uri="{FF2B5EF4-FFF2-40B4-BE49-F238E27FC236}">
-              <a16:creationId xmlns:a16="http://schemas.microsoft.com/office/drawing/2014/main" id="{8E97DB3C-63B4-5B8F-90DE-83D2E9CC8C33}"/>
+              <a16:creationId xmlns:a16="http://schemas.microsoft.com/office/drawing/2014/main" id="{18474876-716B-91C3-A904-3A56C282303D}"/>
             </a:ext>
           </a:extLst>
         </p:cNvPr>
@@ -10122,10 +11657,1951 @@
           <a:chExt cx="0" cy="0"/>
         </a:xfrm>
       </p:grpSpPr>
+      <p:sp>
+        <p:nvSpPr>
+          <p:cNvPr id="4" name="流程图: 过程 3">
+            <a:extLst>
+              <a:ext uri="{FF2B5EF4-FFF2-40B4-BE49-F238E27FC236}">
+                <a16:creationId xmlns:a16="http://schemas.microsoft.com/office/drawing/2014/main" id="{EAAF673E-7C93-94CB-2A82-904C237DB1DF}"/>
+              </a:ext>
+            </a:extLst>
+          </p:cNvPr>
+          <p:cNvSpPr/>
+          <p:nvPr/>
+        </p:nvSpPr>
+        <p:spPr>
+          <a:xfrm>
+            <a:off x="465623" y="1069617"/>
+            <a:ext cx="1926857" cy="248209"/>
+          </a:xfrm>
+          <a:prstGeom prst="flowChartProcess">
+            <a:avLst/>
+          </a:prstGeom>
+          <a:solidFill>
+            <a:schemeClr val="accent1">
+              <a:lumMod val="60000"/>
+              <a:lumOff val="40000"/>
+            </a:schemeClr>
+          </a:solidFill>
+        </p:spPr>
+        <p:style>
+          <a:lnRef idx="2">
+            <a:schemeClr val="accent1">
+              <a:shade val="15000"/>
+            </a:schemeClr>
+          </a:lnRef>
+          <a:fillRef idx="1">
+            <a:schemeClr val="accent1"/>
+          </a:fillRef>
+          <a:effectRef idx="0">
+            <a:schemeClr val="accent1"/>
+          </a:effectRef>
+          <a:fontRef idx="minor">
+            <a:schemeClr val="lt1"/>
+          </a:fontRef>
+        </p:style>
+        <p:txBody>
+          <a:bodyPr rtlCol="0" anchor="ctr"/>
+          <a:lstStyle/>
+          <a:p>
+            <a:pPr algn="ctr"/>
+            <a:r>
+              <a:rPr lang="en-US" altLang="zh-CN" sz="1013" b="1" dirty="0" err="1">
+                <a:solidFill>
+                  <a:schemeClr val="tx1"/>
+                </a:solidFill>
+              </a:rPr>
+              <a:t>enumerateTopic</a:t>
+            </a:r>
+            <a:r>
+              <a:rPr lang="en-US" altLang="zh-CN" sz="1013" b="1" dirty="0">
+                <a:solidFill>
+                  <a:schemeClr val="tx1"/>
+                </a:solidFill>
+              </a:rPr>
+              <a:t>(...)</a:t>
+            </a:r>
+            <a:endParaRPr lang="zh-CN" altLang="en-US" sz="1013" b="1" dirty="0">
+              <a:solidFill>
+                <a:schemeClr val="tx1"/>
+              </a:solidFill>
+            </a:endParaRPr>
+          </a:p>
+        </p:txBody>
+      </p:sp>
+      <p:sp>
+        <p:nvSpPr>
+          <p:cNvPr id="5" name="流程图: 过程 4">
+            <a:extLst>
+              <a:ext uri="{FF2B5EF4-FFF2-40B4-BE49-F238E27FC236}">
+                <a16:creationId xmlns:a16="http://schemas.microsoft.com/office/drawing/2014/main" id="{D38E6D92-2809-BC8F-43A8-91AE25D8747D}"/>
+              </a:ext>
+            </a:extLst>
+          </p:cNvPr>
+          <p:cNvSpPr/>
+          <p:nvPr/>
+        </p:nvSpPr>
+        <p:spPr>
+          <a:xfrm>
+            <a:off x="2888538" y="1067953"/>
+            <a:ext cx="1926855" cy="259761"/>
+          </a:xfrm>
+          <a:prstGeom prst="flowChartProcess">
+            <a:avLst/>
+          </a:prstGeom>
+          <a:solidFill>
+            <a:schemeClr val="accent1">
+              <a:lumMod val="60000"/>
+              <a:lumOff val="40000"/>
+            </a:schemeClr>
+          </a:solidFill>
+        </p:spPr>
+        <p:style>
+          <a:lnRef idx="2">
+            <a:schemeClr val="accent1">
+              <a:shade val="15000"/>
+            </a:schemeClr>
+          </a:lnRef>
+          <a:fillRef idx="1">
+            <a:schemeClr val="accent1"/>
+          </a:fillRef>
+          <a:effectRef idx="0">
+            <a:schemeClr val="accent1"/>
+          </a:effectRef>
+          <a:fontRef idx="minor">
+            <a:schemeClr val="lt1"/>
+          </a:fontRef>
+        </p:style>
+        <p:txBody>
+          <a:bodyPr rtlCol="0" anchor="ctr"/>
+          <a:lstStyle/>
+          <a:p>
+            <a:pPr algn="ctr"/>
+            <a:r>
+              <a:rPr lang="en-US" altLang="zh-CN" sz="1013" b="1" dirty="0" err="1">
+                <a:solidFill>
+                  <a:schemeClr val="tx1"/>
+                </a:solidFill>
+              </a:rPr>
+              <a:t>learnMessageSchema</a:t>
+            </a:r>
+            <a:r>
+              <a:rPr lang="en-US" altLang="zh-CN" sz="1013" b="1" dirty="0">
+                <a:solidFill>
+                  <a:schemeClr val="tx1"/>
+                </a:solidFill>
+              </a:rPr>
+              <a:t>(...)</a:t>
+            </a:r>
+          </a:p>
+        </p:txBody>
+      </p:sp>
+      <p:cxnSp>
+        <p:nvCxnSpPr>
+          <p:cNvPr id="23" name="直接箭头连接符 22">
+            <a:extLst>
+              <a:ext uri="{FF2B5EF4-FFF2-40B4-BE49-F238E27FC236}">
+                <a16:creationId xmlns:a16="http://schemas.microsoft.com/office/drawing/2014/main" id="{0CC43E07-B016-DC7E-92BA-F63F965DC046}"/>
+              </a:ext>
+            </a:extLst>
+          </p:cNvPr>
+          <p:cNvCxnSpPr>
+            <a:cxnSpLocks/>
+            <a:stCxn id="21" idx="3"/>
+            <a:endCxn id="22" idx="1"/>
+          </p:cNvCxnSpPr>
+          <p:nvPr/>
+        </p:nvCxnSpPr>
+        <p:spPr>
+          <a:xfrm>
+            <a:off x="4815391" y="2231897"/>
+            <a:ext cx="930467" cy="5776"/>
+          </a:xfrm>
+          <a:prstGeom prst="straightConnector1">
+            <a:avLst/>
+          </a:prstGeom>
+          <a:ln w="38100">
+            <a:solidFill>
+              <a:schemeClr val="bg2">
+                <a:lumMod val="75000"/>
+              </a:schemeClr>
+            </a:solidFill>
+            <a:tailEnd type="triangle"/>
+          </a:ln>
+        </p:spPr>
+        <p:style>
+          <a:lnRef idx="1">
+            <a:schemeClr val="accent1"/>
+          </a:lnRef>
+          <a:fillRef idx="0">
+            <a:schemeClr val="accent1"/>
+          </a:fillRef>
+          <a:effectRef idx="0">
+            <a:schemeClr val="accent1"/>
+          </a:effectRef>
+          <a:fontRef idx="minor">
+            <a:schemeClr val="tx1"/>
+          </a:fontRef>
+        </p:style>
+      </p:cxnSp>
+      <p:cxnSp>
+        <p:nvCxnSpPr>
+          <p:cNvPr id="68" name="直接箭头连接符 67">
+            <a:extLst>
+              <a:ext uri="{FF2B5EF4-FFF2-40B4-BE49-F238E27FC236}">
+                <a16:creationId xmlns:a16="http://schemas.microsoft.com/office/drawing/2014/main" id="{B206574D-F155-F64E-6920-162DBBBBC427}"/>
+              </a:ext>
+            </a:extLst>
+          </p:cNvPr>
+          <p:cNvCxnSpPr>
+            <a:cxnSpLocks/>
+            <a:stCxn id="20" idx="2"/>
+            <a:endCxn id="7" idx="3"/>
+          </p:cNvCxnSpPr>
+          <p:nvPr/>
+        </p:nvCxnSpPr>
+        <p:spPr>
+          <a:xfrm flipH="1">
+            <a:off x="5915365" y="1323220"/>
+            <a:ext cx="224141" cy="439155"/>
+          </a:xfrm>
+          <a:prstGeom prst="straightConnector1">
+            <a:avLst/>
+          </a:prstGeom>
+          <a:ln w="38100">
+            <a:tailEnd type="triangle"/>
+          </a:ln>
+        </p:spPr>
+        <p:style>
+          <a:lnRef idx="1">
+            <a:schemeClr val="accent1"/>
+          </a:lnRef>
+          <a:fillRef idx="0">
+            <a:schemeClr val="accent1"/>
+          </a:fillRef>
+          <a:effectRef idx="0">
+            <a:schemeClr val="accent1"/>
+          </a:effectRef>
+          <a:fontRef idx="minor">
+            <a:schemeClr val="tx1"/>
+          </a:fontRef>
+        </p:style>
+      </p:cxnSp>
+      <p:cxnSp>
+        <p:nvCxnSpPr>
+          <p:cNvPr id="80" name="直接箭头连接符 79">
+            <a:extLst>
+              <a:ext uri="{FF2B5EF4-FFF2-40B4-BE49-F238E27FC236}">
+                <a16:creationId xmlns:a16="http://schemas.microsoft.com/office/drawing/2014/main" id="{CD664460-C963-A8B7-1BEA-B62B078B7A1B}"/>
+              </a:ext>
+            </a:extLst>
+          </p:cNvPr>
+          <p:cNvCxnSpPr>
+            <a:cxnSpLocks/>
+            <a:stCxn id="5" idx="3"/>
+            <a:endCxn id="20" idx="1"/>
+          </p:cNvCxnSpPr>
+          <p:nvPr/>
+        </p:nvCxnSpPr>
+        <p:spPr>
+          <a:xfrm>
+            <a:off x="4815393" y="1197834"/>
+            <a:ext cx="360684" cy="1282"/>
+          </a:xfrm>
+          <a:prstGeom prst="straightConnector1">
+            <a:avLst/>
+          </a:prstGeom>
+          <a:ln w="38100">
+            <a:tailEnd type="triangle"/>
+          </a:ln>
+        </p:spPr>
+        <p:style>
+          <a:lnRef idx="1">
+            <a:schemeClr val="accent1"/>
+          </a:lnRef>
+          <a:fillRef idx="0">
+            <a:schemeClr val="accent1"/>
+          </a:fillRef>
+          <a:effectRef idx="0">
+            <a:schemeClr val="accent1"/>
+          </a:effectRef>
+          <a:fontRef idx="minor">
+            <a:schemeClr val="tx1"/>
+          </a:fontRef>
+        </p:style>
+      </p:cxnSp>
+      <p:cxnSp>
+        <p:nvCxnSpPr>
+          <p:cNvPr id="83" name="直接箭头连接符 82">
+            <a:extLst>
+              <a:ext uri="{FF2B5EF4-FFF2-40B4-BE49-F238E27FC236}">
+                <a16:creationId xmlns:a16="http://schemas.microsoft.com/office/drawing/2014/main" id="{A3D7AA8B-3ADC-F437-A5B1-C3D09A15D063}"/>
+              </a:ext>
+            </a:extLst>
+          </p:cNvPr>
+          <p:cNvCxnSpPr>
+            <a:cxnSpLocks/>
+            <a:stCxn id="4" idx="3"/>
+            <a:endCxn id="5" idx="1"/>
+          </p:cNvCxnSpPr>
+          <p:nvPr/>
+        </p:nvCxnSpPr>
+        <p:spPr>
+          <a:xfrm>
+            <a:off x="2392480" y="1193722"/>
+            <a:ext cx="496058" cy="4112"/>
+          </a:xfrm>
+          <a:prstGeom prst="straightConnector1">
+            <a:avLst/>
+          </a:prstGeom>
+          <a:ln w="38100">
+            <a:tailEnd type="triangle"/>
+          </a:ln>
+        </p:spPr>
+        <p:style>
+          <a:lnRef idx="1">
+            <a:schemeClr val="accent1"/>
+          </a:lnRef>
+          <a:fillRef idx="0">
+            <a:schemeClr val="accent1"/>
+          </a:fillRef>
+          <a:effectRef idx="0">
+            <a:schemeClr val="accent1"/>
+          </a:effectRef>
+          <a:fontRef idx="minor">
+            <a:schemeClr val="tx1"/>
+          </a:fontRef>
+        </p:style>
+      </p:cxnSp>
+      <p:sp>
+        <p:nvSpPr>
+          <p:cNvPr id="20" name="流程图: 过程 19">
+            <a:extLst>
+              <a:ext uri="{FF2B5EF4-FFF2-40B4-BE49-F238E27FC236}">
+                <a16:creationId xmlns:a16="http://schemas.microsoft.com/office/drawing/2014/main" id="{C9968592-383C-07E7-C4F7-9FCC9012BDCE}"/>
+              </a:ext>
+            </a:extLst>
+          </p:cNvPr>
+          <p:cNvSpPr/>
+          <p:nvPr/>
+        </p:nvSpPr>
+        <p:spPr>
+          <a:xfrm>
+            <a:off x="5176077" y="1075011"/>
+            <a:ext cx="1926857" cy="248209"/>
+          </a:xfrm>
+          <a:prstGeom prst="flowChartProcess">
+            <a:avLst/>
+          </a:prstGeom>
+          <a:solidFill>
+            <a:schemeClr val="accent1">
+              <a:lumMod val="60000"/>
+              <a:lumOff val="40000"/>
+            </a:schemeClr>
+          </a:solidFill>
+        </p:spPr>
+        <p:style>
+          <a:lnRef idx="2">
+            <a:schemeClr val="accent1">
+              <a:shade val="15000"/>
+            </a:schemeClr>
+          </a:lnRef>
+          <a:fillRef idx="1">
+            <a:schemeClr val="accent1"/>
+          </a:fillRef>
+          <a:effectRef idx="0">
+            <a:schemeClr val="accent1"/>
+          </a:effectRef>
+          <a:fontRef idx="minor">
+            <a:schemeClr val="lt1"/>
+          </a:fontRef>
+        </p:style>
+        <p:txBody>
+          <a:bodyPr rtlCol="0" anchor="ctr"/>
+          <a:lstStyle/>
+          <a:p>
+            <a:pPr algn="ctr"/>
+            <a:r>
+              <a:rPr lang="en-US" altLang="zh-CN" sz="1013" b="1" dirty="0" err="1">
+                <a:solidFill>
+                  <a:schemeClr val="tx1"/>
+                </a:solidFill>
+              </a:rPr>
+              <a:t>forgeValidJointState</a:t>
+            </a:r>
+            <a:r>
+              <a:rPr lang="en-US" altLang="zh-CN" sz="1013" b="1" dirty="0">
+                <a:solidFill>
+                  <a:schemeClr val="tx1"/>
+                </a:solidFill>
+              </a:rPr>
+              <a:t>(...)</a:t>
+            </a:r>
+            <a:endParaRPr lang="zh-CN" altLang="en-US" sz="1013" b="1" dirty="0">
+              <a:solidFill>
+                <a:schemeClr val="tx1"/>
+              </a:solidFill>
+            </a:endParaRPr>
+          </a:p>
+        </p:txBody>
+      </p:sp>
+      <p:sp>
+        <p:nvSpPr>
+          <p:cNvPr id="21" name="流程图: 过程 20">
+            <a:extLst>
+              <a:ext uri="{FF2B5EF4-FFF2-40B4-BE49-F238E27FC236}">
+                <a16:creationId xmlns:a16="http://schemas.microsoft.com/office/drawing/2014/main" id="{E8309CF2-A169-05A8-68E3-35E3409E203D}"/>
+              </a:ext>
+            </a:extLst>
+          </p:cNvPr>
+          <p:cNvSpPr/>
+          <p:nvPr/>
+        </p:nvSpPr>
+        <p:spPr>
+          <a:xfrm>
+            <a:off x="2888536" y="2102016"/>
+            <a:ext cx="1926855" cy="259761"/>
+          </a:xfrm>
+          <a:prstGeom prst="flowChartProcess">
+            <a:avLst/>
+          </a:prstGeom>
+          <a:solidFill>
+            <a:schemeClr val="bg2">
+              <a:lumMod val="75000"/>
+            </a:schemeClr>
+          </a:solidFill>
+        </p:spPr>
+        <p:style>
+          <a:lnRef idx="2">
+            <a:schemeClr val="accent1">
+              <a:shade val="15000"/>
+            </a:schemeClr>
+          </a:lnRef>
+          <a:fillRef idx="1">
+            <a:schemeClr val="accent1"/>
+          </a:fillRef>
+          <a:effectRef idx="0">
+            <a:schemeClr val="accent1"/>
+          </a:effectRef>
+          <a:fontRef idx="minor">
+            <a:schemeClr val="lt1"/>
+          </a:fontRef>
+        </p:style>
+        <p:txBody>
+          <a:bodyPr rtlCol="0" anchor="ctr"/>
+          <a:lstStyle/>
+          <a:p>
+            <a:pPr algn="ctr"/>
+            <a:r>
+              <a:rPr lang="en-US" altLang="zh-CN" sz="1013" b="1" dirty="0" err="1">
+                <a:solidFill>
+                  <a:schemeClr val="tx1"/>
+                </a:solidFill>
+              </a:rPr>
+              <a:t>tamperTFStream</a:t>
+            </a:r>
+            <a:r>
+              <a:rPr lang="en-US" altLang="zh-CN" sz="1013" b="1" dirty="0">
+                <a:solidFill>
+                  <a:schemeClr val="tx1"/>
+                </a:solidFill>
+              </a:rPr>
+              <a:t>(...)</a:t>
+            </a:r>
+          </a:p>
+        </p:txBody>
+      </p:sp>
+      <p:sp>
+        <p:nvSpPr>
+          <p:cNvPr id="22" name="流程图: 过程 21">
+            <a:extLst>
+              <a:ext uri="{FF2B5EF4-FFF2-40B4-BE49-F238E27FC236}">
+                <a16:creationId xmlns:a16="http://schemas.microsoft.com/office/drawing/2014/main" id="{8A903BB2-66ED-9C1C-16A0-C81C320C0A42}"/>
+              </a:ext>
+            </a:extLst>
+          </p:cNvPr>
+          <p:cNvSpPr/>
+          <p:nvPr/>
+        </p:nvSpPr>
+        <p:spPr>
+          <a:xfrm>
+            <a:off x="5745858" y="2113568"/>
+            <a:ext cx="1926857" cy="248209"/>
+          </a:xfrm>
+          <a:prstGeom prst="flowChartProcess">
+            <a:avLst/>
+          </a:prstGeom>
+          <a:solidFill>
+            <a:schemeClr val="bg2">
+              <a:lumMod val="75000"/>
+            </a:schemeClr>
+          </a:solidFill>
+        </p:spPr>
+        <p:style>
+          <a:lnRef idx="2">
+            <a:schemeClr val="accent1">
+              <a:shade val="15000"/>
+            </a:schemeClr>
+          </a:lnRef>
+          <a:fillRef idx="1">
+            <a:schemeClr val="accent1"/>
+          </a:fillRef>
+          <a:effectRef idx="0">
+            <a:schemeClr val="accent1"/>
+          </a:effectRef>
+          <a:fontRef idx="minor">
+            <a:schemeClr val="lt1"/>
+          </a:fontRef>
+        </p:style>
+        <p:txBody>
+          <a:bodyPr rtlCol="0" anchor="ctr"/>
+          <a:lstStyle/>
+          <a:p>
+            <a:pPr algn="ctr"/>
+            <a:r>
+              <a:rPr lang="en-US" altLang="zh-CN" sz="1013" b="1" dirty="0" err="1">
+                <a:solidFill>
+                  <a:schemeClr val="tx1"/>
+                </a:solidFill>
+              </a:rPr>
+              <a:t>misleadPoseDisplay</a:t>
+            </a:r>
+            <a:r>
+              <a:rPr lang="en-US" altLang="zh-CN" sz="1013" b="1" dirty="0">
+                <a:solidFill>
+                  <a:schemeClr val="tx1"/>
+                </a:solidFill>
+              </a:rPr>
+              <a:t>(...)</a:t>
+            </a:r>
+            <a:endParaRPr lang="zh-CN" altLang="en-US" sz="1013" b="1" dirty="0">
+              <a:solidFill>
+                <a:schemeClr val="tx1"/>
+              </a:solidFill>
+            </a:endParaRPr>
+          </a:p>
+        </p:txBody>
+      </p:sp>
+      <p:sp>
+        <p:nvSpPr>
+          <p:cNvPr id="45" name="标注: 下箭头 44">
+            <a:extLst>
+              <a:ext uri="{FF2B5EF4-FFF2-40B4-BE49-F238E27FC236}">
+                <a16:creationId xmlns:a16="http://schemas.microsoft.com/office/drawing/2014/main" id="{4CF02BE5-5390-5988-DC34-AB478E817815}"/>
+              </a:ext>
+            </a:extLst>
+          </p:cNvPr>
+          <p:cNvSpPr/>
+          <p:nvPr/>
+        </p:nvSpPr>
+        <p:spPr>
+          <a:xfrm>
+            <a:off x="5335595" y="158718"/>
+            <a:ext cx="1607820" cy="895905"/>
+          </a:xfrm>
+          <a:prstGeom prst="downArrowCallout">
+            <a:avLst/>
+          </a:prstGeom>
+          <a:solidFill>
+            <a:schemeClr val="bg1"/>
+          </a:solidFill>
+        </p:spPr>
+        <p:style>
+          <a:lnRef idx="2">
+            <a:schemeClr val="accent1">
+              <a:shade val="15000"/>
+            </a:schemeClr>
+          </a:lnRef>
+          <a:fillRef idx="1">
+            <a:schemeClr val="accent1"/>
+          </a:fillRef>
+          <a:effectRef idx="0">
+            <a:schemeClr val="accent1"/>
+          </a:effectRef>
+          <a:fontRef idx="minor">
+            <a:schemeClr val="lt1"/>
+          </a:fontRef>
+        </p:style>
+        <p:txBody>
+          <a:bodyPr rtlCol="0" anchor="ctr"/>
+          <a:lstStyle/>
+          <a:p>
+            <a:pPr algn="ctr"/>
+            <a:r>
+              <a:rPr lang="zh-CN" altLang="en-US" sz="1000" b="1" dirty="0">
+                <a:solidFill>
+                  <a:schemeClr val="tx1"/>
+                </a:solidFill>
+              </a:rPr>
+              <a:t>关键条件</a:t>
+            </a:r>
+          </a:p>
+          <a:p>
+            <a:pPr algn="ctr"/>
+            <a:r>
+              <a:rPr lang="en-US" altLang="zh-CN" sz="1000" b="1" dirty="0">
+                <a:solidFill>
+                  <a:schemeClr val="tx1"/>
+                </a:solidFill>
+              </a:rPr>
+              <a:t>- </a:t>
+            </a:r>
+            <a:r>
+              <a:rPr lang="zh-CN" altLang="en-US" sz="1000" b="1" dirty="0">
+                <a:solidFill>
+                  <a:schemeClr val="tx1"/>
+                </a:solidFill>
+              </a:rPr>
+              <a:t>关节名称匹配</a:t>
+            </a:r>
+          </a:p>
+          <a:p>
+            <a:pPr algn="ctr"/>
+            <a:r>
+              <a:rPr lang="en-US" altLang="zh-CN" sz="1000" b="1" dirty="0">
+                <a:solidFill>
+                  <a:schemeClr val="tx1"/>
+                </a:solidFill>
+              </a:rPr>
+              <a:t>- </a:t>
+            </a:r>
+            <a:r>
+              <a:rPr lang="zh-CN" altLang="en-US" sz="1000" b="1" dirty="0">
+                <a:solidFill>
+                  <a:schemeClr val="tx1"/>
+                </a:solidFill>
+              </a:rPr>
+              <a:t>关节范围合法</a:t>
+            </a:r>
+          </a:p>
+          <a:p>
+            <a:pPr algn="ctr"/>
+            <a:r>
+              <a:rPr lang="en-US" altLang="zh-CN" sz="1000" b="1" dirty="0">
+                <a:solidFill>
+                  <a:schemeClr val="tx1"/>
+                </a:solidFill>
+              </a:rPr>
+              <a:t>- </a:t>
+            </a:r>
+            <a:r>
+              <a:rPr lang="zh-CN" altLang="en-US" sz="1000" b="1" dirty="0">
+                <a:solidFill>
+                  <a:schemeClr val="tx1"/>
+                </a:solidFill>
+              </a:rPr>
+              <a:t>时间戳有效</a:t>
+            </a:r>
+          </a:p>
+        </p:txBody>
+      </p:sp>
+      <p:sp>
+        <p:nvSpPr>
+          <p:cNvPr id="46" name="流程图: 过程 45">
+            <a:extLst>
+              <a:ext uri="{FF2B5EF4-FFF2-40B4-BE49-F238E27FC236}">
+                <a16:creationId xmlns:a16="http://schemas.microsoft.com/office/drawing/2014/main" id="{DF385799-33F0-77B4-3DAA-438E85B0157D}"/>
+              </a:ext>
+            </a:extLst>
+          </p:cNvPr>
+          <p:cNvSpPr/>
+          <p:nvPr/>
+        </p:nvSpPr>
+        <p:spPr>
+          <a:xfrm>
+            <a:off x="439873" y="1626314"/>
+            <a:ext cx="1926857" cy="248209"/>
+          </a:xfrm>
+          <a:prstGeom prst="flowChartProcess">
+            <a:avLst/>
+          </a:prstGeom>
+          <a:solidFill>
+            <a:schemeClr val="bg2">
+              <a:lumMod val="75000"/>
+            </a:schemeClr>
+          </a:solidFill>
+        </p:spPr>
+        <p:style>
+          <a:lnRef idx="2">
+            <a:schemeClr val="accent1">
+              <a:shade val="15000"/>
+            </a:schemeClr>
+          </a:lnRef>
+          <a:fillRef idx="1">
+            <a:schemeClr val="accent1"/>
+          </a:fillRef>
+          <a:effectRef idx="0">
+            <a:schemeClr val="accent1"/>
+          </a:effectRef>
+          <a:fontRef idx="minor">
+            <a:schemeClr val="lt1"/>
+          </a:fontRef>
+        </p:style>
+        <p:txBody>
+          <a:bodyPr rtlCol="0" anchor="ctr"/>
+          <a:lstStyle/>
+          <a:p>
+            <a:pPr algn="ctr"/>
+            <a:r>
+              <a:rPr lang="en-US" altLang="zh-CN" sz="1013" b="1" dirty="0" err="1">
+                <a:solidFill>
+                  <a:schemeClr val="tx1"/>
+                </a:solidFill>
+              </a:rPr>
+              <a:t>injectForgedJointState</a:t>
+            </a:r>
+            <a:r>
+              <a:rPr lang="en-US" altLang="zh-CN" sz="1013" b="1" dirty="0">
+                <a:solidFill>
+                  <a:schemeClr val="tx1"/>
+                </a:solidFill>
+              </a:rPr>
+              <a:t>(...)</a:t>
+            </a:r>
+            <a:endParaRPr lang="zh-CN" altLang="en-US" sz="1013" b="1" dirty="0">
+              <a:solidFill>
+                <a:schemeClr val="tx1"/>
+              </a:solidFill>
+            </a:endParaRPr>
+          </a:p>
+        </p:txBody>
+      </p:sp>
+      <p:sp>
+        <p:nvSpPr>
+          <p:cNvPr id="47" name="流程图: 过程 46">
+            <a:extLst>
+              <a:ext uri="{FF2B5EF4-FFF2-40B4-BE49-F238E27FC236}">
+                <a16:creationId xmlns:a16="http://schemas.microsoft.com/office/drawing/2014/main" id="{8EF80787-DE8B-2713-2E73-0B59233715EC}"/>
+              </a:ext>
+            </a:extLst>
+          </p:cNvPr>
+          <p:cNvSpPr/>
+          <p:nvPr/>
+        </p:nvSpPr>
+        <p:spPr>
+          <a:xfrm>
+            <a:off x="1596494" y="2903133"/>
+            <a:ext cx="2120987" cy="259761"/>
+          </a:xfrm>
+          <a:prstGeom prst="flowChartProcess">
+            <a:avLst/>
+          </a:prstGeom>
+          <a:solidFill>
+            <a:srgbClr val="FF0000"/>
+          </a:solidFill>
+        </p:spPr>
+        <p:style>
+          <a:lnRef idx="2">
+            <a:schemeClr val="accent1">
+              <a:shade val="15000"/>
+            </a:schemeClr>
+          </a:lnRef>
+          <a:fillRef idx="1">
+            <a:schemeClr val="accent1"/>
+          </a:fillRef>
+          <a:effectRef idx="0">
+            <a:schemeClr val="accent1"/>
+          </a:effectRef>
+          <a:fontRef idx="minor">
+            <a:schemeClr val="lt1"/>
+          </a:fontRef>
+        </p:style>
+        <p:txBody>
+          <a:bodyPr rtlCol="0" anchor="ctr"/>
+          <a:lstStyle/>
+          <a:p>
+            <a:pPr algn="ctr"/>
+            <a:r>
+              <a:rPr lang="en-US" altLang="zh-CN" sz="1013" b="1" dirty="0" err="1">
+                <a:solidFill>
+                  <a:schemeClr val="tx1"/>
+                </a:solidFill>
+              </a:rPr>
+              <a:t>legitimatePublisher</a:t>
+            </a:r>
+            <a:r>
+              <a:rPr lang="en-US" altLang="zh-CN" sz="1013" b="1" dirty="0">
+                <a:solidFill>
+                  <a:schemeClr val="tx1"/>
+                </a:solidFill>
+              </a:rPr>
+              <a:t>(...)</a:t>
+            </a:r>
+          </a:p>
+        </p:txBody>
+      </p:sp>
+      <p:cxnSp>
+        <p:nvCxnSpPr>
+          <p:cNvPr id="48" name="直接箭头连接符 47">
+            <a:extLst>
+              <a:ext uri="{FF2B5EF4-FFF2-40B4-BE49-F238E27FC236}">
+                <a16:creationId xmlns:a16="http://schemas.microsoft.com/office/drawing/2014/main" id="{C8F08EEE-381D-AEF5-E448-BCDA38FF347C}"/>
+              </a:ext>
+            </a:extLst>
+          </p:cNvPr>
+          <p:cNvCxnSpPr>
+            <a:cxnSpLocks/>
+            <a:stCxn id="54" idx="3"/>
+            <a:endCxn id="55" idx="1"/>
+          </p:cNvCxnSpPr>
+          <p:nvPr/>
+        </p:nvCxnSpPr>
+        <p:spPr>
+          <a:xfrm>
+            <a:off x="2366728" y="4502290"/>
+            <a:ext cx="882491" cy="5776"/>
+          </a:xfrm>
+          <a:prstGeom prst="straightConnector1">
+            <a:avLst/>
+          </a:prstGeom>
+          <a:ln w="38100">
+            <a:solidFill>
+              <a:schemeClr val="bg2">
+                <a:lumMod val="75000"/>
+              </a:schemeClr>
+            </a:solidFill>
+            <a:tailEnd type="triangle"/>
+          </a:ln>
+        </p:spPr>
+        <p:style>
+          <a:lnRef idx="1">
+            <a:schemeClr val="accent1"/>
+          </a:lnRef>
+          <a:fillRef idx="0">
+            <a:schemeClr val="accent1"/>
+          </a:fillRef>
+          <a:effectRef idx="0">
+            <a:schemeClr val="accent1"/>
+          </a:effectRef>
+          <a:fontRef idx="minor">
+            <a:schemeClr val="tx1"/>
+          </a:fontRef>
+        </p:style>
+      </p:cxnSp>
+      <p:cxnSp>
+        <p:nvCxnSpPr>
+          <p:cNvPr id="51" name="直接箭头连接符 50">
+            <a:extLst>
+              <a:ext uri="{FF2B5EF4-FFF2-40B4-BE49-F238E27FC236}">
+                <a16:creationId xmlns:a16="http://schemas.microsoft.com/office/drawing/2014/main" id="{9639259E-C258-B8FC-0EFF-89AEFC3C1AC9}"/>
+              </a:ext>
+            </a:extLst>
+          </p:cNvPr>
+          <p:cNvCxnSpPr>
+            <a:cxnSpLocks/>
+            <a:stCxn id="47" idx="3"/>
+            <a:endCxn id="15" idx="1"/>
+          </p:cNvCxnSpPr>
+          <p:nvPr/>
+        </p:nvCxnSpPr>
+        <p:spPr>
+          <a:xfrm>
+            <a:off x="3717481" y="3033014"/>
+            <a:ext cx="134482" cy="281514"/>
+          </a:xfrm>
+          <a:prstGeom prst="straightConnector1">
+            <a:avLst/>
+          </a:prstGeom>
+          <a:ln w="38100">
+            <a:tailEnd type="triangle"/>
+          </a:ln>
+        </p:spPr>
+        <p:style>
+          <a:lnRef idx="1">
+            <a:schemeClr val="accent1"/>
+          </a:lnRef>
+          <a:fillRef idx="0">
+            <a:schemeClr val="accent1"/>
+          </a:fillRef>
+          <a:effectRef idx="0">
+            <a:schemeClr val="accent1"/>
+          </a:effectRef>
+          <a:fontRef idx="minor">
+            <a:schemeClr val="tx1"/>
+          </a:fontRef>
+        </p:style>
+      </p:cxnSp>
+      <p:cxnSp>
+        <p:nvCxnSpPr>
+          <p:cNvPr id="52" name="直接箭头连接符 51">
+            <a:extLst>
+              <a:ext uri="{FF2B5EF4-FFF2-40B4-BE49-F238E27FC236}">
+                <a16:creationId xmlns:a16="http://schemas.microsoft.com/office/drawing/2014/main" id="{672B4304-BD02-C42A-9B10-AA9BE44800D4}"/>
+              </a:ext>
+            </a:extLst>
+          </p:cNvPr>
+          <p:cNvCxnSpPr>
+            <a:cxnSpLocks/>
+            <a:stCxn id="46" idx="2"/>
+            <a:endCxn id="21" idx="1"/>
+          </p:cNvCxnSpPr>
+          <p:nvPr/>
+        </p:nvCxnSpPr>
+        <p:spPr>
+          <a:xfrm>
+            <a:off x="1403302" y="1874523"/>
+            <a:ext cx="1485234" cy="357374"/>
+          </a:xfrm>
+          <a:prstGeom prst="straightConnector1">
+            <a:avLst/>
+          </a:prstGeom>
+          <a:ln w="38100">
+            <a:solidFill>
+              <a:schemeClr val="bg2">
+                <a:lumMod val="75000"/>
+              </a:schemeClr>
+            </a:solidFill>
+            <a:tailEnd type="triangle"/>
+          </a:ln>
+        </p:spPr>
+        <p:style>
+          <a:lnRef idx="1">
+            <a:schemeClr val="accent1"/>
+          </a:lnRef>
+          <a:fillRef idx="0">
+            <a:schemeClr val="accent1"/>
+          </a:fillRef>
+          <a:effectRef idx="0">
+            <a:schemeClr val="accent1"/>
+          </a:effectRef>
+          <a:fontRef idx="minor">
+            <a:schemeClr val="tx1"/>
+          </a:fontRef>
+        </p:style>
+      </p:cxnSp>
+      <p:sp>
+        <p:nvSpPr>
+          <p:cNvPr id="53" name="流程图: 过程 52">
+            <a:extLst>
+              <a:ext uri="{FF2B5EF4-FFF2-40B4-BE49-F238E27FC236}">
+                <a16:creationId xmlns:a16="http://schemas.microsoft.com/office/drawing/2014/main" id="{B77EB25B-75D5-53E8-44E5-05B43D3FC6AC}"/>
+              </a:ext>
+            </a:extLst>
+          </p:cNvPr>
+          <p:cNvSpPr/>
+          <p:nvPr/>
+        </p:nvSpPr>
+        <p:spPr>
+          <a:xfrm>
+            <a:off x="6650646" y="3719077"/>
+            <a:ext cx="1926857" cy="248209"/>
+          </a:xfrm>
+          <a:prstGeom prst="flowChartProcess">
+            <a:avLst/>
+          </a:prstGeom>
+          <a:solidFill>
+            <a:schemeClr val="bg2">
+              <a:lumMod val="75000"/>
+            </a:schemeClr>
+          </a:solidFill>
+        </p:spPr>
+        <p:style>
+          <a:lnRef idx="2">
+            <a:schemeClr val="accent1">
+              <a:shade val="15000"/>
+            </a:schemeClr>
+          </a:lnRef>
+          <a:fillRef idx="1">
+            <a:schemeClr val="accent1"/>
+          </a:fillRef>
+          <a:effectRef idx="0">
+            <a:schemeClr val="accent1"/>
+          </a:effectRef>
+          <a:fontRef idx="minor">
+            <a:schemeClr val="lt1"/>
+          </a:fontRef>
+        </p:style>
+        <p:txBody>
+          <a:bodyPr rtlCol="0" anchor="ctr"/>
+          <a:lstStyle/>
+          <a:p>
+            <a:pPr algn="ctr"/>
+            <a:r>
+              <a:rPr lang="en-US" altLang="zh-CN" sz="1013" b="1" dirty="0" err="1">
+                <a:solidFill>
+                  <a:schemeClr val="tx1"/>
+                </a:solidFill>
+              </a:rPr>
+              <a:t>oscillatingPoseDisplay</a:t>
+            </a:r>
+            <a:r>
+              <a:rPr lang="en-US" altLang="zh-CN" sz="1013" b="1" dirty="0">
+                <a:solidFill>
+                  <a:schemeClr val="tx1"/>
+                </a:solidFill>
+              </a:rPr>
+              <a:t>(...)</a:t>
+            </a:r>
+            <a:endParaRPr lang="zh-CN" altLang="en-US" sz="1013" b="1" dirty="0">
+              <a:solidFill>
+                <a:schemeClr val="tx1"/>
+              </a:solidFill>
+            </a:endParaRPr>
+          </a:p>
+        </p:txBody>
+      </p:sp>
+      <p:sp>
+        <p:nvSpPr>
+          <p:cNvPr id="54" name="流程图: 过程 53">
+            <a:extLst>
+              <a:ext uri="{FF2B5EF4-FFF2-40B4-BE49-F238E27FC236}">
+                <a16:creationId xmlns:a16="http://schemas.microsoft.com/office/drawing/2014/main" id="{AD1D1BD7-7E9D-2DB2-8130-0124CD80CB18}"/>
+              </a:ext>
+            </a:extLst>
+          </p:cNvPr>
+          <p:cNvSpPr/>
+          <p:nvPr/>
+        </p:nvSpPr>
+        <p:spPr>
+          <a:xfrm>
+            <a:off x="439873" y="4372409"/>
+            <a:ext cx="1926855" cy="259761"/>
+          </a:xfrm>
+          <a:prstGeom prst="flowChartProcess">
+            <a:avLst/>
+          </a:prstGeom>
+          <a:solidFill>
+            <a:schemeClr val="bg2">
+              <a:lumMod val="75000"/>
+            </a:schemeClr>
+          </a:solidFill>
+        </p:spPr>
+        <p:style>
+          <a:lnRef idx="2">
+            <a:schemeClr val="accent1">
+              <a:shade val="15000"/>
+            </a:schemeClr>
+          </a:lnRef>
+          <a:fillRef idx="1">
+            <a:schemeClr val="accent1"/>
+          </a:fillRef>
+          <a:effectRef idx="0">
+            <a:schemeClr val="accent1"/>
+          </a:effectRef>
+          <a:fontRef idx="minor">
+            <a:schemeClr val="lt1"/>
+          </a:fontRef>
+        </p:style>
+        <p:txBody>
+          <a:bodyPr rtlCol="0" anchor="ctr"/>
+          <a:lstStyle/>
+          <a:p>
+            <a:pPr algn="ctr"/>
+            <a:r>
+              <a:rPr lang="en-US" altLang="zh-CN" sz="1013" b="1" dirty="0" err="1">
+                <a:solidFill>
+                  <a:schemeClr val="tx1"/>
+                </a:solidFill>
+              </a:rPr>
+              <a:t>propagateToBridge</a:t>
+            </a:r>
+            <a:r>
+              <a:rPr lang="en-US" altLang="zh-CN" sz="1013" b="1" dirty="0">
+                <a:solidFill>
+                  <a:schemeClr val="tx1"/>
+                </a:solidFill>
+              </a:rPr>
+              <a:t>(...)</a:t>
+            </a:r>
+          </a:p>
+        </p:txBody>
+      </p:sp>
+      <p:sp>
+        <p:nvSpPr>
+          <p:cNvPr id="55" name="流程图: 过程 54">
+            <a:extLst>
+              <a:ext uri="{FF2B5EF4-FFF2-40B4-BE49-F238E27FC236}">
+                <a16:creationId xmlns:a16="http://schemas.microsoft.com/office/drawing/2014/main" id="{02165030-BA77-9FCE-2A64-410BD3D060AD}"/>
+              </a:ext>
+            </a:extLst>
+          </p:cNvPr>
+          <p:cNvSpPr/>
+          <p:nvPr/>
+        </p:nvSpPr>
+        <p:spPr>
+          <a:xfrm>
+            <a:off x="3249219" y="4383961"/>
+            <a:ext cx="1926857" cy="248209"/>
+          </a:xfrm>
+          <a:prstGeom prst="flowChartProcess">
+            <a:avLst/>
+          </a:prstGeom>
+          <a:solidFill>
+            <a:schemeClr val="bg2">
+              <a:lumMod val="75000"/>
+            </a:schemeClr>
+          </a:solidFill>
+        </p:spPr>
+        <p:style>
+          <a:lnRef idx="2">
+            <a:schemeClr val="accent1">
+              <a:shade val="15000"/>
+            </a:schemeClr>
+          </a:lnRef>
+          <a:fillRef idx="1">
+            <a:schemeClr val="accent1"/>
+          </a:fillRef>
+          <a:effectRef idx="0">
+            <a:schemeClr val="accent1"/>
+          </a:effectRef>
+          <a:fontRef idx="minor">
+            <a:schemeClr val="lt1"/>
+          </a:fontRef>
+        </p:style>
+        <p:txBody>
+          <a:bodyPr rtlCol="0" anchor="ctr"/>
+          <a:lstStyle/>
+          <a:p>
+            <a:pPr algn="ctr"/>
+            <a:r>
+              <a:rPr lang="en-US" altLang="zh-CN" sz="1013" b="1" dirty="0" err="1">
+                <a:solidFill>
+                  <a:schemeClr val="tx1"/>
+                </a:solidFill>
+              </a:rPr>
+              <a:t>physicalLayerRisk</a:t>
+            </a:r>
+            <a:r>
+              <a:rPr lang="en-US" altLang="zh-CN" sz="1013" b="1" dirty="0">
+                <a:solidFill>
+                  <a:schemeClr val="tx1"/>
+                </a:solidFill>
+              </a:rPr>
+              <a:t>(...)</a:t>
+            </a:r>
+            <a:endParaRPr lang="zh-CN" altLang="en-US" sz="1013" b="1" dirty="0">
+              <a:solidFill>
+                <a:schemeClr val="tx1"/>
+              </a:solidFill>
+            </a:endParaRPr>
+          </a:p>
+        </p:txBody>
+      </p:sp>
+      <p:sp>
+        <p:nvSpPr>
+          <p:cNvPr id="60" name="流程图: 过程 59">
+            <a:extLst>
+              <a:ext uri="{FF2B5EF4-FFF2-40B4-BE49-F238E27FC236}">
+                <a16:creationId xmlns:a16="http://schemas.microsoft.com/office/drawing/2014/main" id="{C531D310-D6EC-FB2D-EDFD-816809814347}"/>
+              </a:ext>
+            </a:extLst>
+          </p:cNvPr>
+          <p:cNvSpPr/>
+          <p:nvPr/>
+        </p:nvSpPr>
+        <p:spPr>
+          <a:xfrm>
+            <a:off x="6244494" y="3190422"/>
+            <a:ext cx="1926857" cy="248209"/>
+          </a:xfrm>
+          <a:prstGeom prst="flowChartProcess">
+            <a:avLst/>
+          </a:prstGeom>
+          <a:solidFill>
+            <a:schemeClr val="bg2">
+              <a:lumMod val="75000"/>
+            </a:schemeClr>
+          </a:solidFill>
+        </p:spPr>
+        <p:style>
+          <a:lnRef idx="2">
+            <a:schemeClr val="accent1">
+              <a:shade val="15000"/>
+            </a:schemeClr>
+          </a:lnRef>
+          <a:fillRef idx="1">
+            <a:schemeClr val="accent1"/>
+          </a:fillRef>
+          <a:effectRef idx="0">
+            <a:schemeClr val="accent1"/>
+          </a:effectRef>
+          <a:fontRef idx="minor">
+            <a:schemeClr val="lt1"/>
+          </a:fontRef>
+        </p:style>
+        <p:txBody>
+          <a:bodyPr rtlCol="0" anchor="ctr"/>
+          <a:lstStyle/>
+          <a:p>
+            <a:pPr algn="ctr"/>
+            <a:r>
+              <a:rPr lang="en-US" altLang="zh-CN" sz="1013" b="1" dirty="0" err="1">
+                <a:solidFill>
+                  <a:schemeClr val="tx1"/>
+                </a:solidFill>
+              </a:rPr>
+              <a:t>competingPublisherState</a:t>
+            </a:r>
+            <a:r>
+              <a:rPr lang="en-US" altLang="zh-CN" sz="1013" b="1" dirty="0">
+                <a:solidFill>
+                  <a:schemeClr val="tx1"/>
+                </a:solidFill>
+              </a:rPr>
+              <a:t>(...)</a:t>
+            </a:r>
+            <a:endParaRPr lang="zh-CN" altLang="en-US" sz="1013" b="1" dirty="0">
+              <a:solidFill>
+                <a:schemeClr val="tx1"/>
+              </a:solidFill>
+            </a:endParaRPr>
+          </a:p>
+        </p:txBody>
+      </p:sp>
+      <p:sp>
+        <p:nvSpPr>
+          <p:cNvPr id="65" name="流程图: 过程 64">
+            <a:extLst>
+              <a:ext uri="{FF2B5EF4-FFF2-40B4-BE49-F238E27FC236}">
+                <a16:creationId xmlns:a16="http://schemas.microsoft.com/office/drawing/2014/main" id="{B7FFE8A4-3D43-8BAB-8EDA-FB4F73F1A7E8}"/>
+              </a:ext>
+            </a:extLst>
+          </p:cNvPr>
+          <p:cNvSpPr/>
+          <p:nvPr/>
+        </p:nvSpPr>
+        <p:spPr>
+          <a:xfrm>
+            <a:off x="1596493" y="3520572"/>
+            <a:ext cx="2120987" cy="259761"/>
+          </a:xfrm>
+          <a:prstGeom prst="flowChartProcess">
+            <a:avLst/>
+          </a:prstGeom>
+          <a:solidFill>
+            <a:srgbClr val="FF0000"/>
+          </a:solidFill>
+        </p:spPr>
+        <p:style>
+          <a:lnRef idx="2">
+            <a:schemeClr val="accent1">
+              <a:shade val="15000"/>
+            </a:schemeClr>
+          </a:lnRef>
+          <a:fillRef idx="1">
+            <a:schemeClr val="accent1"/>
+          </a:fillRef>
+          <a:effectRef idx="0">
+            <a:schemeClr val="accent1"/>
+          </a:effectRef>
+          <a:fontRef idx="minor">
+            <a:schemeClr val="lt1"/>
+          </a:fontRef>
+        </p:style>
+        <p:txBody>
+          <a:bodyPr rtlCol="0" anchor="ctr"/>
+          <a:lstStyle/>
+          <a:p>
+            <a:pPr algn="ctr"/>
+            <a:r>
+              <a:rPr lang="en-US" altLang="zh-CN" sz="1013" b="1" dirty="0" err="1">
+                <a:solidFill>
+                  <a:schemeClr val="tx1"/>
+                </a:solidFill>
+              </a:rPr>
+              <a:t>maliciousPublisher</a:t>
+            </a:r>
+            <a:r>
+              <a:rPr lang="en-US" altLang="zh-CN" sz="1013" b="1" dirty="0">
+                <a:solidFill>
+                  <a:schemeClr val="tx1"/>
+                </a:solidFill>
+              </a:rPr>
+              <a:t>(...)</a:t>
+            </a:r>
+          </a:p>
+        </p:txBody>
+      </p:sp>
+      <p:cxnSp>
+        <p:nvCxnSpPr>
+          <p:cNvPr id="66" name="直接箭头连接符 65">
+            <a:extLst>
+              <a:ext uri="{FF2B5EF4-FFF2-40B4-BE49-F238E27FC236}">
+                <a16:creationId xmlns:a16="http://schemas.microsoft.com/office/drawing/2014/main" id="{E6215742-8BF1-4268-BBA9-97CAC50602EA}"/>
+              </a:ext>
+            </a:extLst>
+          </p:cNvPr>
+          <p:cNvCxnSpPr>
+            <a:cxnSpLocks/>
+            <a:stCxn id="65" idx="3"/>
+            <a:endCxn id="15" idx="1"/>
+          </p:cNvCxnSpPr>
+          <p:nvPr/>
+        </p:nvCxnSpPr>
+        <p:spPr>
+          <a:xfrm flipV="1">
+            <a:off x="3717480" y="3314528"/>
+            <a:ext cx="134483" cy="335925"/>
+          </a:xfrm>
+          <a:prstGeom prst="straightConnector1">
+            <a:avLst/>
+          </a:prstGeom>
+          <a:ln w="38100">
+            <a:tailEnd type="triangle"/>
+          </a:ln>
+        </p:spPr>
+        <p:style>
+          <a:lnRef idx="1">
+            <a:schemeClr val="accent1"/>
+          </a:lnRef>
+          <a:fillRef idx="0">
+            <a:schemeClr val="accent1"/>
+          </a:fillRef>
+          <a:effectRef idx="0">
+            <a:schemeClr val="accent1"/>
+          </a:effectRef>
+          <a:fontRef idx="minor">
+            <a:schemeClr val="tx1"/>
+          </a:fontRef>
+        </p:style>
+      </p:cxnSp>
+      <p:cxnSp>
+        <p:nvCxnSpPr>
+          <p:cNvPr id="70" name="直接箭头连接符 69">
+            <a:extLst>
+              <a:ext uri="{FF2B5EF4-FFF2-40B4-BE49-F238E27FC236}">
+                <a16:creationId xmlns:a16="http://schemas.microsoft.com/office/drawing/2014/main" id="{57993D78-6563-906A-DE0D-C18D89305F7A}"/>
+              </a:ext>
+            </a:extLst>
+          </p:cNvPr>
+          <p:cNvCxnSpPr>
+            <a:cxnSpLocks/>
+            <a:stCxn id="60" idx="2"/>
+            <a:endCxn id="53" idx="0"/>
+          </p:cNvCxnSpPr>
+          <p:nvPr/>
+        </p:nvCxnSpPr>
+        <p:spPr>
+          <a:xfrm>
+            <a:off x="7207923" y="3438631"/>
+            <a:ext cx="406152" cy="280446"/>
+          </a:xfrm>
+          <a:prstGeom prst="straightConnector1">
+            <a:avLst/>
+          </a:prstGeom>
+          <a:ln w="38100">
+            <a:solidFill>
+              <a:schemeClr val="bg2">
+                <a:lumMod val="75000"/>
+              </a:schemeClr>
+            </a:solidFill>
+            <a:tailEnd type="triangle"/>
+          </a:ln>
+        </p:spPr>
+        <p:style>
+          <a:lnRef idx="1">
+            <a:schemeClr val="accent1"/>
+          </a:lnRef>
+          <a:fillRef idx="0">
+            <a:schemeClr val="accent1"/>
+          </a:fillRef>
+          <a:effectRef idx="0">
+            <a:schemeClr val="accent1"/>
+          </a:effectRef>
+          <a:fontRef idx="minor">
+            <a:schemeClr val="tx1"/>
+          </a:fontRef>
+        </p:style>
+      </p:cxnSp>
+      <p:sp>
+        <p:nvSpPr>
+          <p:cNvPr id="32" name="文本框 31">
+            <a:extLst>
+              <a:ext uri="{FF2B5EF4-FFF2-40B4-BE49-F238E27FC236}">
+                <a16:creationId xmlns:a16="http://schemas.microsoft.com/office/drawing/2014/main" id="{A0198061-0BAF-1145-8413-520A40B503F8}"/>
+              </a:ext>
+            </a:extLst>
+          </p:cNvPr>
+          <p:cNvSpPr txBox="1"/>
+          <p:nvPr/>
+        </p:nvSpPr>
+        <p:spPr>
+          <a:xfrm>
+            <a:off x="226577" y="243733"/>
+            <a:ext cx="2927025" cy="369332"/>
+          </a:xfrm>
+          <a:prstGeom prst="rect">
+            <a:avLst/>
+          </a:prstGeom>
+          <a:noFill/>
+        </p:spPr>
+        <p:txBody>
+          <a:bodyPr wrap="square" rtlCol="0">
+            <a:spAutoFit/>
+          </a:bodyPr>
+          <a:lstStyle/>
+          <a:p>
+            <a:r>
+              <a:rPr lang="zh-CN" altLang="en-US" b="1" dirty="0">
+                <a:solidFill>
+                  <a:schemeClr val="bg2">
+                    <a:lumMod val="75000"/>
+                  </a:schemeClr>
+                </a:solidFill>
+              </a:rPr>
+              <a:t>主链：显示层状态欺骗主链</a:t>
+            </a:r>
+            <a:endParaRPr lang="en-US" altLang="zh-CN" b="1" dirty="0">
+              <a:solidFill>
+                <a:schemeClr val="bg2">
+                  <a:lumMod val="75000"/>
+                </a:schemeClr>
+              </a:solidFill>
+            </a:endParaRPr>
+          </a:p>
+        </p:txBody>
+      </p:sp>
+      <p:sp>
+        <p:nvSpPr>
+          <p:cNvPr id="71" name="文本框 70">
+            <a:extLst>
+              <a:ext uri="{FF2B5EF4-FFF2-40B4-BE49-F238E27FC236}">
+                <a16:creationId xmlns:a16="http://schemas.microsoft.com/office/drawing/2014/main" id="{2B0B772F-A931-1517-1C7E-C22541681009}"/>
+              </a:ext>
+            </a:extLst>
+          </p:cNvPr>
+          <p:cNvSpPr txBox="1"/>
+          <p:nvPr/>
+        </p:nvSpPr>
+        <p:spPr>
+          <a:xfrm>
+            <a:off x="4212647" y="2770481"/>
+            <a:ext cx="2927025" cy="307777"/>
+          </a:xfrm>
+          <a:prstGeom prst="rect">
+            <a:avLst/>
+          </a:prstGeom>
+          <a:noFill/>
+        </p:spPr>
+        <p:txBody>
+          <a:bodyPr wrap="square" rtlCol="0">
+            <a:spAutoFit/>
+          </a:bodyPr>
+          <a:lstStyle/>
+          <a:p>
+            <a:r>
+              <a:rPr lang="zh-CN" altLang="en-US" sz="1400" b="1" dirty="0">
+                <a:solidFill>
+                  <a:schemeClr val="bg2">
+                    <a:lumMod val="75000"/>
+                  </a:schemeClr>
+                </a:solidFill>
+              </a:rPr>
+              <a:t>扩展链 </a:t>
+            </a:r>
+            <a:r>
+              <a:rPr lang="en-US" altLang="zh-CN" sz="1400" b="1" dirty="0">
+                <a:solidFill>
+                  <a:schemeClr val="bg2">
+                    <a:lumMod val="75000"/>
+                  </a:schemeClr>
+                </a:solidFill>
+              </a:rPr>
+              <a:t>A</a:t>
+            </a:r>
+            <a:r>
+              <a:rPr lang="zh-CN" altLang="en-US" sz="1400" b="1" dirty="0">
+                <a:solidFill>
+                  <a:schemeClr val="bg2">
+                    <a:lumMod val="75000"/>
+                  </a:schemeClr>
+                </a:solidFill>
+              </a:rPr>
+              <a:t>：竞争性 </a:t>
+            </a:r>
+            <a:r>
+              <a:rPr lang="en-US" altLang="zh-CN" sz="1400" b="1" dirty="0">
+                <a:solidFill>
+                  <a:schemeClr val="bg2">
+                    <a:lumMod val="75000"/>
+                  </a:schemeClr>
+                </a:solidFill>
+              </a:rPr>
+              <a:t>publisher </a:t>
+            </a:r>
+            <a:r>
+              <a:rPr lang="zh-CN" altLang="en-US" sz="1400" b="1" dirty="0">
+                <a:solidFill>
+                  <a:schemeClr val="bg2">
+                    <a:lumMod val="75000"/>
+                  </a:schemeClr>
+                </a:solidFill>
+              </a:rPr>
+              <a:t>风险</a:t>
+            </a:r>
+            <a:endParaRPr lang="en-US" altLang="zh-CN" sz="1400" b="1" dirty="0">
+              <a:solidFill>
+                <a:schemeClr val="bg2">
+                  <a:lumMod val="75000"/>
+                </a:schemeClr>
+              </a:solidFill>
+            </a:endParaRPr>
+          </a:p>
+        </p:txBody>
+      </p:sp>
+      <p:sp>
+        <p:nvSpPr>
+          <p:cNvPr id="72" name="文本框 71">
+            <a:extLst>
+              <a:ext uri="{FF2B5EF4-FFF2-40B4-BE49-F238E27FC236}">
+                <a16:creationId xmlns:a16="http://schemas.microsoft.com/office/drawing/2014/main" id="{AD8E6E05-A050-08CD-E848-F6D9A497AF46}"/>
+              </a:ext>
+            </a:extLst>
+          </p:cNvPr>
+          <p:cNvSpPr txBox="1"/>
+          <p:nvPr/>
+        </p:nvSpPr>
+        <p:spPr>
+          <a:xfrm>
+            <a:off x="2601681" y="4024027"/>
+            <a:ext cx="2927025" cy="307777"/>
+          </a:xfrm>
+          <a:prstGeom prst="rect">
+            <a:avLst/>
+          </a:prstGeom>
+          <a:noFill/>
+        </p:spPr>
+        <p:txBody>
+          <a:bodyPr wrap="square" rtlCol="0">
+            <a:spAutoFit/>
+          </a:bodyPr>
+          <a:lstStyle/>
+          <a:p>
+            <a:r>
+              <a:rPr lang="zh-CN" altLang="en-US" sz="1400" b="1" dirty="0">
+                <a:solidFill>
+                  <a:schemeClr val="bg2">
+                    <a:lumMod val="75000"/>
+                  </a:schemeClr>
+                </a:solidFill>
+              </a:rPr>
+              <a:t>扩展链 </a:t>
+            </a:r>
+            <a:r>
+              <a:rPr lang="en-US" altLang="zh-CN" sz="1400" b="1" dirty="0">
+                <a:solidFill>
+                  <a:schemeClr val="bg2">
+                    <a:lumMod val="75000"/>
+                  </a:schemeClr>
+                </a:solidFill>
+              </a:rPr>
+              <a:t>B</a:t>
+            </a:r>
+            <a:r>
+              <a:rPr lang="zh-CN" altLang="en-US" sz="1400" b="1" dirty="0">
+                <a:solidFill>
+                  <a:schemeClr val="bg2">
+                    <a:lumMod val="75000"/>
+                  </a:schemeClr>
+                </a:solidFill>
+              </a:rPr>
+              <a:t>：物理层传播风险</a:t>
+            </a:r>
+            <a:endParaRPr lang="en-US" altLang="zh-CN" sz="1400" b="1" dirty="0">
+              <a:solidFill>
+                <a:schemeClr val="bg2">
+                  <a:lumMod val="75000"/>
+                </a:schemeClr>
+              </a:solidFill>
+            </a:endParaRPr>
+          </a:p>
+        </p:txBody>
+      </p:sp>
+      <p:cxnSp>
+        <p:nvCxnSpPr>
+          <p:cNvPr id="73" name="直接箭头连接符 72">
+            <a:extLst>
+              <a:ext uri="{FF2B5EF4-FFF2-40B4-BE49-F238E27FC236}">
+                <a16:creationId xmlns:a16="http://schemas.microsoft.com/office/drawing/2014/main" id="{3936F47F-814A-0786-34F7-C5332055BD9C}"/>
+              </a:ext>
+            </a:extLst>
+          </p:cNvPr>
+          <p:cNvCxnSpPr>
+            <a:cxnSpLocks/>
+            <a:stCxn id="46" idx="2"/>
+            <a:endCxn id="54" idx="0"/>
+          </p:cNvCxnSpPr>
+          <p:nvPr/>
+        </p:nvCxnSpPr>
+        <p:spPr>
+          <a:xfrm flipH="1">
+            <a:off x="1403301" y="1874523"/>
+            <a:ext cx="1" cy="2497886"/>
+          </a:xfrm>
+          <a:prstGeom prst="straightConnector1">
+            <a:avLst/>
+          </a:prstGeom>
+          <a:ln w="38100">
+            <a:solidFill>
+              <a:schemeClr val="bg2">
+                <a:lumMod val="75000"/>
+              </a:schemeClr>
+            </a:solidFill>
+            <a:tailEnd type="triangle"/>
+          </a:ln>
+        </p:spPr>
+        <p:style>
+          <a:lnRef idx="1">
+            <a:schemeClr val="accent1"/>
+          </a:lnRef>
+          <a:fillRef idx="0">
+            <a:schemeClr val="accent1"/>
+          </a:fillRef>
+          <a:effectRef idx="0">
+            <a:schemeClr val="accent1"/>
+          </a:effectRef>
+          <a:fontRef idx="minor">
+            <a:schemeClr val="tx1"/>
+          </a:fontRef>
+        </p:style>
+      </p:cxnSp>
+      <p:sp>
+        <p:nvSpPr>
+          <p:cNvPr id="7" name="流程图: 过程 6">
+            <a:extLst>
+              <a:ext uri="{FF2B5EF4-FFF2-40B4-BE49-F238E27FC236}">
+                <a16:creationId xmlns:a16="http://schemas.microsoft.com/office/drawing/2014/main" id="{082CE44C-2432-29C6-D217-31AE87814D0E}"/>
+              </a:ext>
+            </a:extLst>
+          </p:cNvPr>
+          <p:cNvSpPr/>
+          <p:nvPr/>
+        </p:nvSpPr>
+        <p:spPr>
+          <a:xfrm>
+            <a:off x="3988510" y="1557728"/>
+            <a:ext cx="1926855" cy="409293"/>
+          </a:xfrm>
+          <a:prstGeom prst="flowChartProcess">
+            <a:avLst/>
+          </a:prstGeom>
+          <a:solidFill>
+            <a:schemeClr val="accent6">
+              <a:lumMod val="40000"/>
+              <a:lumOff val="60000"/>
+            </a:schemeClr>
+          </a:solidFill>
+        </p:spPr>
+        <p:style>
+          <a:lnRef idx="2">
+            <a:schemeClr val="accent1">
+              <a:shade val="15000"/>
+            </a:schemeClr>
+          </a:lnRef>
+          <a:fillRef idx="1">
+            <a:schemeClr val="accent1"/>
+          </a:fillRef>
+          <a:effectRef idx="0">
+            <a:schemeClr val="accent1"/>
+          </a:effectRef>
+          <a:fontRef idx="minor">
+            <a:schemeClr val="lt1"/>
+          </a:fontRef>
+        </p:style>
+        <p:txBody>
+          <a:bodyPr rtlCol="0" anchor="ctr"/>
+          <a:lstStyle/>
+          <a:p>
+            <a:pPr algn="ctr"/>
+            <a:r>
+              <a:rPr lang="en-US" altLang="zh-CN" sz="1013" b="1" dirty="0" err="1">
+                <a:solidFill>
+                  <a:schemeClr val="tx1"/>
+                </a:solidFill>
+              </a:rPr>
+              <a:t>topicAuthEnabled</a:t>
+            </a:r>
+            <a:r>
+              <a:rPr lang="en-US" altLang="zh-CN" sz="1013" b="1" dirty="0">
+                <a:solidFill>
+                  <a:schemeClr val="tx1"/>
+                </a:solidFill>
+              </a:rPr>
+              <a:t>(...)</a:t>
+            </a:r>
+          </a:p>
+          <a:p>
+            <a:pPr algn="ctr"/>
+            <a:r>
+              <a:rPr lang="en-US" altLang="zh-CN" sz="1013" b="1" dirty="0" err="1">
+                <a:solidFill>
+                  <a:schemeClr val="tx1"/>
+                </a:solidFill>
+              </a:rPr>
+              <a:t>publisherACLEnabled</a:t>
+            </a:r>
+            <a:r>
+              <a:rPr lang="en-US" altLang="zh-CN" sz="1013" b="1" dirty="0">
+                <a:solidFill>
+                  <a:schemeClr val="tx1"/>
+                </a:solidFill>
+              </a:rPr>
+              <a:t>(...)</a:t>
+            </a:r>
+          </a:p>
+        </p:txBody>
+      </p:sp>
+      <p:cxnSp>
+        <p:nvCxnSpPr>
+          <p:cNvPr id="11" name="直接箭头连接符 10">
+            <a:extLst>
+              <a:ext uri="{FF2B5EF4-FFF2-40B4-BE49-F238E27FC236}">
+                <a16:creationId xmlns:a16="http://schemas.microsoft.com/office/drawing/2014/main" id="{47E24244-4B59-1C01-5887-B3493D09A1D8}"/>
+              </a:ext>
+            </a:extLst>
+          </p:cNvPr>
+          <p:cNvCxnSpPr>
+            <a:cxnSpLocks/>
+            <a:stCxn id="7" idx="1"/>
+            <a:endCxn id="46" idx="3"/>
+          </p:cNvCxnSpPr>
+          <p:nvPr/>
+        </p:nvCxnSpPr>
+        <p:spPr>
+          <a:xfrm flipH="1" flipV="1">
+            <a:off x="2366730" y="1750419"/>
+            <a:ext cx="1621780" cy="11956"/>
+          </a:xfrm>
+          <a:prstGeom prst="straightConnector1">
+            <a:avLst/>
+          </a:prstGeom>
+          <a:ln w="38100">
+            <a:tailEnd type="triangle"/>
+          </a:ln>
+        </p:spPr>
+        <p:style>
+          <a:lnRef idx="1">
+            <a:schemeClr val="accent1"/>
+          </a:lnRef>
+          <a:fillRef idx="0">
+            <a:schemeClr val="accent1"/>
+          </a:fillRef>
+          <a:effectRef idx="0">
+            <a:schemeClr val="accent1"/>
+          </a:effectRef>
+          <a:fontRef idx="minor">
+            <a:schemeClr val="tx1"/>
+          </a:fontRef>
+        </p:style>
+      </p:cxnSp>
+      <p:sp>
+        <p:nvSpPr>
+          <p:cNvPr id="14" name="乘号 13">
+            <a:extLst>
+              <a:ext uri="{FF2B5EF4-FFF2-40B4-BE49-F238E27FC236}">
+                <a16:creationId xmlns:a16="http://schemas.microsoft.com/office/drawing/2014/main" id="{0DC33E87-D121-C093-DF3C-957F4D4961AA}"/>
+              </a:ext>
+            </a:extLst>
+          </p:cNvPr>
+          <p:cNvSpPr/>
+          <p:nvPr/>
+        </p:nvSpPr>
+        <p:spPr>
+          <a:xfrm>
+            <a:off x="3059678" y="1638343"/>
+            <a:ext cx="242885" cy="244776"/>
+          </a:xfrm>
+          <a:prstGeom prst="mathMultiply">
+            <a:avLst/>
+          </a:prstGeom>
+          <a:solidFill>
+            <a:srgbClr val="FF0000"/>
+          </a:solidFill>
+          <a:ln>
+            <a:noFill/>
+          </a:ln>
+        </p:spPr>
+        <p:style>
+          <a:lnRef idx="2">
+            <a:schemeClr val="accent1">
+              <a:shade val="15000"/>
+            </a:schemeClr>
+          </a:lnRef>
+          <a:fillRef idx="1">
+            <a:schemeClr val="accent1"/>
+          </a:fillRef>
+          <a:effectRef idx="0">
+            <a:schemeClr val="accent1"/>
+          </a:effectRef>
+          <a:fontRef idx="minor">
+            <a:schemeClr val="lt1"/>
+          </a:fontRef>
+        </p:style>
+        <p:txBody>
+          <a:bodyPr rtlCol="0" anchor="ctr"/>
+          <a:lstStyle/>
+          <a:p>
+            <a:pPr algn="ctr"/>
+            <a:endParaRPr lang="zh-CN" altLang="en-US"/>
+          </a:p>
+        </p:txBody>
+      </p:sp>
+      <p:sp>
+        <p:nvSpPr>
+          <p:cNvPr id="15" name="流程图: 过程 14">
+            <a:extLst>
+              <a:ext uri="{FF2B5EF4-FFF2-40B4-BE49-F238E27FC236}">
+                <a16:creationId xmlns:a16="http://schemas.microsoft.com/office/drawing/2014/main" id="{9C234615-7677-9E1E-A070-3FC0EB127EED}"/>
+              </a:ext>
+            </a:extLst>
+          </p:cNvPr>
+          <p:cNvSpPr/>
+          <p:nvPr/>
+        </p:nvSpPr>
+        <p:spPr>
+          <a:xfrm>
+            <a:off x="3851963" y="3184647"/>
+            <a:ext cx="1926855" cy="259761"/>
+          </a:xfrm>
+          <a:prstGeom prst="flowChartProcess">
+            <a:avLst/>
+          </a:prstGeom>
+          <a:solidFill>
+            <a:schemeClr val="accent6">
+              <a:lumMod val="40000"/>
+              <a:lumOff val="60000"/>
+            </a:schemeClr>
+          </a:solidFill>
+        </p:spPr>
+        <p:style>
+          <a:lnRef idx="2">
+            <a:schemeClr val="accent1">
+              <a:shade val="15000"/>
+            </a:schemeClr>
+          </a:lnRef>
+          <a:fillRef idx="1">
+            <a:schemeClr val="accent1"/>
+          </a:fillRef>
+          <a:effectRef idx="0">
+            <a:schemeClr val="accent1"/>
+          </a:effectRef>
+          <a:fontRef idx="minor">
+            <a:schemeClr val="lt1"/>
+          </a:fontRef>
+        </p:style>
+        <p:txBody>
+          <a:bodyPr rtlCol="0" anchor="ctr"/>
+          <a:lstStyle/>
+          <a:p>
+            <a:pPr algn="ctr"/>
+            <a:r>
+              <a:rPr lang="en-US" altLang="zh-CN" sz="1013" b="1" dirty="0" err="1">
+                <a:solidFill>
+                  <a:schemeClr val="tx1"/>
+                </a:solidFill>
+              </a:rPr>
+              <a:t>singleAuthoritativePublisher</a:t>
+            </a:r>
+            <a:r>
+              <a:rPr lang="en-US" altLang="zh-CN" sz="1013" b="1" dirty="0">
+                <a:solidFill>
+                  <a:schemeClr val="tx1"/>
+                </a:solidFill>
+              </a:rPr>
+              <a:t>(...)</a:t>
+            </a:r>
+          </a:p>
+        </p:txBody>
+      </p:sp>
+      <p:cxnSp>
+        <p:nvCxnSpPr>
+          <p:cNvPr id="29" name="直接箭头连接符 28">
+            <a:extLst>
+              <a:ext uri="{FF2B5EF4-FFF2-40B4-BE49-F238E27FC236}">
+                <a16:creationId xmlns:a16="http://schemas.microsoft.com/office/drawing/2014/main" id="{B74CB265-03D2-B463-B49A-D7691295581A}"/>
+              </a:ext>
+            </a:extLst>
+          </p:cNvPr>
+          <p:cNvCxnSpPr>
+            <a:cxnSpLocks/>
+            <a:stCxn id="15" idx="3"/>
+            <a:endCxn id="60" idx="1"/>
+          </p:cNvCxnSpPr>
+          <p:nvPr/>
+        </p:nvCxnSpPr>
+        <p:spPr>
+          <a:xfrm flipV="1">
+            <a:off x="5778818" y="3314527"/>
+            <a:ext cx="465676" cy="1"/>
+          </a:xfrm>
+          <a:prstGeom prst="straightConnector1">
+            <a:avLst/>
+          </a:prstGeom>
+          <a:ln w="38100">
+            <a:tailEnd type="triangle"/>
+          </a:ln>
+        </p:spPr>
+        <p:style>
+          <a:lnRef idx="1">
+            <a:schemeClr val="accent1"/>
+          </a:lnRef>
+          <a:fillRef idx="0">
+            <a:schemeClr val="accent1"/>
+          </a:fillRef>
+          <a:effectRef idx="0">
+            <a:schemeClr val="accent1"/>
+          </a:effectRef>
+          <a:fontRef idx="minor">
+            <a:schemeClr val="tx1"/>
+          </a:fontRef>
+        </p:style>
+      </p:cxnSp>
+      <p:sp>
+        <p:nvSpPr>
+          <p:cNvPr id="36" name="乘号 35">
+            <a:extLst>
+              <a:ext uri="{FF2B5EF4-FFF2-40B4-BE49-F238E27FC236}">
+                <a16:creationId xmlns:a16="http://schemas.microsoft.com/office/drawing/2014/main" id="{E5DF5B68-A437-B55C-38A7-3B1348C0A6C7}"/>
+              </a:ext>
+            </a:extLst>
+          </p:cNvPr>
+          <p:cNvSpPr/>
+          <p:nvPr/>
+        </p:nvSpPr>
+        <p:spPr>
+          <a:xfrm>
+            <a:off x="5884587" y="3192138"/>
+            <a:ext cx="242885" cy="244776"/>
+          </a:xfrm>
+          <a:prstGeom prst="mathMultiply">
+            <a:avLst/>
+          </a:prstGeom>
+          <a:solidFill>
+            <a:srgbClr val="FF0000"/>
+          </a:solidFill>
+          <a:ln>
+            <a:noFill/>
+          </a:ln>
+        </p:spPr>
+        <p:style>
+          <a:lnRef idx="2">
+            <a:schemeClr val="accent1">
+              <a:shade val="15000"/>
+            </a:schemeClr>
+          </a:lnRef>
+          <a:fillRef idx="1">
+            <a:schemeClr val="accent1"/>
+          </a:fillRef>
+          <a:effectRef idx="0">
+            <a:schemeClr val="accent1"/>
+          </a:effectRef>
+          <a:fontRef idx="minor">
+            <a:schemeClr val="lt1"/>
+          </a:fontRef>
+        </p:style>
+        <p:txBody>
+          <a:bodyPr rtlCol="0" anchor="ctr"/>
+          <a:lstStyle/>
+          <a:p>
+            <a:pPr algn="ctr"/>
+            <a:endParaRPr lang="zh-CN" altLang="en-US"/>
+          </a:p>
+        </p:txBody>
+      </p:sp>
     </p:spTree>
     <p:extLst>
       <p:ext uri="{BB962C8B-B14F-4D97-AF65-F5344CB8AC3E}">
-        <p14:creationId xmlns:p14="http://schemas.microsoft.com/office/powerpoint/2010/main" val="3113690307"/>
+        <p14:creationId xmlns:p14="http://schemas.microsoft.com/office/powerpoint/2010/main" val="119930530"/>
       </p:ext>
     </p:extLst>
   </p:cSld>
@@ -10143,7 +13619,7 @@
         <p:cNvPr id="1" name="">
           <a:extLst>
             <a:ext uri="{FF2B5EF4-FFF2-40B4-BE49-F238E27FC236}">
-              <a16:creationId xmlns:a16="http://schemas.microsoft.com/office/drawing/2014/main" id="{C421C4BB-0D73-3AB5-5AA9-CA7435D7D91E}"/>
+              <a16:creationId xmlns:a16="http://schemas.microsoft.com/office/drawing/2014/main" id="{D628974E-8F3A-72D4-0509-6DD096A3C0AE}"/>
             </a:ext>
           </a:extLst>
         </p:cNvPr>
@@ -10158,10 +13634,1458 @@
           <a:chExt cx="0" cy="0"/>
         </a:xfrm>
       </p:grpSpPr>
+      <p:sp>
+        <p:nvSpPr>
+          <p:cNvPr id="4" name="流程图: 过程 3">
+            <a:extLst>
+              <a:ext uri="{FF2B5EF4-FFF2-40B4-BE49-F238E27FC236}">
+                <a16:creationId xmlns:a16="http://schemas.microsoft.com/office/drawing/2014/main" id="{98F49790-B46B-0E34-81C4-EAF6F04D4E87}"/>
+              </a:ext>
+            </a:extLst>
+          </p:cNvPr>
+          <p:cNvSpPr/>
+          <p:nvPr/>
+        </p:nvSpPr>
+        <p:spPr>
+          <a:xfrm>
+            <a:off x="4211765" y="210137"/>
+            <a:ext cx="3134813" cy="403009"/>
+          </a:xfrm>
+          <a:prstGeom prst="flowChartProcess">
+            <a:avLst/>
+          </a:prstGeom>
+          <a:solidFill>
+            <a:schemeClr val="accent1">
+              <a:lumMod val="60000"/>
+              <a:lumOff val="40000"/>
+            </a:schemeClr>
+          </a:solidFill>
+        </p:spPr>
+        <p:style>
+          <a:lnRef idx="2">
+            <a:schemeClr val="accent1">
+              <a:shade val="15000"/>
+            </a:schemeClr>
+          </a:lnRef>
+          <a:fillRef idx="1">
+            <a:schemeClr val="accent1"/>
+          </a:fillRef>
+          <a:effectRef idx="0">
+            <a:schemeClr val="accent1"/>
+          </a:effectRef>
+          <a:fontRef idx="minor">
+            <a:schemeClr val="lt1"/>
+          </a:fontRef>
+        </p:style>
+        <p:txBody>
+          <a:bodyPr rtlCol="0" anchor="ctr"/>
+          <a:lstStyle/>
+          <a:p>
+            <a:pPr algn="ctr"/>
+            <a:r>
+              <a:rPr lang="en-US" altLang="zh-CN" sz="1013" b="1" dirty="0" err="1">
+                <a:solidFill>
+                  <a:schemeClr val="tx1"/>
+                </a:solidFill>
+              </a:rPr>
+              <a:t>joint_state_publisher_gui</a:t>
+            </a:r>
+            <a:endParaRPr lang="en-US" altLang="zh-CN" sz="1013" b="1" dirty="0">
+              <a:solidFill>
+                <a:schemeClr val="tx1"/>
+              </a:solidFill>
+            </a:endParaRPr>
+          </a:p>
+          <a:p>
+            <a:pPr algn="ctr"/>
+            <a:r>
+              <a:rPr lang="zh-CN" altLang="en-US" sz="1013" b="1" dirty="0">
+                <a:solidFill>
+                  <a:schemeClr val="tx1"/>
+                </a:solidFill>
+              </a:rPr>
+              <a:t>发布关节状态</a:t>
+            </a:r>
+          </a:p>
+        </p:txBody>
+      </p:sp>
+      <p:sp>
+        <p:nvSpPr>
+          <p:cNvPr id="5" name="流程图: 过程 4">
+            <a:extLst>
+              <a:ext uri="{FF2B5EF4-FFF2-40B4-BE49-F238E27FC236}">
+                <a16:creationId xmlns:a16="http://schemas.microsoft.com/office/drawing/2014/main" id="{F5D8549E-2A73-E0FA-528D-D3BECE09A832}"/>
+              </a:ext>
+            </a:extLst>
+          </p:cNvPr>
+          <p:cNvSpPr/>
+          <p:nvPr/>
+        </p:nvSpPr>
+        <p:spPr>
+          <a:xfrm>
+            <a:off x="4211767" y="1020959"/>
+            <a:ext cx="3134811" cy="403009"/>
+          </a:xfrm>
+          <a:prstGeom prst="flowChartProcess">
+            <a:avLst/>
+          </a:prstGeom>
+          <a:solidFill>
+            <a:schemeClr val="accent2">
+              <a:lumMod val="40000"/>
+              <a:lumOff val="60000"/>
+            </a:schemeClr>
+          </a:solidFill>
+        </p:spPr>
+        <p:style>
+          <a:lnRef idx="2">
+            <a:schemeClr val="accent1">
+              <a:shade val="15000"/>
+            </a:schemeClr>
+          </a:lnRef>
+          <a:fillRef idx="1">
+            <a:schemeClr val="accent1"/>
+          </a:fillRef>
+          <a:effectRef idx="0">
+            <a:schemeClr val="accent1"/>
+          </a:effectRef>
+          <a:fontRef idx="minor">
+            <a:schemeClr val="lt1"/>
+          </a:fontRef>
+        </p:style>
+        <p:txBody>
+          <a:bodyPr rtlCol="0" anchor="ctr"/>
+          <a:lstStyle/>
+          <a:p>
+            <a:pPr algn="ctr"/>
+            <a:r>
+              <a:rPr lang="en-US" altLang="zh-CN" sz="1013" b="1" dirty="0">
+                <a:solidFill>
+                  <a:schemeClr val="tx1"/>
+                </a:solidFill>
+              </a:rPr>
+              <a:t>/_</a:t>
+            </a:r>
+            <a:r>
+              <a:rPr lang="en-US" altLang="zh-CN" sz="1013" b="1" dirty="0" err="1">
+                <a:solidFill>
+                  <a:schemeClr val="tx1"/>
+                </a:solidFill>
+              </a:rPr>
+              <a:t>joint_states_authorized_source</a:t>
+            </a:r>
+            <a:endParaRPr lang="en-US" altLang="zh-CN" sz="1013" b="1" dirty="0">
+              <a:solidFill>
+                <a:schemeClr val="tx1"/>
+              </a:solidFill>
+            </a:endParaRPr>
+          </a:p>
+          <a:p>
+            <a:pPr algn="ctr"/>
+            <a:r>
+              <a:rPr lang="zh-CN" altLang="en-US" sz="1013" b="1" dirty="0">
+                <a:solidFill>
+                  <a:schemeClr val="tx1"/>
+                </a:solidFill>
+              </a:rPr>
+              <a:t>原始输入层</a:t>
+            </a:r>
+            <a:r>
+              <a:rPr lang="en-US" altLang="zh-CN" sz="1013" b="1" dirty="0">
+                <a:solidFill>
+                  <a:schemeClr val="tx1"/>
+                </a:solidFill>
+              </a:rPr>
+              <a:t>: </a:t>
+            </a:r>
+            <a:r>
+              <a:rPr lang="zh-CN" altLang="en-US" sz="1013" b="1" dirty="0">
+                <a:solidFill>
+                  <a:schemeClr val="tx1"/>
+                </a:solidFill>
+              </a:rPr>
+              <a:t>未直接信任</a:t>
+            </a:r>
+            <a:endParaRPr lang="en-US" altLang="zh-CN" sz="1013" b="1" dirty="0">
+              <a:solidFill>
+                <a:schemeClr val="tx1"/>
+              </a:solidFill>
+            </a:endParaRPr>
+          </a:p>
+        </p:txBody>
+      </p:sp>
+      <p:sp>
+        <p:nvSpPr>
+          <p:cNvPr id="6" name="流程图: 过程 5">
+            <a:extLst>
+              <a:ext uri="{FF2B5EF4-FFF2-40B4-BE49-F238E27FC236}">
+                <a16:creationId xmlns:a16="http://schemas.microsoft.com/office/drawing/2014/main" id="{D276A3CD-96C6-35E5-A3A0-61CA69252F31}"/>
+              </a:ext>
+            </a:extLst>
+          </p:cNvPr>
+          <p:cNvSpPr/>
+          <p:nvPr/>
+        </p:nvSpPr>
+        <p:spPr>
+          <a:xfrm>
+            <a:off x="4211767" y="1856863"/>
+            <a:ext cx="3134811" cy="423885"/>
+          </a:xfrm>
+          <a:prstGeom prst="flowChartProcess">
+            <a:avLst/>
+          </a:prstGeom>
+          <a:solidFill>
+            <a:schemeClr val="accent1">
+              <a:lumMod val="60000"/>
+              <a:lumOff val="40000"/>
+            </a:schemeClr>
+          </a:solidFill>
+        </p:spPr>
+        <p:style>
+          <a:lnRef idx="2">
+            <a:schemeClr val="accent1">
+              <a:shade val="15000"/>
+            </a:schemeClr>
+          </a:lnRef>
+          <a:fillRef idx="1">
+            <a:schemeClr val="accent1"/>
+          </a:fillRef>
+          <a:effectRef idx="0">
+            <a:schemeClr val="accent1"/>
+          </a:effectRef>
+          <a:fontRef idx="minor">
+            <a:schemeClr val="lt1"/>
+          </a:fontRef>
+        </p:style>
+        <p:txBody>
+          <a:bodyPr rtlCol="0" anchor="ctr"/>
+          <a:lstStyle/>
+          <a:p>
+            <a:pPr algn="ctr"/>
+            <a:r>
+              <a:rPr lang="en-US" altLang="zh-CN" sz="1013" b="1" dirty="0" err="1">
+                <a:solidFill>
+                  <a:schemeClr val="tx1"/>
+                </a:solidFill>
+              </a:rPr>
+              <a:t>trusted_joint_state_filter</a:t>
+            </a:r>
+            <a:endParaRPr lang="en-US" altLang="zh-CN" sz="1013" b="1" dirty="0">
+              <a:solidFill>
+                <a:schemeClr val="tx1"/>
+              </a:solidFill>
+            </a:endParaRPr>
+          </a:p>
+          <a:p>
+            <a:pPr algn="ctr"/>
+            <a:r>
+              <a:rPr lang="zh-CN" altLang="en-US" sz="1013" b="1" dirty="0">
+                <a:solidFill>
+                  <a:schemeClr val="tx1"/>
+                </a:solidFill>
+              </a:rPr>
+              <a:t>执行单一 </a:t>
+            </a:r>
+            <a:r>
+              <a:rPr lang="en-US" altLang="zh-CN" sz="1013" b="1" dirty="0">
+                <a:solidFill>
+                  <a:schemeClr val="tx1"/>
+                </a:solidFill>
+              </a:rPr>
+              <a:t>Publisher / </a:t>
+            </a:r>
+            <a:r>
+              <a:rPr lang="zh-CN" altLang="en-US" sz="1013" b="1" dirty="0">
+                <a:solidFill>
+                  <a:schemeClr val="tx1"/>
+                </a:solidFill>
+              </a:rPr>
+              <a:t>时间戳 </a:t>
+            </a:r>
+            <a:r>
+              <a:rPr lang="en-US" altLang="zh-CN" sz="1013" b="1" dirty="0">
+                <a:solidFill>
+                  <a:schemeClr val="tx1"/>
+                </a:solidFill>
+              </a:rPr>
+              <a:t>/ </a:t>
+            </a:r>
+            <a:r>
+              <a:rPr lang="zh-CN" altLang="en-US" sz="1013" b="1" dirty="0">
+                <a:solidFill>
+                  <a:schemeClr val="tx1"/>
+                </a:solidFill>
+              </a:rPr>
+              <a:t>名称 </a:t>
+            </a:r>
+            <a:r>
+              <a:rPr lang="en-US" altLang="zh-CN" sz="1013" b="1" dirty="0">
+                <a:solidFill>
+                  <a:schemeClr val="tx1"/>
+                </a:solidFill>
+              </a:rPr>
+              <a:t>/ </a:t>
+            </a:r>
+            <a:r>
+              <a:rPr lang="zh-CN" altLang="en-US" sz="1013" b="1" dirty="0">
+                <a:solidFill>
+                  <a:schemeClr val="tx1"/>
+                </a:solidFill>
+              </a:rPr>
+              <a:t>范围检查</a:t>
+            </a:r>
+          </a:p>
+        </p:txBody>
+      </p:sp>
+      <p:sp>
+        <p:nvSpPr>
+          <p:cNvPr id="7" name="流程图: 过程 6">
+            <a:extLst>
+              <a:ext uri="{FF2B5EF4-FFF2-40B4-BE49-F238E27FC236}">
+                <a16:creationId xmlns:a16="http://schemas.microsoft.com/office/drawing/2014/main" id="{0689EBBB-7812-D9A6-9CA6-673999C0BEFE}"/>
+              </a:ext>
+            </a:extLst>
+          </p:cNvPr>
+          <p:cNvSpPr/>
+          <p:nvPr/>
+        </p:nvSpPr>
+        <p:spPr>
+          <a:xfrm>
+            <a:off x="4211776" y="2713643"/>
+            <a:ext cx="3134810" cy="475777"/>
+          </a:xfrm>
+          <a:prstGeom prst="flowChartProcess">
+            <a:avLst/>
+          </a:prstGeom>
+          <a:solidFill>
+            <a:schemeClr val="accent2">
+              <a:lumMod val="40000"/>
+              <a:lumOff val="60000"/>
+            </a:schemeClr>
+          </a:solidFill>
+        </p:spPr>
+        <p:style>
+          <a:lnRef idx="2">
+            <a:schemeClr val="accent1">
+              <a:shade val="15000"/>
+            </a:schemeClr>
+          </a:lnRef>
+          <a:fillRef idx="1">
+            <a:schemeClr val="accent1"/>
+          </a:fillRef>
+          <a:effectRef idx="0">
+            <a:schemeClr val="accent1"/>
+          </a:effectRef>
+          <a:fontRef idx="minor">
+            <a:schemeClr val="lt1"/>
+          </a:fontRef>
+        </p:style>
+        <p:txBody>
+          <a:bodyPr rtlCol="0" anchor="ctr"/>
+          <a:lstStyle/>
+          <a:p>
+            <a:pPr algn="ctr"/>
+            <a:r>
+              <a:rPr lang="en-US" altLang="zh-CN" sz="1013" b="1" dirty="0">
+                <a:solidFill>
+                  <a:schemeClr val="tx1"/>
+                </a:solidFill>
+              </a:rPr>
+              <a:t>/_</a:t>
+            </a:r>
+            <a:r>
+              <a:rPr lang="en-US" altLang="zh-CN" sz="1013" b="1" dirty="0" err="1">
+                <a:solidFill>
+                  <a:schemeClr val="tx1"/>
+                </a:solidFill>
+              </a:rPr>
+              <a:t>joint_states_trusted</a:t>
+            </a:r>
+            <a:endParaRPr lang="en-US" altLang="zh-CN" sz="1013" b="1" dirty="0">
+              <a:solidFill>
+                <a:schemeClr val="tx1"/>
+              </a:solidFill>
+            </a:endParaRPr>
+          </a:p>
+          <a:p>
+            <a:pPr algn="ctr"/>
+            <a:r>
+              <a:rPr lang="zh-CN" altLang="en-US" sz="1013" b="1" dirty="0">
+                <a:solidFill>
+                  <a:schemeClr val="tx1"/>
+                </a:solidFill>
+              </a:rPr>
+              <a:t>可信输出</a:t>
+            </a:r>
+            <a:r>
+              <a:rPr lang="en-US" altLang="zh-CN" sz="1013" b="1" dirty="0">
+                <a:solidFill>
+                  <a:schemeClr val="tx1"/>
+                </a:solidFill>
+              </a:rPr>
+              <a:t>: </a:t>
+            </a:r>
+            <a:r>
+              <a:rPr lang="zh-CN" altLang="en-US" sz="1013" b="1" dirty="0">
+                <a:solidFill>
+                  <a:schemeClr val="tx1"/>
+                </a:solidFill>
+              </a:rPr>
+              <a:t>仅转发通过校验的 </a:t>
+            </a:r>
+            <a:r>
+              <a:rPr lang="en-US" altLang="zh-CN" sz="1013" b="1" dirty="0" err="1">
+                <a:solidFill>
+                  <a:schemeClr val="tx1"/>
+                </a:solidFill>
+              </a:rPr>
+              <a:t>JointState</a:t>
+            </a:r>
+            <a:endParaRPr lang="en-US" altLang="zh-CN" sz="1013" b="1" dirty="0">
+              <a:solidFill>
+                <a:schemeClr val="tx1"/>
+              </a:solidFill>
+            </a:endParaRPr>
+          </a:p>
+        </p:txBody>
+      </p:sp>
+      <p:sp>
+        <p:nvSpPr>
+          <p:cNvPr id="8" name="流程图: 过程 7">
+            <a:extLst>
+              <a:ext uri="{FF2B5EF4-FFF2-40B4-BE49-F238E27FC236}">
+                <a16:creationId xmlns:a16="http://schemas.microsoft.com/office/drawing/2014/main" id="{A5954C12-49F5-1554-F45E-0C8805C5E798}"/>
+              </a:ext>
+            </a:extLst>
+          </p:cNvPr>
+          <p:cNvSpPr/>
+          <p:nvPr/>
+        </p:nvSpPr>
+        <p:spPr>
+          <a:xfrm>
+            <a:off x="4211765" y="4277256"/>
+            <a:ext cx="3134801" cy="377930"/>
+          </a:xfrm>
+          <a:prstGeom prst="flowChartProcess">
+            <a:avLst/>
+          </a:prstGeom>
+          <a:solidFill>
+            <a:schemeClr val="accent1">
+              <a:lumMod val="60000"/>
+              <a:lumOff val="40000"/>
+            </a:schemeClr>
+          </a:solidFill>
+        </p:spPr>
+        <p:style>
+          <a:lnRef idx="2">
+            <a:schemeClr val="accent1">
+              <a:shade val="15000"/>
+            </a:schemeClr>
+          </a:lnRef>
+          <a:fillRef idx="1">
+            <a:schemeClr val="accent1"/>
+          </a:fillRef>
+          <a:effectRef idx="0">
+            <a:schemeClr val="accent1"/>
+          </a:effectRef>
+          <a:fontRef idx="minor">
+            <a:schemeClr val="lt1"/>
+          </a:fontRef>
+        </p:style>
+        <p:txBody>
+          <a:bodyPr rtlCol="0" anchor="ctr"/>
+          <a:lstStyle/>
+          <a:p>
+            <a:pPr algn="ctr"/>
+            <a:r>
+              <a:rPr lang="en-US" altLang="zh-CN" sz="1013" b="1" dirty="0">
+                <a:solidFill>
+                  <a:schemeClr val="tx1"/>
+                </a:solidFill>
+              </a:rPr>
+              <a:t>Rviz</a:t>
+            </a:r>
+          </a:p>
+          <a:p>
+            <a:pPr algn="ctr"/>
+            <a:r>
+              <a:rPr lang="zh-CN" altLang="en-US" sz="1013" b="1" dirty="0">
+                <a:solidFill>
+                  <a:schemeClr val="tx1"/>
+                </a:solidFill>
+              </a:rPr>
+              <a:t>显示机械臂姿态</a:t>
+            </a:r>
+          </a:p>
+        </p:txBody>
+      </p:sp>
+      <p:cxnSp>
+        <p:nvCxnSpPr>
+          <p:cNvPr id="23" name="直接箭头连接符 22">
+            <a:extLst>
+              <a:ext uri="{FF2B5EF4-FFF2-40B4-BE49-F238E27FC236}">
+                <a16:creationId xmlns:a16="http://schemas.microsoft.com/office/drawing/2014/main" id="{FFE780B7-19D0-367A-A331-C29E1CFB063D}"/>
+              </a:ext>
+            </a:extLst>
+          </p:cNvPr>
+          <p:cNvCxnSpPr>
+            <a:cxnSpLocks/>
+            <a:stCxn id="7" idx="2"/>
+            <a:endCxn id="20" idx="0"/>
+          </p:cNvCxnSpPr>
+          <p:nvPr/>
+        </p:nvCxnSpPr>
+        <p:spPr>
+          <a:xfrm flipH="1">
+            <a:off x="5779171" y="3189420"/>
+            <a:ext cx="10" cy="288660"/>
+          </a:xfrm>
+          <a:prstGeom prst="straightConnector1">
+            <a:avLst/>
+          </a:prstGeom>
+          <a:ln w="38100">
+            <a:tailEnd type="triangle"/>
+          </a:ln>
+        </p:spPr>
+        <p:style>
+          <a:lnRef idx="1">
+            <a:schemeClr val="accent1"/>
+          </a:lnRef>
+          <a:fillRef idx="0">
+            <a:schemeClr val="accent1"/>
+          </a:fillRef>
+          <a:effectRef idx="0">
+            <a:schemeClr val="accent1"/>
+          </a:effectRef>
+          <a:fontRef idx="minor">
+            <a:schemeClr val="tx1"/>
+          </a:fontRef>
+        </p:style>
+      </p:cxnSp>
+      <p:sp>
+        <p:nvSpPr>
+          <p:cNvPr id="28" name="文本框 27">
+            <a:extLst>
+              <a:ext uri="{FF2B5EF4-FFF2-40B4-BE49-F238E27FC236}">
+                <a16:creationId xmlns:a16="http://schemas.microsoft.com/office/drawing/2014/main" id="{ED6DEC56-E890-C87C-EB55-EC2A1A096EB0}"/>
+              </a:ext>
+            </a:extLst>
+          </p:cNvPr>
+          <p:cNvSpPr txBox="1"/>
+          <p:nvPr/>
+        </p:nvSpPr>
+        <p:spPr>
+          <a:xfrm>
+            <a:off x="5848503" y="692947"/>
+            <a:ext cx="1063112" cy="248209"/>
+          </a:xfrm>
+          <a:prstGeom prst="rect">
+            <a:avLst/>
+          </a:prstGeom>
+          <a:noFill/>
+        </p:spPr>
+        <p:txBody>
+          <a:bodyPr wrap="none" rtlCol="0">
+            <a:spAutoFit/>
+          </a:bodyPr>
+          <a:lstStyle/>
+          <a:p>
+            <a:r>
+              <a:rPr lang="zh-CN" altLang="en-US" sz="1013" b="1" dirty="0"/>
+              <a:t>发布 </a:t>
+            </a:r>
+            <a:r>
+              <a:rPr lang="en-US" altLang="zh-CN" sz="1013" b="1" dirty="0" err="1"/>
+              <a:t>JointState</a:t>
+            </a:r>
+            <a:endParaRPr lang="en-US" altLang="zh-CN" sz="1013" b="1" dirty="0"/>
+          </a:p>
+        </p:txBody>
+      </p:sp>
+      <p:sp>
+        <p:nvSpPr>
+          <p:cNvPr id="29" name="文本框 28">
+            <a:extLst>
+              <a:ext uri="{FF2B5EF4-FFF2-40B4-BE49-F238E27FC236}">
+                <a16:creationId xmlns:a16="http://schemas.microsoft.com/office/drawing/2014/main" id="{8E772CC2-62A8-33F6-81FB-056E3FC4B42A}"/>
+              </a:ext>
+            </a:extLst>
+          </p:cNvPr>
+          <p:cNvSpPr txBox="1"/>
+          <p:nvPr/>
+        </p:nvSpPr>
+        <p:spPr>
+          <a:xfrm>
+            <a:off x="5823664" y="1516311"/>
+            <a:ext cx="444352" cy="248209"/>
+          </a:xfrm>
+          <a:prstGeom prst="rect">
+            <a:avLst/>
+          </a:prstGeom>
+          <a:noFill/>
+        </p:spPr>
+        <p:txBody>
+          <a:bodyPr wrap="none" rtlCol="0">
+            <a:spAutoFit/>
+          </a:bodyPr>
+          <a:lstStyle/>
+          <a:p>
+            <a:r>
+              <a:rPr lang="zh-CN" altLang="en-US" sz="1013" b="1" dirty="0"/>
+              <a:t>校验</a:t>
+            </a:r>
+            <a:endParaRPr lang="en-US" altLang="zh-CN" sz="1013" b="1" dirty="0"/>
+          </a:p>
+        </p:txBody>
+      </p:sp>
+      <p:sp>
+        <p:nvSpPr>
+          <p:cNvPr id="30" name="文本框 29">
+            <a:extLst>
+              <a:ext uri="{FF2B5EF4-FFF2-40B4-BE49-F238E27FC236}">
+                <a16:creationId xmlns:a16="http://schemas.microsoft.com/office/drawing/2014/main" id="{30B3074F-6B6D-4FD2-959B-B395964E107E}"/>
+              </a:ext>
+            </a:extLst>
+          </p:cNvPr>
+          <p:cNvSpPr txBox="1"/>
+          <p:nvPr/>
+        </p:nvSpPr>
+        <p:spPr>
+          <a:xfrm>
+            <a:off x="5823664" y="2373091"/>
+            <a:ext cx="1244251" cy="248209"/>
+          </a:xfrm>
+          <a:prstGeom prst="rect">
+            <a:avLst/>
+          </a:prstGeom>
+          <a:noFill/>
+        </p:spPr>
+        <p:txBody>
+          <a:bodyPr wrap="none" rtlCol="0">
+            <a:spAutoFit/>
+          </a:bodyPr>
+          <a:lstStyle/>
+          <a:p>
+            <a:r>
+              <a:rPr lang="zh-CN" altLang="en-US" sz="1013" b="1" dirty="0"/>
+              <a:t>转发可信</a:t>
+            </a:r>
+            <a:r>
+              <a:rPr lang="en-US" altLang="zh-CN" sz="1013" b="1" dirty="0" err="1"/>
+              <a:t>JointState</a:t>
+            </a:r>
+            <a:endParaRPr lang="en-US" altLang="zh-CN" sz="1013" b="1" dirty="0"/>
+          </a:p>
+        </p:txBody>
+      </p:sp>
+      <p:sp>
+        <p:nvSpPr>
+          <p:cNvPr id="31" name="文本框 30">
+            <a:extLst>
+              <a:ext uri="{FF2B5EF4-FFF2-40B4-BE49-F238E27FC236}">
+                <a16:creationId xmlns:a16="http://schemas.microsoft.com/office/drawing/2014/main" id="{71E8F978-70E2-DF49-7D65-D3F2FFE660B7}"/>
+              </a:ext>
+            </a:extLst>
+          </p:cNvPr>
+          <p:cNvSpPr txBox="1"/>
+          <p:nvPr/>
+        </p:nvSpPr>
+        <p:spPr>
+          <a:xfrm>
+            <a:off x="5779170" y="3209645"/>
+            <a:ext cx="444352" cy="248209"/>
+          </a:xfrm>
+          <a:prstGeom prst="rect">
+            <a:avLst/>
+          </a:prstGeom>
+          <a:noFill/>
+        </p:spPr>
+        <p:txBody>
+          <a:bodyPr wrap="none" rtlCol="0">
+            <a:spAutoFit/>
+          </a:bodyPr>
+          <a:lstStyle/>
+          <a:p>
+            <a:r>
+              <a:rPr lang="zh-CN" altLang="en-US" sz="1013" b="1" dirty="0"/>
+              <a:t>订阅</a:t>
+            </a:r>
+            <a:endParaRPr lang="en-US" altLang="zh-CN" sz="1013" b="1" dirty="0"/>
+          </a:p>
+        </p:txBody>
+      </p:sp>
+      <p:cxnSp>
+        <p:nvCxnSpPr>
+          <p:cNvPr id="68" name="直接箭头连接符 67">
+            <a:extLst>
+              <a:ext uri="{FF2B5EF4-FFF2-40B4-BE49-F238E27FC236}">
+                <a16:creationId xmlns:a16="http://schemas.microsoft.com/office/drawing/2014/main" id="{EDB324BB-8C1E-0163-BB16-4EE40AA6B714}"/>
+              </a:ext>
+            </a:extLst>
+          </p:cNvPr>
+          <p:cNvCxnSpPr>
+            <a:cxnSpLocks/>
+            <a:stCxn id="6" idx="2"/>
+            <a:endCxn id="7" idx="0"/>
+          </p:cNvCxnSpPr>
+          <p:nvPr/>
+        </p:nvCxnSpPr>
+        <p:spPr>
+          <a:xfrm>
+            <a:off x="5779173" y="2280748"/>
+            <a:ext cx="8" cy="432895"/>
+          </a:xfrm>
+          <a:prstGeom prst="straightConnector1">
+            <a:avLst/>
+          </a:prstGeom>
+          <a:ln w="38100">
+            <a:tailEnd type="triangle"/>
+          </a:ln>
+        </p:spPr>
+        <p:style>
+          <a:lnRef idx="1">
+            <a:schemeClr val="accent1"/>
+          </a:lnRef>
+          <a:fillRef idx="0">
+            <a:schemeClr val="accent1"/>
+          </a:fillRef>
+          <a:effectRef idx="0">
+            <a:schemeClr val="accent1"/>
+          </a:effectRef>
+          <a:fontRef idx="minor">
+            <a:schemeClr val="tx1"/>
+          </a:fontRef>
+        </p:style>
+      </p:cxnSp>
+      <p:cxnSp>
+        <p:nvCxnSpPr>
+          <p:cNvPr id="80" name="直接箭头连接符 79">
+            <a:extLst>
+              <a:ext uri="{FF2B5EF4-FFF2-40B4-BE49-F238E27FC236}">
+                <a16:creationId xmlns:a16="http://schemas.microsoft.com/office/drawing/2014/main" id="{684BBF74-990C-2A0B-4763-B9D878CCB484}"/>
+              </a:ext>
+            </a:extLst>
+          </p:cNvPr>
+          <p:cNvCxnSpPr>
+            <a:cxnSpLocks/>
+            <a:stCxn id="5" idx="2"/>
+            <a:endCxn id="6" idx="0"/>
+          </p:cNvCxnSpPr>
+          <p:nvPr/>
+        </p:nvCxnSpPr>
+        <p:spPr>
+          <a:xfrm>
+            <a:off x="5779173" y="1423968"/>
+            <a:ext cx="0" cy="432895"/>
+          </a:xfrm>
+          <a:prstGeom prst="straightConnector1">
+            <a:avLst/>
+          </a:prstGeom>
+          <a:ln w="38100">
+            <a:tailEnd type="triangle"/>
+          </a:ln>
+        </p:spPr>
+        <p:style>
+          <a:lnRef idx="1">
+            <a:schemeClr val="accent1"/>
+          </a:lnRef>
+          <a:fillRef idx="0">
+            <a:schemeClr val="accent1"/>
+          </a:fillRef>
+          <a:effectRef idx="0">
+            <a:schemeClr val="accent1"/>
+          </a:effectRef>
+          <a:fontRef idx="minor">
+            <a:schemeClr val="tx1"/>
+          </a:fontRef>
+        </p:style>
+      </p:cxnSp>
+      <p:cxnSp>
+        <p:nvCxnSpPr>
+          <p:cNvPr id="83" name="直接箭头连接符 82">
+            <a:extLst>
+              <a:ext uri="{FF2B5EF4-FFF2-40B4-BE49-F238E27FC236}">
+                <a16:creationId xmlns:a16="http://schemas.microsoft.com/office/drawing/2014/main" id="{CB650743-5D77-CE19-E7A5-591C81EFF394}"/>
+              </a:ext>
+            </a:extLst>
+          </p:cNvPr>
+          <p:cNvCxnSpPr>
+            <a:cxnSpLocks/>
+            <a:stCxn id="4" idx="2"/>
+            <a:endCxn id="5" idx="0"/>
+          </p:cNvCxnSpPr>
+          <p:nvPr/>
+        </p:nvCxnSpPr>
+        <p:spPr>
+          <a:xfrm>
+            <a:off x="5779172" y="613146"/>
+            <a:ext cx="1" cy="407813"/>
+          </a:xfrm>
+          <a:prstGeom prst="straightConnector1">
+            <a:avLst/>
+          </a:prstGeom>
+          <a:ln w="38100">
+            <a:tailEnd type="triangle"/>
+          </a:ln>
+        </p:spPr>
+        <p:style>
+          <a:lnRef idx="1">
+            <a:schemeClr val="accent1"/>
+          </a:lnRef>
+          <a:fillRef idx="0">
+            <a:schemeClr val="accent1"/>
+          </a:fillRef>
+          <a:effectRef idx="0">
+            <a:schemeClr val="accent1"/>
+          </a:effectRef>
+          <a:fontRef idx="minor">
+            <a:schemeClr val="tx1"/>
+          </a:fontRef>
+        </p:style>
+      </p:cxnSp>
+      <p:sp>
+        <p:nvSpPr>
+          <p:cNvPr id="87" name="箭头: 左 86">
+            <a:extLst>
+              <a:ext uri="{FF2B5EF4-FFF2-40B4-BE49-F238E27FC236}">
+                <a16:creationId xmlns:a16="http://schemas.microsoft.com/office/drawing/2014/main" id="{51B7BFD6-D003-DE34-9606-507E0EEB09A5}"/>
+              </a:ext>
+            </a:extLst>
+          </p:cNvPr>
+          <p:cNvSpPr/>
+          <p:nvPr/>
+        </p:nvSpPr>
+        <p:spPr>
+          <a:xfrm>
+            <a:off x="7346578" y="948498"/>
+            <a:ext cx="1460838" cy="619705"/>
+          </a:xfrm>
+          <a:prstGeom prst="leftArrow">
+            <a:avLst/>
+          </a:prstGeom>
+          <a:solidFill>
+            <a:schemeClr val="bg1"/>
+          </a:solidFill>
+        </p:spPr>
+        <p:style>
+          <a:lnRef idx="2">
+            <a:schemeClr val="accent1">
+              <a:shade val="15000"/>
+            </a:schemeClr>
+          </a:lnRef>
+          <a:fillRef idx="1">
+            <a:schemeClr val="accent1"/>
+          </a:fillRef>
+          <a:effectRef idx="0">
+            <a:schemeClr val="accent1"/>
+          </a:effectRef>
+          <a:fontRef idx="minor">
+            <a:schemeClr val="lt1"/>
+          </a:fontRef>
+        </p:style>
+        <p:txBody>
+          <a:bodyPr rtlCol="0" anchor="ctr"/>
+          <a:lstStyle/>
+          <a:p>
+            <a:pPr algn="ctr"/>
+            <a:r>
+              <a:rPr lang="zh-CN" altLang="en-US" sz="1013" b="1" dirty="0">
+                <a:solidFill>
+                  <a:srgbClr val="FF0000"/>
+                </a:solidFill>
+              </a:rPr>
+              <a:t>原始输入</a:t>
+            </a:r>
+            <a:endParaRPr lang="en-US" altLang="zh-CN" sz="1013" b="1" dirty="0">
+              <a:solidFill>
+                <a:srgbClr val="FF0000"/>
+              </a:solidFill>
+            </a:endParaRPr>
+          </a:p>
+          <a:p>
+            <a:pPr algn="ctr"/>
+            <a:r>
+              <a:rPr lang="zh-CN" altLang="en-US" sz="1013" b="1" dirty="0">
+                <a:solidFill>
+                  <a:srgbClr val="FF0000"/>
+                </a:solidFill>
+              </a:rPr>
+              <a:t>待校验</a:t>
+            </a:r>
+          </a:p>
+        </p:txBody>
+      </p:sp>
+      <p:sp>
+        <p:nvSpPr>
+          <p:cNvPr id="20" name="流程图: 过程 19">
+            <a:extLst>
+              <a:ext uri="{FF2B5EF4-FFF2-40B4-BE49-F238E27FC236}">
+                <a16:creationId xmlns:a16="http://schemas.microsoft.com/office/drawing/2014/main" id="{3CB8176B-B050-4E39-FC8A-F3480CEF5C36}"/>
+              </a:ext>
+            </a:extLst>
+          </p:cNvPr>
+          <p:cNvSpPr/>
+          <p:nvPr/>
+        </p:nvSpPr>
+        <p:spPr>
+          <a:xfrm>
+            <a:off x="4211765" y="3478080"/>
+            <a:ext cx="3134811" cy="423885"/>
+          </a:xfrm>
+          <a:prstGeom prst="flowChartProcess">
+            <a:avLst/>
+          </a:prstGeom>
+          <a:solidFill>
+            <a:schemeClr val="accent1">
+              <a:lumMod val="60000"/>
+              <a:lumOff val="40000"/>
+            </a:schemeClr>
+          </a:solidFill>
+        </p:spPr>
+        <p:style>
+          <a:lnRef idx="2">
+            <a:schemeClr val="accent1">
+              <a:shade val="15000"/>
+            </a:schemeClr>
+          </a:lnRef>
+          <a:fillRef idx="1">
+            <a:schemeClr val="accent1"/>
+          </a:fillRef>
+          <a:effectRef idx="0">
+            <a:schemeClr val="accent1"/>
+          </a:effectRef>
+          <a:fontRef idx="minor">
+            <a:schemeClr val="lt1"/>
+          </a:fontRef>
+        </p:style>
+        <p:txBody>
+          <a:bodyPr rtlCol="0" anchor="ctr"/>
+          <a:lstStyle/>
+          <a:p>
+            <a:pPr algn="ctr"/>
+            <a:r>
+              <a:rPr lang="en-US" altLang="zh-CN" sz="1013" b="1" dirty="0" err="1">
+                <a:solidFill>
+                  <a:schemeClr val="tx1"/>
+                </a:solidFill>
+              </a:rPr>
+              <a:t>robot_state_publisher</a:t>
+            </a:r>
+            <a:endParaRPr lang="en-US" altLang="zh-CN" sz="1013" b="1" dirty="0">
+              <a:solidFill>
+                <a:schemeClr val="tx1"/>
+              </a:solidFill>
+            </a:endParaRPr>
+          </a:p>
+          <a:p>
+            <a:pPr algn="ctr"/>
+            <a:r>
+              <a:rPr lang="zh-CN" altLang="en-US" sz="1013" b="1" dirty="0">
+                <a:solidFill>
+                  <a:schemeClr val="tx1"/>
+                </a:solidFill>
+              </a:rPr>
+              <a:t>仅订阅可信 </a:t>
+            </a:r>
+            <a:r>
+              <a:rPr lang="en-US" altLang="zh-CN" sz="1013" b="1" dirty="0" err="1">
+                <a:solidFill>
+                  <a:schemeClr val="tx1"/>
+                </a:solidFill>
+              </a:rPr>
+              <a:t>JointState</a:t>
+            </a:r>
+            <a:r>
+              <a:rPr lang="en-US" altLang="zh-CN" sz="1013" b="1" dirty="0">
+                <a:solidFill>
+                  <a:schemeClr val="tx1"/>
+                </a:solidFill>
+              </a:rPr>
+              <a:t> </a:t>
+            </a:r>
+            <a:r>
+              <a:rPr lang="zh-CN" altLang="en-US" sz="1013" b="1" dirty="0">
+                <a:solidFill>
+                  <a:schemeClr val="tx1"/>
+                </a:solidFill>
+              </a:rPr>
+              <a:t>并更新 </a:t>
+            </a:r>
+            <a:r>
+              <a:rPr lang="en-US" altLang="zh-CN" sz="1013" b="1" dirty="0">
+                <a:solidFill>
+                  <a:schemeClr val="tx1"/>
+                </a:solidFill>
+              </a:rPr>
+              <a:t>TF</a:t>
+            </a:r>
+            <a:endParaRPr lang="zh-CN" altLang="en-US" sz="1013" b="1" dirty="0">
+              <a:solidFill>
+                <a:schemeClr val="tx1"/>
+              </a:solidFill>
+            </a:endParaRPr>
+          </a:p>
+        </p:txBody>
+      </p:sp>
+      <p:cxnSp>
+        <p:nvCxnSpPr>
+          <p:cNvPr id="22" name="直接箭头连接符 21">
+            <a:extLst>
+              <a:ext uri="{FF2B5EF4-FFF2-40B4-BE49-F238E27FC236}">
+                <a16:creationId xmlns:a16="http://schemas.microsoft.com/office/drawing/2014/main" id="{DB17EB2C-DCBE-9305-BC0A-69215362EB27}"/>
+              </a:ext>
+            </a:extLst>
+          </p:cNvPr>
+          <p:cNvCxnSpPr>
+            <a:cxnSpLocks/>
+            <a:stCxn id="20" idx="2"/>
+            <a:endCxn id="8" idx="0"/>
+          </p:cNvCxnSpPr>
+          <p:nvPr/>
+        </p:nvCxnSpPr>
+        <p:spPr>
+          <a:xfrm flipH="1">
+            <a:off x="5779166" y="3901965"/>
+            <a:ext cx="5" cy="375291"/>
+          </a:xfrm>
+          <a:prstGeom prst="straightConnector1">
+            <a:avLst/>
+          </a:prstGeom>
+          <a:ln w="38100">
+            <a:tailEnd type="triangle"/>
+          </a:ln>
+        </p:spPr>
+        <p:style>
+          <a:lnRef idx="1">
+            <a:schemeClr val="accent1"/>
+          </a:lnRef>
+          <a:fillRef idx="0">
+            <a:schemeClr val="accent1"/>
+          </a:fillRef>
+          <a:effectRef idx="0">
+            <a:schemeClr val="accent1"/>
+          </a:effectRef>
+          <a:fontRef idx="minor">
+            <a:schemeClr val="tx1"/>
+          </a:fontRef>
+        </p:style>
+      </p:cxnSp>
+      <p:sp>
+        <p:nvSpPr>
+          <p:cNvPr id="33" name="文本框 32">
+            <a:extLst>
+              <a:ext uri="{FF2B5EF4-FFF2-40B4-BE49-F238E27FC236}">
+                <a16:creationId xmlns:a16="http://schemas.microsoft.com/office/drawing/2014/main" id="{C8DA79F1-3986-B098-65A6-AE27870A2FEB}"/>
+              </a:ext>
+            </a:extLst>
+          </p:cNvPr>
+          <p:cNvSpPr txBox="1"/>
+          <p:nvPr/>
+        </p:nvSpPr>
+        <p:spPr>
+          <a:xfrm>
+            <a:off x="5824695" y="3965505"/>
+            <a:ext cx="567784" cy="248209"/>
+          </a:xfrm>
+          <a:prstGeom prst="rect">
+            <a:avLst/>
+          </a:prstGeom>
+          <a:noFill/>
+        </p:spPr>
+        <p:txBody>
+          <a:bodyPr wrap="none" rtlCol="0">
+            <a:spAutoFit/>
+          </a:bodyPr>
+          <a:lstStyle/>
+          <a:p>
+            <a:r>
+              <a:rPr lang="zh-CN" altLang="en-US" sz="1013" b="1" dirty="0"/>
+              <a:t>更新</a:t>
+            </a:r>
+            <a:r>
+              <a:rPr lang="en-US" altLang="zh-CN" sz="1013" b="1" dirty="0"/>
+              <a:t>TF</a:t>
+            </a:r>
+          </a:p>
+        </p:txBody>
+      </p:sp>
+      <p:sp>
+        <p:nvSpPr>
+          <p:cNvPr id="34" name="箭头: 左 33">
+            <a:extLst>
+              <a:ext uri="{FF2B5EF4-FFF2-40B4-BE49-F238E27FC236}">
+                <a16:creationId xmlns:a16="http://schemas.microsoft.com/office/drawing/2014/main" id="{89B79860-6A94-DAF1-05FF-C16D9E38C24A}"/>
+              </a:ext>
+            </a:extLst>
+          </p:cNvPr>
+          <p:cNvSpPr/>
+          <p:nvPr/>
+        </p:nvSpPr>
+        <p:spPr>
+          <a:xfrm>
+            <a:off x="7346578" y="2713643"/>
+            <a:ext cx="1460838" cy="646591"/>
+          </a:xfrm>
+          <a:prstGeom prst="leftArrow">
+            <a:avLst/>
+          </a:prstGeom>
+          <a:solidFill>
+            <a:schemeClr val="bg1"/>
+          </a:solidFill>
+        </p:spPr>
+        <p:style>
+          <a:lnRef idx="2">
+            <a:schemeClr val="accent1">
+              <a:shade val="15000"/>
+            </a:schemeClr>
+          </a:lnRef>
+          <a:fillRef idx="1">
+            <a:schemeClr val="accent1"/>
+          </a:fillRef>
+          <a:effectRef idx="0">
+            <a:schemeClr val="accent1"/>
+          </a:effectRef>
+          <a:fontRef idx="minor">
+            <a:schemeClr val="lt1"/>
+          </a:fontRef>
+        </p:style>
+        <p:txBody>
+          <a:bodyPr rtlCol="0" anchor="ctr"/>
+          <a:lstStyle/>
+          <a:p>
+            <a:pPr algn="ctr"/>
+            <a:r>
+              <a:rPr lang="zh-CN" altLang="en-US" sz="1013" b="1" dirty="0">
+                <a:solidFill>
+                  <a:schemeClr val="accent6">
+                    <a:lumMod val="75000"/>
+                  </a:schemeClr>
+                </a:solidFill>
+              </a:rPr>
+              <a:t>可信输出</a:t>
+            </a:r>
+            <a:endParaRPr lang="en-US" altLang="zh-CN" sz="1013" b="1" dirty="0">
+              <a:solidFill>
+                <a:schemeClr val="accent6">
+                  <a:lumMod val="75000"/>
+                </a:schemeClr>
+              </a:solidFill>
+            </a:endParaRPr>
+          </a:p>
+          <a:p>
+            <a:pPr algn="ctr"/>
+            <a:r>
+              <a:rPr lang="zh-CN" altLang="en-US" sz="1013" b="1" dirty="0">
+                <a:solidFill>
+                  <a:schemeClr val="accent6">
+                    <a:lumMod val="75000"/>
+                  </a:schemeClr>
+                </a:solidFill>
+              </a:rPr>
+              <a:t>通过校验后转发</a:t>
+            </a:r>
+          </a:p>
+        </p:txBody>
+      </p:sp>
+      <p:sp>
+        <p:nvSpPr>
+          <p:cNvPr id="35" name="标注: 左箭头 34">
+            <a:extLst>
+              <a:ext uri="{FF2B5EF4-FFF2-40B4-BE49-F238E27FC236}">
+                <a16:creationId xmlns:a16="http://schemas.microsoft.com/office/drawing/2014/main" id="{5F3C464D-8BBF-233B-9CA6-74AC17992C5D}"/>
+              </a:ext>
+            </a:extLst>
+          </p:cNvPr>
+          <p:cNvSpPr/>
+          <p:nvPr/>
+        </p:nvSpPr>
+        <p:spPr>
+          <a:xfrm>
+            <a:off x="7346566" y="1613254"/>
+            <a:ext cx="1567369" cy="949123"/>
+          </a:xfrm>
+          <a:prstGeom prst="leftArrowCallout">
+            <a:avLst>
+              <a:gd name="adj1" fmla="val 25000"/>
+              <a:gd name="adj2" fmla="val 25000"/>
+              <a:gd name="adj3" fmla="val 25000"/>
+              <a:gd name="adj4" fmla="val 74268"/>
+            </a:avLst>
+          </a:prstGeom>
+          <a:solidFill>
+            <a:schemeClr val="bg1"/>
+          </a:solidFill>
+        </p:spPr>
+        <p:style>
+          <a:lnRef idx="2">
+            <a:schemeClr val="accent1">
+              <a:shade val="15000"/>
+            </a:schemeClr>
+          </a:lnRef>
+          <a:fillRef idx="1">
+            <a:schemeClr val="accent1"/>
+          </a:fillRef>
+          <a:effectRef idx="0">
+            <a:schemeClr val="accent1"/>
+          </a:effectRef>
+          <a:fontRef idx="minor">
+            <a:schemeClr val="lt1"/>
+          </a:fontRef>
+        </p:style>
+        <p:txBody>
+          <a:bodyPr rtlCol="0" anchor="ctr"/>
+          <a:lstStyle/>
+          <a:p>
+            <a:pPr algn="ctr"/>
+            <a:r>
+              <a:rPr lang="zh-CN" altLang="en-US" sz="1100" b="1" dirty="0">
+                <a:solidFill>
+                  <a:schemeClr val="accent6">
+                    <a:lumMod val="75000"/>
+                  </a:schemeClr>
+                </a:solidFill>
+              </a:rPr>
+              <a:t>核心检查：</a:t>
+            </a:r>
+          </a:p>
+          <a:p>
+            <a:pPr algn="ctr"/>
+            <a:r>
+              <a:rPr lang="en-US" altLang="zh-CN" sz="1100" b="1" dirty="0">
+                <a:solidFill>
+                  <a:schemeClr val="accent6">
+                    <a:lumMod val="75000"/>
+                  </a:schemeClr>
+                </a:solidFill>
+              </a:rPr>
+              <a:t>- </a:t>
+            </a:r>
+            <a:r>
+              <a:rPr lang="zh-CN" altLang="en-US" sz="1100" b="1" dirty="0">
+                <a:solidFill>
+                  <a:schemeClr val="accent6">
+                    <a:lumMod val="75000"/>
+                  </a:schemeClr>
+                </a:solidFill>
+              </a:rPr>
+              <a:t>单一 </a:t>
+            </a:r>
+            <a:r>
+              <a:rPr lang="en-US" altLang="zh-CN" sz="1100" b="1" dirty="0">
+                <a:solidFill>
+                  <a:schemeClr val="accent6">
+                    <a:lumMod val="75000"/>
+                  </a:schemeClr>
+                </a:solidFill>
+              </a:rPr>
+              <a:t>publisher</a:t>
+            </a:r>
+          </a:p>
+          <a:p>
+            <a:pPr algn="ctr"/>
+            <a:r>
+              <a:rPr lang="en-US" altLang="zh-CN" sz="1100" b="1" dirty="0">
+                <a:solidFill>
+                  <a:schemeClr val="accent6">
+                    <a:lumMod val="75000"/>
+                  </a:schemeClr>
+                </a:solidFill>
+              </a:rPr>
+              <a:t>- </a:t>
+            </a:r>
+            <a:r>
+              <a:rPr lang="zh-CN" altLang="en-US" sz="1100" b="1" dirty="0">
+                <a:solidFill>
+                  <a:schemeClr val="accent6">
+                    <a:lumMod val="75000"/>
+                  </a:schemeClr>
+                </a:solidFill>
+              </a:rPr>
+              <a:t>时间戳有效</a:t>
+            </a:r>
+          </a:p>
+          <a:p>
+            <a:pPr algn="ctr"/>
+            <a:r>
+              <a:rPr lang="en-US" altLang="zh-CN" sz="1100" b="1" dirty="0">
+                <a:solidFill>
+                  <a:schemeClr val="accent6">
+                    <a:lumMod val="75000"/>
+                  </a:schemeClr>
+                </a:solidFill>
+              </a:rPr>
+              <a:t>- </a:t>
+            </a:r>
+            <a:r>
+              <a:rPr lang="zh-CN" altLang="en-US" sz="1100" b="1" dirty="0">
+                <a:solidFill>
+                  <a:schemeClr val="accent6">
+                    <a:lumMod val="75000"/>
+                  </a:schemeClr>
+                </a:solidFill>
+              </a:rPr>
+              <a:t>关节名称匹配</a:t>
+            </a:r>
+          </a:p>
+          <a:p>
+            <a:pPr algn="ctr"/>
+            <a:r>
+              <a:rPr lang="en-US" altLang="zh-CN" sz="1100" b="1" dirty="0">
+                <a:solidFill>
+                  <a:schemeClr val="accent6">
+                    <a:lumMod val="75000"/>
+                  </a:schemeClr>
+                </a:solidFill>
+              </a:rPr>
+              <a:t>- </a:t>
+            </a:r>
+            <a:r>
+              <a:rPr lang="zh-CN" altLang="en-US" sz="1100" b="1" dirty="0">
+                <a:solidFill>
+                  <a:schemeClr val="accent6">
+                    <a:lumMod val="75000"/>
+                  </a:schemeClr>
+                </a:solidFill>
+              </a:rPr>
+              <a:t>关节范围合法</a:t>
+            </a:r>
+          </a:p>
+        </p:txBody>
+      </p:sp>
+      <p:sp>
+        <p:nvSpPr>
+          <p:cNvPr id="36" name="流程图: 过程 35">
+            <a:extLst>
+              <a:ext uri="{FF2B5EF4-FFF2-40B4-BE49-F238E27FC236}">
+                <a16:creationId xmlns:a16="http://schemas.microsoft.com/office/drawing/2014/main" id="{05D3B9B4-841E-BDCB-B25D-F9BF41B66977}"/>
+              </a:ext>
+            </a:extLst>
+          </p:cNvPr>
+          <p:cNvSpPr/>
+          <p:nvPr/>
+        </p:nvSpPr>
+        <p:spPr>
+          <a:xfrm>
+            <a:off x="788340" y="3478079"/>
+            <a:ext cx="3134811" cy="423885"/>
+          </a:xfrm>
+          <a:prstGeom prst="flowChartProcess">
+            <a:avLst/>
+          </a:prstGeom>
+          <a:solidFill>
+            <a:schemeClr val="accent1">
+              <a:lumMod val="60000"/>
+              <a:lumOff val="40000"/>
+            </a:schemeClr>
+          </a:solidFill>
+        </p:spPr>
+        <p:style>
+          <a:lnRef idx="2">
+            <a:schemeClr val="accent1">
+              <a:shade val="15000"/>
+            </a:schemeClr>
+          </a:lnRef>
+          <a:fillRef idx="1">
+            <a:schemeClr val="accent1"/>
+          </a:fillRef>
+          <a:effectRef idx="0">
+            <a:schemeClr val="accent1"/>
+          </a:effectRef>
+          <a:fontRef idx="minor">
+            <a:schemeClr val="lt1"/>
+          </a:fontRef>
+        </p:style>
+        <p:txBody>
+          <a:bodyPr rtlCol="0" anchor="ctr"/>
+          <a:lstStyle/>
+          <a:p>
+            <a:pPr algn="ctr"/>
+            <a:r>
+              <a:rPr lang="en-US" altLang="zh-CN" sz="1013" b="1" dirty="0" err="1">
+                <a:solidFill>
+                  <a:schemeClr val="tx1"/>
+                </a:solidFill>
+              </a:rPr>
+              <a:t>sync_plan_arduino</a:t>
+            </a:r>
+            <a:endParaRPr lang="en-US" altLang="zh-CN" sz="1013" b="1" dirty="0">
+              <a:solidFill>
+                <a:schemeClr val="tx1"/>
+              </a:solidFill>
+            </a:endParaRPr>
+          </a:p>
+          <a:p>
+            <a:pPr algn="ctr"/>
+            <a:r>
+              <a:rPr lang="zh-CN" altLang="en-US" sz="1013" b="1" dirty="0">
+                <a:solidFill>
+                  <a:schemeClr val="tx1"/>
+                </a:solidFill>
+              </a:rPr>
+              <a:t>仅订阅可信 </a:t>
+            </a:r>
+            <a:r>
+              <a:rPr lang="en-US" altLang="zh-CN" sz="1013" b="1" dirty="0" err="1">
+                <a:solidFill>
+                  <a:schemeClr val="tx1"/>
+                </a:solidFill>
+              </a:rPr>
+              <a:t>JointState</a:t>
+            </a:r>
+            <a:endParaRPr lang="zh-CN" altLang="en-US" sz="1013" b="1" dirty="0">
+              <a:solidFill>
+                <a:schemeClr val="tx1"/>
+              </a:solidFill>
+            </a:endParaRPr>
+          </a:p>
+        </p:txBody>
+      </p:sp>
+      <p:cxnSp>
+        <p:nvCxnSpPr>
+          <p:cNvPr id="38" name="连接符: 肘形 37">
+            <a:extLst>
+              <a:ext uri="{FF2B5EF4-FFF2-40B4-BE49-F238E27FC236}">
+                <a16:creationId xmlns:a16="http://schemas.microsoft.com/office/drawing/2014/main" id="{FD1674F6-5420-4F23-E911-F9CD6415A211}"/>
+              </a:ext>
+            </a:extLst>
+          </p:cNvPr>
+          <p:cNvCxnSpPr>
+            <a:cxnSpLocks/>
+            <a:stCxn id="7" idx="1"/>
+            <a:endCxn id="36" idx="0"/>
+          </p:cNvCxnSpPr>
+          <p:nvPr/>
+        </p:nvCxnSpPr>
+        <p:spPr>
+          <a:xfrm rot="10800000" flipV="1">
+            <a:off x="2355746" y="2951531"/>
+            <a:ext cx="1856030" cy="526547"/>
+          </a:xfrm>
+          <a:prstGeom prst="bentConnector2">
+            <a:avLst/>
+          </a:prstGeom>
+          <a:ln w="38100">
+            <a:tailEnd type="triangle"/>
+          </a:ln>
+        </p:spPr>
+        <p:style>
+          <a:lnRef idx="1">
+            <a:schemeClr val="accent1"/>
+          </a:lnRef>
+          <a:fillRef idx="0">
+            <a:schemeClr val="accent1"/>
+          </a:fillRef>
+          <a:effectRef idx="0">
+            <a:schemeClr val="accent1"/>
+          </a:effectRef>
+          <a:fontRef idx="minor">
+            <a:schemeClr val="tx1"/>
+          </a:fontRef>
+        </p:style>
+      </p:cxnSp>
     </p:spTree>
     <p:extLst>
       <p:ext uri="{BB962C8B-B14F-4D97-AF65-F5344CB8AC3E}">
-        <p14:creationId xmlns:p14="http://schemas.microsoft.com/office/powerpoint/2010/main" val="441005315"/>
+        <p14:creationId xmlns:p14="http://schemas.microsoft.com/office/powerpoint/2010/main" val="2253332495"/>
       </p:ext>
     </p:extLst>
   </p:cSld>
@@ -10179,7 +15103,7 @@
         <p:cNvPr id="1" name="">
           <a:extLst>
             <a:ext uri="{FF2B5EF4-FFF2-40B4-BE49-F238E27FC236}">
-              <a16:creationId xmlns:a16="http://schemas.microsoft.com/office/drawing/2014/main" id="{6CB55446-B51C-E3B6-97C8-2A8FE04D7919}"/>
+              <a16:creationId xmlns:a16="http://schemas.microsoft.com/office/drawing/2014/main" id="{3901F4E1-5C71-F590-01B5-9C31C4FFFC69}"/>
             </a:ext>
           </a:extLst>
         </p:cNvPr>
@@ -10194,10 +15118,643 @@
           <a:chExt cx="0" cy="0"/>
         </a:xfrm>
       </p:grpSpPr>
+      <p:sp>
+        <p:nvSpPr>
+          <p:cNvPr id="4" name="流程图: 过程 3">
+            <a:extLst>
+              <a:ext uri="{FF2B5EF4-FFF2-40B4-BE49-F238E27FC236}">
+                <a16:creationId xmlns:a16="http://schemas.microsoft.com/office/drawing/2014/main" id="{CDCF61AE-00D2-5269-673A-744701A61288}"/>
+              </a:ext>
+            </a:extLst>
+          </p:cNvPr>
+          <p:cNvSpPr/>
+          <p:nvPr/>
+        </p:nvSpPr>
+        <p:spPr>
+          <a:xfrm>
+            <a:off x="247851" y="417958"/>
+            <a:ext cx="3075212" cy="1039135"/>
+          </a:xfrm>
+          <a:prstGeom prst="flowChartProcess">
+            <a:avLst/>
+          </a:prstGeom>
+          <a:solidFill>
+            <a:schemeClr val="accent1">
+              <a:lumMod val="60000"/>
+              <a:lumOff val="40000"/>
+            </a:schemeClr>
+          </a:solidFill>
+        </p:spPr>
+        <p:style>
+          <a:lnRef idx="2">
+            <a:schemeClr val="accent1">
+              <a:shade val="15000"/>
+            </a:schemeClr>
+          </a:lnRef>
+          <a:fillRef idx="1">
+            <a:schemeClr val="accent1"/>
+          </a:fillRef>
+          <a:effectRef idx="0">
+            <a:schemeClr val="accent1"/>
+          </a:effectRef>
+          <a:fontRef idx="minor">
+            <a:schemeClr val="lt1"/>
+          </a:fontRef>
+        </p:style>
+        <p:txBody>
+          <a:bodyPr rtlCol="0" anchor="ctr"/>
+          <a:lstStyle/>
+          <a:p>
+            <a:pPr algn="ctr"/>
+            <a:r>
+              <a:rPr lang="zh-CN" altLang="en-US" sz="1400" b="1" dirty="0">
+                <a:solidFill>
+                  <a:schemeClr val="tx1"/>
+                </a:solidFill>
+              </a:rPr>
+              <a:t>实机闭环验证</a:t>
+            </a:r>
+          </a:p>
+          <a:p>
+            <a:pPr algn="ctr"/>
+            <a:r>
+              <a:rPr lang="zh-CN" altLang="en-US" sz="1400" dirty="0">
+                <a:solidFill>
+                  <a:schemeClr val="tx1"/>
+                </a:solidFill>
+              </a:rPr>
+              <a:t>从状态链扩展到真实执行层验证</a:t>
+            </a:r>
+          </a:p>
+        </p:txBody>
+      </p:sp>
+      <p:sp>
+        <p:nvSpPr>
+          <p:cNvPr id="71" name="文本框 70">
+            <a:extLst>
+              <a:ext uri="{FF2B5EF4-FFF2-40B4-BE49-F238E27FC236}">
+                <a16:creationId xmlns:a16="http://schemas.microsoft.com/office/drawing/2014/main" id="{CCA8F415-8E57-74CB-A285-C35DFB31C603}"/>
+              </a:ext>
+            </a:extLst>
+          </p:cNvPr>
+          <p:cNvSpPr txBox="1"/>
+          <p:nvPr/>
+        </p:nvSpPr>
+        <p:spPr>
+          <a:xfrm>
+            <a:off x="89209" y="0"/>
+            <a:ext cx="2927025" cy="307777"/>
+          </a:xfrm>
+          <a:prstGeom prst="rect">
+            <a:avLst/>
+          </a:prstGeom>
+          <a:noFill/>
+        </p:spPr>
+        <p:txBody>
+          <a:bodyPr wrap="square" rtlCol="0">
+            <a:spAutoFit/>
+          </a:bodyPr>
+          <a:lstStyle/>
+          <a:p>
+            <a:r>
+              <a:rPr lang="zh-CN" altLang="en-US" sz="1400" b="1" dirty="0">
+                <a:solidFill>
+                  <a:schemeClr val="bg2">
+                    <a:lumMod val="75000"/>
+                  </a:schemeClr>
+                </a:solidFill>
+              </a:rPr>
+              <a:t>短期可做</a:t>
+            </a:r>
+            <a:endParaRPr lang="en-US" altLang="zh-CN" sz="1400" b="1" dirty="0">
+              <a:solidFill>
+                <a:schemeClr val="bg2">
+                  <a:lumMod val="75000"/>
+                </a:schemeClr>
+              </a:solidFill>
+            </a:endParaRPr>
+          </a:p>
+        </p:txBody>
+      </p:sp>
+      <p:sp>
+        <p:nvSpPr>
+          <p:cNvPr id="72" name="文本框 71">
+            <a:extLst>
+              <a:ext uri="{FF2B5EF4-FFF2-40B4-BE49-F238E27FC236}">
+                <a16:creationId xmlns:a16="http://schemas.microsoft.com/office/drawing/2014/main" id="{74328816-97CD-2EB6-C711-FA6F19AD6FA3}"/>
+              </a:ext>
+            </a:extLst>
+          </p:cNvPr>
+          <p:cNvSpPr txBox="1"/>
+          <p:nvPr/>
+        </p:nvSpPr>
+        <p:spPr>
+          <a:xfrm>
+            <a:off x="89209" y="1775703"/>
+            <a:ext cx="2927025" cy="307777"/>
+          </a:xfrm>
+          <a:prstGeom prst="rect">
+            <a:avLst/>
+          </a:prstGeom>
+          <a:noFill/>
+        </p:spPr>
+        <p:txBody>
+          <a:bodyPr wrap="square" rtlCol="0">
+            <a:spAutoFit/>
+          </a:bodyPr>
+          <a:lstStyle/>
+          <a:p>
+            <a:r>
+              <a:rPr lang="zh-CN" altLang="en-US" sz="1400" b="1" dirty="0">
+                <a:solidFill>
+                  <a:schemeClr val="bg2">
+                    <a:lumMod val="75000"/>
+                  </a:schemeClr>
+                </a:solidFill>
+              </a:rPr>
+              <a:t>中期扩展</a:t>
+            </a:r>
+            <a:endParaRPr lang="en-US" altLang="zh-CN" sz="1400" b="1" dirty="0">
+              <a:solidFill>
+                <a:schemeClr val="bg2">
+                  <a:lumMod val="75000"/>
+                </a:schemeClr>
+              </a:solidFill>
+            </a:endParaRPr>
+          </a:p>
+        </p:txBody>
+      </p:sp>
+      <p:sp>
+        <p:nvSpPr>
+          <p:cNvPr id="2" name="文本框 1">
+            <a:extLst>
+              <a:ext uri="{FF2B5EF4-FFF2-40B4-BE49-F238E27FC236}">
+                <a16:creationId xmlns:a16="http://schemas.microsoft.com/office/drawing/2014/main" id="{19029A1A-998C-4CFE-53B0-AF80C2ABB7B5}"/>
+              </a:ext>
+            </a:extLst>
+          </p:cNvPr>
+          <p:cNvSpPr txBox="1"/>
+          <p:nvPr/>
+        </p:nvSpPr>
+        <p:spPr>
+          <a:xfrm>
+            <a:off x="89209" y="3481209"/>
+            <a:ext cx="2927025" cy="307777"/>
+          </a:xfrm>
+          <a:prstGeom prst="rect">
+            <a:avLst/>
+          </a:prstGeom>
+          <a:noFill/>
+        </p:spPr>
+        <p:txBody>
+          <a:bodyPr wrap="square" rtlCol="0">
+            <a:spAutoFit/>
+          </a:bodyPr>
+          <a:lstStyle/>
+          <a:p>
+            <a:r>
+              <a:rPr lang="zh-CN" altLang="en-US" sz="1400" b="1" dirty="0">
+                <a:solidFill>
+                  <a:schemeClr val="bg2">
+                    <a:lumMod val="75000"/>
+                  </a:schemeClr>
+                </a:solidFill>
+              </a:rPr>
+              <a:t>长期目标</a:t>
+            </a:r>
+            <a:endParaRPr lang="en-US" altLang="zh-CN" sz="1400" b="1" dirty="0">
+              <a:solidFill>
+                <a:schemeClr val="bg2">
+                  <a:lumMod val="75000"/>
+                </a:schemeClr>
+              </a:solidFill>
+            </a:endParaRPr>
+          </a:p>
+        </p:txBody>
+      </p:sp>
+      <p:sp>
+        <p:nvSpPr>
+          <p:cNvPr id="12" name="流程图: 过程 11">
+            <a:extLst>
+              <a:ext uri="{FF2B5EF4-FFF2-40B4-BE49-F238E27FC236}">
+                <a16:creationId xmlns:a16="http://schemas.microsoft.com/office/drawing/2014/main" id="{6D4603D5-79B8-F090-94DB-FC87D1F683F7}"/>
+              </a:ext>
+            </a:extLst>
+          </p:cNvPr>
+          <p:cNvSpPr/>
+          <p:nvPr/>
+        </p:nvSpPr>
+        <p:spPr>
+          <a:xfrm>
+            <a:off x="4901627" y="417958"/>
+            <a:ext cx="3409749" cy="1039135"/>
+          </a:xfrm>
+          <a:prstGeom prst="flowChartProcess">
+            <a:avLst/>
+          </a:prstGeom>
+          <a:solidFill>
+            <a:schemeClr val="accent1">
+              <a:lumMod val="60000"/>
+              <a:lumOff val="40000"/>
+            </a:schemeClr>
+          </a:solidFill>
+        </p:spPr>
+        <p:style>
+          <a:lnRef idx="2">
+            <a:schemeClr val="accent1">
+              <a:shade val="15000"/>
+            </a:schemeClr>
+          </a:lnRef>
+          <a:fillRef idx="1">
+            <a:schemeClr val="accent1"/>
+          </a:fillRef>
+          <a:effectRef idx="0">
+            <a:schemeClr val="accent1"/>
+          </a:effectRef>
+          <a:fontRef idx="minor">
+            <a:schemeClr val="lt1"/>
+          </a:fontRef>
+        </p:style>
+        <p:txBody>
+          <a:bodyPr rtlCol="0" anchor="ctr"/>
+          <a:lstStyle/>
+          <a:p>
+            <a:pPr algn="ctr"/>
+            <a:r>
+              <a:rPr lang="en-US" altLang="zh-CN" sz="1400" b="1" dirty="0">
+                <a:solidFill>
+                  <a:schemeClr val="tx1"/>
+                </a:solidFill>
+              </a:rPr>
+              <a:t>MoveIt2 / </a:t>
+            </a:r>
+            <a:r>
+              <a:rPr lang="zh-CN" altLang="en-US" sz="1400" b="1" dirty="0">
+                <a:solidFill>
+                  <a:schemeClr val="tx1"/>
+                </a:solidFill>
+              </a:rPr>
+              <a:t>轨迹控制链</a:t>
+            </a:r>
+          </a:p>
+          <a:p>
+            <a:pPr algn="ctr"/>
+            <a:r>
+              <a:rPr lang="zh-CN" altLang="en-US" sz="1400" dirty="0">
+                <a:solidFill>
+                  <a:schemeClr val="tx1"/>
+                </a:solidFill>
+              </a:rPr>
+              <a:t>从状态链扩展到轨迹链、规划链与控制链</a:t>
+            </a:r>
+          </a:p>
+        </p:txBody>
+      </p:sp>
+      <p:sp>
+        <p:nvSpPr>
+          <p:cNvPr id="13" name="流程图: 过程 12">
+            <a:extLst>
+              <a:ext uri="{FF2B5EF4-FFF2-40B4-BE49-F238E27FC236}">
+                <a16:creationId xmlns:a16="http://schemas.microsoft.com/office/drawing/2014/main" id="{A291ECED-730A-21FE-019B-871D9C4E4229}"/>
+              </a:ext>
+            </a:extLst>
+          </p:cNvPr>
+          <p:cNvSpPr/>
+          <p:nvPr/>
+        </p:nvSpPr>
+        <p:spPr>
+          <a:xfrm>
+            <a:off x="247850" y="2183304"/>
+            <a:ext cx="3528696" cy="1053746"/>
+          </a:xfrm>
+          <a:prstGeom prst="flowChartProcess">
+            <a:avLst/>
+          </a:prstGeom>
+          <a:solidFill>
+            <a:schemeClr val="accent2">
+              <a:lumMod val="40000"/>
+              <a:lumOff val="60000"/>
+            </a:schemeClr>
+          </a:solidFill>
+        </p:spPr>
+        <p:style>
+          <a:lnRef idx="2">
+            <a:schemeClr val="accent1">
+              <a:shade val="15000"/>
+            </a:schemeClr>
+          </a:lnRef>
+          <a:fillRef idx="1">
+            <a:schemeClr val="accent1"/>
+          </a:fillRef>
+          <a:effectRef idx="0">
+            <a:schemeClr val="accent1"/>
+          </a:effectRef>
+          <a:fontRef idx="minor">
+            <a:schemeClr val="lt1"/>
+          </a:fontRef>
+        </p:style>
+        <p:txBody>
+          <a:bodyPr rtlCol="0" anchor="ctr"/>
+          <a:lstStyle/>
+          <a:p>
+            <a:pPr algn="ctr"/>
+            <a:r>
+              <a:rPr lang="en-US" altLang="zh-CN" sz="1400" b="1" dirty="0">
+                <a:solidFill>
+                  <a:schemeClr val="tx1"/>
+                </a:solidFill>
+              </a:rPr>
+              <a:t>SROS2 / DDS Security</a:t>
+            </a:r>
+          </a:p>
+          <a:p>
+            <a:pPr algn="ctr"/>
+            <a:r>
+              <a:rPr lang="zh-CN" altLang="en-US" sz="1400" dirty="0">
+                <a:solidFill>
+                  <a:schemeClr val="tx1"/>
+                </a:solidFill>
+              </a:rPr>
+              <a:t>从应用层原型升级到正式中间件安全机制</a:t>
+            </a:r>
+          </a:p>
+        </p:txBody>
+      </p:sp>
+      <p:sp>
+        <p:nvSpPr>
+          <p:cNvPr id="14" name="流程图: 过程 13">
+            <a:extLst>
+              <a:ext uri="{FF2B5EF4-FFF2-40B4-BE49-F238E27FC236}">
+                <a16:creationId xmlns:a16="http://schemas.microsoft.com/office/drawing/2014/main" id="{0C50283F-499C-8D8C-CB59-FE21A0BD833A}"/>
+              </a:ext>
+            </a:extLst>
+          </p:cNvPr>
+          <p:cNvSpPr/>
+          <p:nvPr/>
+        </p:nvSpPr>
+        <p:spPr>
+          <a:xfrm>
+            <a:off x="4901627" y="2183304"/>
+            <a:ext cx="3194159" cy="1053746"/>
+          </a:xfrm>
+          <a:prstGeom prst="flowChartProcess">
+            <a:avLst/>
+          </a:prstGeom>
+          <a:solidFill>
+            <a:schemeClr val="accent2">
+              <a:lumMod val="40000"/>
+              <a:lumOff val="60000"/>
+            </a:schemeClr>
+          </a:solidFill>
+        </p:spPr>
+        <p:style>
+          <a:lnRef idx="2">
+            <a:schemeClr val="accent1">
+              <a:shade val="15000"/>
+            </a:schemeClr>
+          </a:lnRef>
+          <a:fillRef idx="1">
+            <a:schemeClr val="accent1"/>
+          </a:fillRef>
+          <a:effectRef idx="0">
+            <a:schemeClr val="accent1"/>
+          </a:effectRef>
+          <a:fontRef idx="minor">
+            <a:schemeClr val="lt1"/>
+          </a:fontRef>
+        </p:style>
+        <p:txBody>
+          <a:bodyPr rtlCol="0" anchor="ctr"/>
+          <a:lstStyle/>
+          <a:p>
+            <a:pPr algn="ctr"/>
+            <a:r>
+              <a:rPr lang="zh-CN" altLang="en-US" sz="1400" b="1" dirty="0">
+                <a:solidFill>
+                  <a:schemeClr val="tx1"/>
+                </a:solidFill>
+              </a:rPr>
+              <a:t>多机器人与更多 </a:t>
+            </a:r>
+            <a:r>
+              <a:rPr lang="en-US" altLang="zh-CN" sz="1400" b="1" dirty="0">
+                <a:solidFill>
+                  <a:schemeClr val="tx1"/>
+                </a:solidFill>
+              </a:rPr>
+              <a:t>ROS2 </a:t>
+            </a:r>
+            <a:r>
+              <a:rPr lang="zh-CN" altLang="en-US" sz="1400" b="1" dirty="0">
+                <a:solidFill>
+                  <a:schemeClr val="tx1"/>
+                </a:solidFill>
+              </a:rPr>
+              <a:t>接口</a:t>
+            </a:r>
+          </a:p>
+          <a:p>
+            <a:pPr algn="ctr"/>
+            <a:r>
+              <a:rPr lang="zh-CN" altLang="en-US" sz="1400" dirty="0">
+                <a:solidFill>
+                  <a:schemeClr val="tx1"/>
+                </a:solidFill>
+              </a:rPr>
+              <a:t>扩展到协同场景与更多关键接口</a:t>
+            </a:r>
+          </a:p>
+        </p:txBody>
+      </p:sp>
+      <p:sp>
+        <p:nvSpPr>
+          <p:cNvPr id="16" name="流程图: 过程 15">
+            <a:extLst>
+              <a:ext uri="{FF2B5EF4-FFF2-40B4-BE49-F238E27FC236}">
+                <a16:creationId xmlns:a16="http://schemas.microsoft.com/office/drawing/2014/main" id="{10B424E2-A2A5-C9F0-9ECC-2DB9342EA348}"/>
+              </a:ext>
+            </a:extLst>
+          </p:cNvPr>
+          <p:cNvSpPr/>
+          <p:nvPr/>
+        </p:nvSpPr>
+        <p:spPr>
+          <a:xfrm>
+            <a:off x="247850" y="3907569"/>
+            <a:ext cx="7929710" cy="871546"/>
+          </a:xfrm>
+          <a:prstGeom prst="flowChartProcess">
+            <a:avLst/>
+          </a:prstGeom>
+          <a:solidFill>
+            <a:schemeClr val="accent6">
+              <a:lumMod val="60000"/>
+              <a:lumOff val="40000"/>
+            </a:schemeClr>
+          </a:solidFill>
+        </p:spPr>
+        <p:style>
+          <a:lnRef idx="2">
+            <a:schemeClr val="accent1">
+              <a:shade val="15000"/>
+            </a:schemeClr>
+          </a:lnRef>
+          <a:fillRef idx="1">
+            <a:schemeClr val="accent1"/>
+          </a:fillRef>
+          <a:effectRef idx="0">
+            <a:schemeClr val="accent1"/>
+          </a:effectRef>
+          <a:fontRef idx="minor">
+            <a:schemeClr val="lt1"/>
+          </a:fontRef>
+        </p:style>
+        <p:txBody>
+          <a:bodyPr rtlCol="0" anchor="ctr"/>
+          <a:lstStyle/>
+          <a:p>
+            <a:pPr algn="ctr"/>
+            <a:r>
+              <a:rPr lang="zh-CN" altLang="en-US" sz="1400" b="1" dirty="0">
+                <a:solidFill>
+                  <a:schemeClr val="tx1"/>
+                </a:solidFill>
+              </a:rPr>
+              <a:t>更高程度自动化评估</a:t>
+            </a:r>
+          </a:p>
+          <a:p>
+            <a:pPr algn="ctr"/>
+            <a:r>
+              <a:rPr lang="zh-CN" altLang="en-US" sz="1400" dirty="0">
+                <a:solidFill>
+                  <a:schemeClr val="tx1"/>
+                </a:solidFill>
+              </a:rPr>
+              <a:t>将实验复现、规则推理、策略判定、防护验证进一步联动</a:t>
+            </a:r>
+          </a:p>
+          <a:p>
+            <a:pPr algn="ctr"/>
+            <a:r>
+              <a:rPr lang="zh-CN" altLang="en-US" sz="1400" dirty="0">
+                <a:solidFill>
+                  <a:schemeClr val="tx1"/>
+                </a:solidFill>
+              </a:rPr>
+              <a:t>核心关注：形成更系统的自动化机器人攻击面分析与安全评估流程</a:t>
+            </a:r>
+          </a:p>
+        </p:txBody>
+      </p:sp>
+      <p:sp>
+        <p:nvSpPr>
+          <p:cNvPr id="17" name="箭头: 下 16">
+            <a:extLst>
+              <a:ext uri="{FF2B5EF4-FFF2-40B4-BE49-F238E27FC236}">
+                <a16:creationId xmlns:a16="http://schemas.microsoft.com/office/drawing/2014/main" id="{A2A06FD4-01A5-DFB2-A3A6-E07D30B4ED62}"/>
+              </a:ext>
+            </a:extLst>
+          </p:cNvPr>
+          <p:cNvSpPr/>
+          <p:nvPr/>
+        </p:nvSpPr>
+        <p:spPr>
+          <a:xfrm>
+            <a:off x="4021941" y="1561171"/>
+            <a:ext cx="317145" cy="622133"/>
+          </a:xfrm>
+          <a:prstGeom prst="downArrow">
+            <a:avLst/>
+          </a:prstGeom>
+          <a:solidFill>
+            <a:schemeClr val="accent5">
+              <a:lumMod val="60000"/>
+              <a:lumOff val="40000"/>
+            </a:schemeClr>
+          </a:solidFill>
+        </p:spPr>
+        <p:style>
+          <a:lnRef idx="2">
+            <a:schemeClr val="accent1">
+              <a:shade val="15000"/>
+            </a:schemeClr>
+          </a:lnRef>
+          <a:fillRef idx="1">
+            <a:schemeClr val="accent1"/>
+          </a:fillRef>
+          <a:effectRef idx="0">
+            <a:schemeClr val="accent1"/>
+          </a:effectRef>
+          <a:fontRef idx="minor">
+            <a:schemeClr val="lt1"/>
+          </a:fontRef>
+        </p:style>
+        <p:txBody>
+          <a:bodyPr rtlCol="0" anchor="ctr"/>
+          <a:lstStyle/>
+          <a:p>
+            <a:pPr algn="ctr"/>
+            <a:endParaRPr lang="zh-CN" altLang="en-US"/>
+          </a:p>
+        </p:txBody>
+      </p:sp>
+      <p:sp>
+        <p:nvSpPr>
+          <p:cNvPr id="18" name="箭头: 下 17">
+            <a:extLst>
+              <a:ext uri="{FF2B5EF4-FFF2-40B4-BE49-F238E27FC236}">
+                <a16:creationId xmlns:a16="http://schemas.microsoft.com/office/drawing/2014/main" id="{4752BC4D-69BE-70D7-1DE1-FEA1005CEEF3}"/>
+              </a:ext>
+            </a:extLst>
+          </p:cNvPr>
+          <p:cNvSpPr/>
+          <p:nvPr/>
+        </p:nvSpPr>
+        <p:spPr>
+          <a:xfrm>
+            <a:off x="4141315" y="3170143"/>
+            <a:ext cx="317145" cy="622133"/>
+          </a:xfrm>
+          <a:prstGeom prst="downArrow">
+            <a:avLst/>
+          </a:prstGeom>
+          <a:solidFill>
+            <a:schemeClr val="accent5">
+              <a:lumMod val="40000"/>
+              <a:lumOff val="60000"/>
+            </a:schemeClr>
+          </a:solidFill>
+        </p:spPr>
+        <p:style>
+          <a:lnRef idx="2">
+            <a:schemeClr val="accent1">
+              <a:shade val="15000"/>
+            </a:schemeClr>
+          </a:lnRef>
+          <a:fillRef idx="1">
+            <a:schemeClr val="accent1"/>
+          </a:fillRef>
+          <a:effectRef idx="0">
+            <a:schemeClr val="accent1"/>
+          </a:effectRef>
+          <a:fontRef idx="minor">
+            <a:schemeClr val="lt1"/>
+          </a:fontRef>
+        </p:style>
+        <p:txBody>
+          <a:bodyPr rtlCol="0" anchor="ctr"/>
+          <a:lstStyle/>
+          <a:p>
+            <a:pPr algn="ctr"/>
+            <a:endParaRPr lang="zh-CN" altLang="en-US"/>
+          </a:p>
+        </p:txBody>
+      </p:sp>
     </p:spTree>
     <p:extLst>
       <p:ext uri="{BB962C8B-B14F-4D97-AF65-F5344CB8AC3E}">
-        <p14:creationId xmlns:p14="http://schemas.microsoft.com/office/powerpoint/2010/main" val="2859455352"/>
+        <p14:creationId xmlns:p14="http://schemas.microsoft.com/office/powerpoint/2010/main" val="2460576749"/>
       </p:ext>
     </p:extLst>
   </p:cSld>
